--- a/2026cebu-briefing/學員總課表.pptx
+++ b/2026cebu-briefing/學員總課表.pptx
@@ -1150,8 +1150,8 @@
         </p:nvSpPr>
         <p:spPr>
           <a:xfrm>
-            <a:off x="457200" y="1097280"/>
-            <a:ext cx="6583680" cy="1097280"/>
+            <a:off x="457200" y="914400"/>
+            <a:ext cx="6583680" cy="914400"/>
           </a:xfrm>
           <a:prstGeom prst="rect">
             <a:avLst/>
@@ -1186,8 +1186,8 @@
         </p:nvSpPr>
         <p:spPr>
           <a:xfrm>
-            <a:off x="457200" y="2286000"/>
-            <a:ext cx="6583680" cy="548640"/>
+            <a:off x="457200" y="2011680"/>
+            <a:ext cx="6583680" cy="457200"/>
           </a:xfrm>
           <a:prstGeom prst="rect">
             <a:avLst/>
@@ -1222,7 +1222,7 @@
         </p:nvSpPr>
         <p:spPr>
           <a:xfrm>
-            <a:off x="457200" y="2834640"/>
+            <a:off x="457200" y="2560320"/>
             <a:ext cx="6583680" cy="457200"/>
           </a:xfrm>
           <a:prstGeom prst="rect">
@@ -1244,7 +1244,7 @@
                   <a:srgbClr val="888888"/>
                 </a:solidFill>
               </a:rPr>
-              <a:t>師資 10 位（1:1×8 ＋ 團體×2）　學員 15 位</a:t>
+              <a:t>最少師資 9 位：口說 1:1×4 ＋ 寫作 1:1×4 ＋ 團體×1</a:t>
             </a:r>
             <a:endParaRPr lang="en-US" sz="1300" dirty="0"/>
           </a:p>
@@ -1258,7 +1258,7 @@
         </p:nvSpPr>
         <p:spPr>
           <a:xfrm>
-            <a:off x="457200" y="3474720"/>
+            <a:off x="457200" y="3200400"/>
             <a:ext cx="6583680" cy="36576"/>
           </a:xfrm>
           <a:prstGeom prst="rect">
@@ -1278,7 +1278,7 @@
         </p:nvSpPr>
         <p:spPr>
           <a:xfrm>
-            <a:off x="457200" y="3840480"/>
+            <a:off x="457200" y="3474720"/>
             <a:ext cx="6583680" cy="457200"/>
           </a:xfrm>
           <a:prstGeom prst="rect">
@@ -1300,7 +1300,7 @@
                   <a:srgbClr val="0D47A1"/>
                 </a:solidFill>
               </a:rPr>
-              <a:t>每日每人課程配置</a:t>
+              <a:t>每日每人</a:t>
             </a:r>
             <a:endParaRPr lang="en-US" sz="1600" dirty="0"/>
           </a:p>
@@ -1321,7 +1321,7 @@
           </p:nvPr>
         </p:nvGraphicFramePr>
         <p:xfrm>
-          <a:off x="2377440" y="4480560"/>
+          <a:off x="2377440" y="4114800"/>
           <a:ext cx="2743200" cy="914400"/>
         </p:xfrm>
         <a:graphic>
@@ -1333,7 +1333,7 @@
                 <a:gridCol w="640080"/>
                 <a:gridCol w="914400"/>
               </a:tblGrid>
-              <a:tr h="320040">
+              <a:tr h="274320">
                 <a:tc>
                   <a:txBody>
                     <a:bodyPr/>
@@ -1518,7 +1518,7 @@
                   </a:tcPr>
                 </a:tc>
               </a:tr>
-              <a:tr h="320040">
+              <a:tr h="274320">
                 <a:tc>
                   <a:txBody>
                     <a:bodyPr/>
@@ -1533,7 +1533,7 @@
                             <a:srgbClr val="000000"/>
                           </a:solidFill>
                         </a:rPr>
-                        <a:t>1:1 個別</a:t>
+                        <a:t>口說 1:1</a:t>
                       </a:r>
                       <a:endParaRPr lang="en-US" sz="1000" dirty="0"/>
                     </a:p>
@@ -1591,7 +1591,7 @@
                             <a:srgbClr val="000000"/>
                           </a:solidFill>
                         </a:rPr>
-                        <a:t>4 堂</a:t>
+                        <a:t>2 堂</a:t>
                       </a:r>
                       <a:endParaRPr lang="en-US" sz="1000" dirty="0"/>
                     </a:p>
@@ -1649,7 +1649,7 @@
                             <a:srgbClr val="000000"/>
                           </a:solidFill>
                         </a:rPr>
-                        <a:t>200 分</a:t>
+                        <a:t>120 分</a:t>
                       </a:r>
                       <a:endParaRPr lang="en-US" sz="1000" dirty="0"/>
                     </a:p>
@@ -1694,7 +1694,7 @@
                   </a:tcPr>
                 </a:tc>
               </a:tr>
-              <a:tr h="320040">
+              <a:tr h="274320">
                 <a:tc>
                   <a:txBody>
                     <a:bodyPr/>
@@ -1709,7 +1709,7 @@
                             <a:srgbClr val="000000"/>
                           </a:solidFill>
                         </a:rPr>
-                        <a:t>團體課</a:t>
+                        <a:t>寫作 1:1</a:t>
                       </a:r>
                       <a:endParaRPr lang="en-US" sz="1000" dirty="0"/>
                     </a:p>
@@ -1825,7 +1825,7 @@
                             <a:srgbClr val="000000"/>
                           </a:solidFill>
                         </a:rPr>
-                        <a:t>100 分</a:t>
+                        <a:t>120 分</a:t>
                       </a:r>
                       <a:endParaRPr lang="en-US" sz="1000" dirty="0"/>
                     </a:p>
@@ -1870,7 +1870,7 @@
                   </a:tcPr>
                 </a:tc>
               </a:tr>
-              <a:tr h="320040">
+              <a:tr h="274320">
                 <a:tc>
                   <a:txBody>
                     <a:bodyPr/>
@@ -1885,7 +1885,7 @@
                             <a:srgbClr val="000000"/>
                           </a:solidFill>
                         </a:rPr>
-                        <a:t>自修／休息</a:t>
+                        <a:t>團體課</a:t>
                       </a:r>
                       <a:endParaRPr lang="en-US" sz="1000" dirty="0"/>
                     </a:p>
@@ -2001,7 +2001,183 @@
                             <a:srgbClr val="000000"/>
                           </a:solidFill>
                         </a:rPr>
-                        <a:t>100 分</a:t>
+                        <a:t>120 分</a:t>
+                      </a:r>
+                      <a:endParaRPr lang="en-US" sz="1000" dirty="0"/>
+                    </a:p>
+                  </a:txBody>
+                  <a:tcPr marL="50800" marR="50800" marT="25400" marB="25400">
+                    <a:lnL w="6350" cap="flat" cmpd="sng" algn="ctr">
+                      <a:solidFill>
+                        <a:srgbClr val="CCCCCC"/>
+                      </a:solidFill>
+                      <a:prstDash val="solid"/>
+                      <a:round/>
+                      <a:headEnd type="none" w="med" len="med"/>
+                      <a:tailEnd type="none" w="med" len="med"/>
+                    </a:lnL>
+                    <a:lnR w="6350" cap="flat" cmpd="sng" algn="ctr">
+                      <a:solidFill>
+                        <a:srgbClr val="CCCCCC"/>
+                      </a:solidFill>
+                      <a:prstDash val="solid"/>
+                      <a:round/>
+                      <a:headEnd type="none" w="med" len="med"/>
+                      <a:tailEnd type="none" w="med" len="med"/>
+                    </a:lnR>
+                    <a:lnT w="6350" cap="flat" cmpd="sng" algn="ctr">
+                      <a:solidFill>
+                        <a:srgbClr val="CCCCCC"/>
+                      </a:solidFill>
+                      <a:prstDash val="solid"/>
+                      <a:round/>
+                      <a:headEnd type="none" w="med" len="med"/>
+                      <a:tailEnd type="none" w="med" len="med"/>
+                    </a:lnT>
+                    <a:lnB w="6350" cap="flat" cmpd="sng" algn="ctr">
+                      <a:solidFill>
+                        <a:srgbClr val="CCCCCC"/>
+                      </a:solidFill>
+                      <a:prstDash val="solid"/>
+                      <a:round/>
+                      <a:headEnd type="none" w="med" len="med"/>
+                      <a:tailEnd type="none" w="med" len="med"/>
+                    </a:lnB>
+                  </a:tcPr>
+                </a:tc>
+              </a:tr>
+              <a:tr h="274320">
+                <a:tc>
+                  <a:txBody>
+                    <a:bodyPr/>
+                    <a:lstStyle/>
+                    <a:p>
+                      <a:pPr indent="0" marL="0">
+                        <a:buNone/>
+                      </a:pPr>
+                      <a:r>
+                        <a:rPr lang="en-US" sz="1000" dirty="0">
+                          <a:solidFill>
+                            <a:srgbClr val="000000"/>
+                          </a:solidFill>
+                        </a:rPr>
+                        <a:t>自修</a:t>
+                      </a:r>
+                      <a:endParaRPr lang="en-US" sz="1000" dirty="0"/>
+                    </a:p>
+                  </a:txBody>
+                  <a:tcPr marL="50800" marR="50800" marT="25400" marB="25400">
+                    <a:lnL w="6350" cap="flat" cmpd="sng" algn="ctr">
+                      <a:solidFill>
+                        <a:srgbClr val="CCCCCC"/>
+                      </a:solidFill>
+                      <a:prstDash val="solid"/>
+                      <a:round/>
+                      <a:headEnd type="none" w="med" len="med"/>
+                      <a:tailEnd type="none" w="med" len="med"/>
+                    </a:lnL>
+                    <a:lnR w="6350" cap="flat" cmpd="sng" algn="ctr">
+                      <a:solidFill>
+                        <a:srgbClr val="CCCCCC"/>
+                      </a:solidFill>
+                      <a:prstDash val="solid"/>
+                      <a:round/>
+                      <a:headEnd type="none" w="med" len="med"/>
+                      <a:tailEnd type="none" w="med" len="med"/>
+                    </a:lnR>
+                    <a:lnT w="6350" cap="flat" cmpd="sng" algn="ctr">
+                      <a:solidFill>
+                        <a:srgbClr val="CCCCCC"/>
+                      </a:solidFill>
+                      <a:prstDash val="solid"/>
+                      <a:round/>
+                      <a:headEnd type="none" w="med" len="med"/>
+                      <a:tailEnd type="none" w="med" len="med"/>
+                    </a:lnT>
+                    <a:lnB w="6350" cap="flat" cmpd="sng" algn="ctr">
+                      <a:solidFill>
+                        <a:srgbClr val="CCCCCC"/>
+                      </a:solidFill>
+                      <a:prstDash val="solid"/>
+                      <a:round/>
+                      <a:headEnd type="none" w="med" len="med"/>
+                      <a:tailEnd type="none" w="med" len="med"/>
+                    </a:lnB>
+                  </a:tcPr>
+                </a:tc>
+                <a:tc>
+                  <a:txBody>
+                    <a:bodyPr/>
+                    <a:lstStyle/>
+                    <a:p>
+                      <a:pPr indent="0" marL="0">
+                        <a:buNone/>
+                      </a:pPr>
+                      <a:r>
+                        <a:rPr lang="en-US" sz="1000" dirty="0">
+                          <a:solidFill>
+                            <a:srgbClr val="000000"/>
+                          </a:solidFill>
+                        </a:rPr>
+                        <a:t>2 堂</a:t>
+                      </a:r>
+                      <a:endParaRPr lang="en-US" sz="1000" dirty="0"/>
+                    </a:p>
+                  </a:txBody>
+                  <a:tcPr marL="50800" marR="50800" marT="25400" marB="25400">
+                    <a:lnL w="6350" cap="flat" cmpd="sng" algn="ctr">
+                      <a:solidFill>
+                        <a:srgbClr val="CCCCCC"/>
+                      </a:solidFill>
+                      <a:prstDash val="solid"/>
+                      <a:round/>
+                      <a:headEnd type="none" w="med" len="med"/>
+                      <a:tailEnd type="none" w="med" len="med"/>
+                    </a:lnL>
+                    <a:lnR w="6350" cap="flat" cmpd="sng" algn="ctr">
+                      <a:solidFill>
+                        <a:srgbClr val="CCCCCC"/>
+                      </a:solidFill>
+                      <a:prstDash val="solid"/>
+                      <a:round/>
+                      <a:headEnd type="none" w="med" len="med"/>
+                      <a:tailEnd type="none" w="med" len="med"/>
+                    </a:lnR>
+                    <a:lnT w="6350" cap="flat" cmpd="sng" algn="ctr">
+                      <a:solidFill>
+                        <a:srgbClr val="CCCCCC"/>
+                      </a:solidFill>
+                      <a:prstDash val="solid"/>
+                      <a:round/>
+                      <a:headEnd type="none" w="med" len="med"/>
+                      <a:tailEnd type="none" w="med" len="med"/>
+                    </a:lnT>
+                    <a:lnB w="6350" cap="flat" cmpd="sng" algn="ctr">
+                      <a:solidFill>
+                        <a:srgbClr val="CCCCCC"/>
+                      </a:solidFill>
+                      <a:prstDash val="solid"/>
+                      <a:round/>
+                      <a:headEnd type="none" w="med" len="med"/>
+                      <a:tailEnd type="none" w="med" len="med"/>
+                    </a:lnB>
+                  </a:tcPr>
+                </a:tc>
+                <a:tc>
+                  <a:txBody>
+                    <a:bodyPr/>
+                    <a:lstStyle/>
+                    <a:p>
+                      <a:pPr indent="0" marL="0">
+                        <a:buNone/>
+                      </a:pPr>
+                      <a:r>
+                        <a:rPr lang="en-US" sz="1000" dirty="0">
+                          <a:solidFill>
+                            <a:srgbClr val="000000"/>
+                          </a:solidFill>
+                        </a:rPr>
+                        <a:t>120 分</a:t>
                       </a:r>
                       <a:endParaRPr lang="en-US" sz="1000" dirty="0"/>
                     </a:p>
@@ -2058,7 +2234,7 @@
         </p:nvSpPr>
         <p:spPr>
           <a:xfrm>
-            <a:off x="457200" y="5669280"/>
+            <a:off x="457200" y="5943600"/>
             <a:ext cx="6583680" cy="457200"/>
           </a:xfrm>
           <a:prstGeom prst="rect">
@@ -2187,7 +2363,7 @@
                   <a:srgbClr val="0D47A1"/>
                 </a:solidFill>
               </a:rPr>
-              <a:t>⏰ 每日課表（每堂 50 分鐘）</a:t>
+              <a:t>⏰ 每日課表（每堂 60 分鐘）</a:t>
             </a:r>
             <a:endParaRPr lang="en-US" sz="1800" dirty="0"/>
           </a:p>
@@ -2229,6 +2405,42 @@
           </a:p>
         </p:txBody>
       </p:sp>
+      <p:sp>
+        <p:nvSpPr>
+          <p:cNvPr id="4" name="Text 2"/>
+          <p:cNvSpPr/>
+          <p:nvPr/>
+        </p:nvSpPr>
+        <p:spPr>
+          <a:xfrm>
+            <a:off x="274320" y="868680"/>
+            <a:ext cx="6949440" cy="274320"/>
+          </a:xfrm>
+          <a:prstGeom prst="rect">
+            <a:avLst/>
+          </a:prstGeom>
+          <a:noFill/>
+          <a:ln/>
+        </p:spPr>
+        <p:txBody>
+          <a:bodyPr wrap="square" rtlCol="0" anchor="ctr"/>
+          <a:lstStyle/>
+          <a:p>
+            <a:pPr indent="0" marL="0">
+              <a:buNone/>
+            </a:pPr>
+            <a:r>
+              <a:rPr lang="en-US" sz="900" dirty="0">
+                <a:solidFill>
+                  <a:srgbClr val="888888"/>
+                </a:solidFill>
+              </a:rPr>
+              <a:t>每時段口說 1:1（4 位老師）＋ 寫作 1:1（4 位老師）＋ 團體（1 位老師）</a:t>
+            </a:r>
+            <a:endParaRPr lang="en-US" sz="900" dirty="0"/>
+          </a:p>
+        </p:txBody>
+      </p:sp>
       <p:graphicFrame>
         <p:nvGraphicFramePr>
           <p:cNvPr id="3" name="Table 0"/>
@@ -2244,18 +2456,20 @@
           </p:nvPr>
         </p:nvGraphicFramePr>
         <p:xfrm>
-          <a:off x="274320" y="1097280"/>
-          <a:ext cx="6949440" cy="914400"/>
+          <a:off x="137160" y="1280160"/>
+          <a:ext cx="7223760" cy="914400"/>
         </p:xfrm>
         <a:graphic>
           <a:graphicData uri="http://schemas.openxmlformats.org/drawingml/2006/table">
             <a:tbl>
               <a:tblPr/>
               <a:tblGrid>
-                <a:gridCol w="1188720"/>
-                <a:gridCol w="5760720"/>
+                <a:gridCol w="822960"/>
+                <a:gridCol w="2011680"/>
+                <a:gridCol w="2011680"/>
+                <a:gridCol w="1828800"/>
               </a:tblGrid>
-              <a:tr h="594360">
+              <a:tr h="640080">
                 <a:tc>
                   <a:txBody>
                     <a:bodyPr/>
@@ -2265,17 +2479,17 @@
                         <a:buNone/>
                       </a:pPr>
                       <a:r>
-                        <a:rPr lang="en-US" sz="900" b="1" dirty="0">
+                        <a:rPr lang="en-US" sz="800" b="1" dirty="0">
                           <a:solidFill>
                             <a:srgbClr val="FFFFFF"/>
                           </a:solidFill>
                         </a:rPr>
                         <a:t>時段</a:t>
                       </a:r>
-                      <a:endParaRPr lang="en-US" sz="900" dirty="0"/>
-                    </a:p>
-                  </a:txBody>
-                  <a:tcPr marL="76200" marR="76200" marT="25400" marB="25400">
+                      <a:endParaRPr lang="en-US" sz="800" dirty="0"/>
+                    </a:p>
+                  </a:txBody>
+                  <a:tcPr marL="50800" marR="50800" marT="25400" marB="25400">
                     <a:lnL w="5080" cap="flat" cmpd="sng" algn="ctr">
                       <a:solidFill>
                         <a:srgbClr val="CCCCCC"/>
@@ -2331,12 +2545,12 @@
                             <a:srgbClr val="FFFFFF"/>
                           </a:solidFill>
                         </a:rPr>
-                        <a:t>1:1 學員（①③⑤⑦→8人；②④⑥⑧→7人）</a:t>
+                        <a:t>口說 1:1（4 位老師）</a:t>
                       </a:r>
                       <a:endParaRPr lang="en-US" sz="700" dirty="0"/>
                     </a:p>
                   </a:txBody>
-                  <a:tcPr marL="76200" marR="76200" marT="25400" marB="25400">
+                  <a:tcPr marL="50800" marR="50800" marT="25400" marB="25400">
                     <a:lnL w="5080" cap="flat" cmpd="sng" algn="ctr">
                       <a:solidFill>
                         <a:srgbClr val="CCCCCC"/>
@@ -2374,12 +2588,134 @@
                       <a:tailEnd type="none" w="med" len="med"/>
                     </a:lnB>
                     <a:solidFill>
+                      <a:srgbClr val="1B5E20"/>
+                    </a:solidFill>
+                  </a:tcPr>
+                </a:tc>
+                <a:tc>
+                  <a:txBody>
+                    <a:bodyPr/>
+                    <a:lstStyle/>
+                    <a:p>
+                      <a:pPr indent="0" marL="0">
+                        <a:buNone/>
+                      </a:pPr>
+                      <a:r>
+                        <a:rPr lang="en-US" sz="700" b="1" dirty="0">
+                          <a:solidFill>
+                            <a:srgbClr val="FFFFFF"/>
+                          </a:solidFill>
+                        </a:rPr>
+                        <a:t>寫作 1:1（4 位老師）</a:t>
+                      </a:r>
+                      <a:endParaRPr lang="en-US" sz="700" dirty="0"/>
+                    </a:p>
+                  </a:txBody>
+                  <a:tcPr marL="50800" marR="50800" marT="25400" marB="25400">
+                    <a:lnL w="5080" cap="flat" cmpd="sng" algn="ctr">
+                      <a:solidFill>
+                        <a:srgbClr val="CCCCCC"/>
+                      </a:solidFill>
+                      <a:prstDash val="solid"/>
+                      <a:round/>
+                      <a:headEnd type="none" w="med" len="med"/>
+                      <a:tailEnd type="none" w="med" len="med"/>
+                    </a:lnL>
+                    <a:lnR w="5080" cap="flat" cmpd="sng" algn="ctr">
+                      <a:solidFill>
+                        <a:srgbClr val="CCCCCC"/>
+                      </a:solidFill>
+                      <a:prstDash val="solid"/>
+                      <a:round/>
+                      <a:headEnd type="none" w="med" len="med"/>
+                      <a:tailEnd type="none" w="med" len="med"/>
+                    </a:lnR>
+                    <a:lnT w="5080" cap="flat" cmpd="sng" algn="ctr">
+                      <a:solidFill>
+                        <a:srgbClr val="CCCCCC"/>
+                      </a:solidFill>
+                      <a:prstDash val="solid"/>
+                      <a:round/>
+                      <a:headEnd type="none" w="med" len="med"/>
+                      <a:tailEnd type="none" w="med" len="med"/>
+                    </a:lnT>
+                    <a:lnB w="5080" cap="flat" cmpd="sng" algn="ctr">
+                      <a:solidFill>
+                        <a:srgbClr val="CCCCCC"/>
+                      </a:solidFill>
+                      <a:prstDash val="solid"/>
+                      <a:round/>
+                      <a:headEnd type="none" w="med" len="med"/>
+                      <a:tailEnd type="none" w="med" len="med"/>
+                    </a:lnB>
+                    <a:solidFill>
                       <a:srgbClr val="1565C0"/>
                     </a:solidFill>
                   </a:tcPr>
                 </a:tc>
+                <a:tc>
+                  <a:txBody>
+                    <a:bodyPr/>
+                    <a:lstStyle/>
+                    <a:p>
+                      <a:pPr indent="0" marL="0">
+                        <a:buNone/>
+                      </a:pPr>
+                      <a:r>
+                        <a:rPr lang="en-US" sz="700" b="1" dirty="0">
+                          <a:solidFill>
+                            <a:srgbClr val="FFFFFF"/>
+                          </a:solidFill>
+                        </a:rPr>
+                        <a:t>團體（1 位老師）</a:t>
+                      </a:r>
+                      <a:endParaRPr lang="en-US" sz="700" dirty="0"/>
+                    </a:p>
+                  </a:txBody>
+                  <a:tcPr marL="50800" marR="50800" marT="25400" marB="25400">
+                    <a:lnL w="5080" cap="flat" cmpd="sng" algn="ctr">
+                      <a:solidFill>
+                        <a:srgbClr val="CCCCCC"/>
+                      </a:solidFill>
+                      <a:prstDash val="solid"/>
+                      <a:round/>
+                      <a:headEnd type="none" w="med" len="med"/>
+                      <a:tailEnd type="none" w="med" len="med"/>
+                    </a:lnL>
+                    <a:lnR w="5080" cap="flat" cmpd="sng" algn="ctr">
+                      <a:solidFill>
+                        <a:srgbClr val="CCCCCC"/>
+                      </a:solidFill>
+                      <a:prstDash val="solid"/>
+                      <a:round/>
+                      <a:headEnd type="none" w="med" len="med"/>
+                      <a:tailEnd type="none" w="med" len="med"/>
+                    </a:lnR>
+                    <a:lnT w="5080" cap="flat" cmpd="sng" algn="ctr">
+                      <a:solidFill>
+                        <a:srgbClr val="CCCCCC"/>
+                      </a:solidFill>
+                      <a:prstDash val="solid"/>
+                      <a:round/>
+                      <a:headEnd type="none" w="med" len="med"/>
+                      <a:tailEnd type="none" w="med" len="med"/>
+                    </a:lnT>
+                    <a:lnB w="5080" cap="flat" cmpd="sng" algn="ctr">
+                      <a:solidFill>
+                        <a:srgbClr val="CCCCCC"/>
+                      </a:solidFill>
+                      <a:prstDash val="solid"/>
+                      <a:round/>
+                      <a:headEnd type="none" w="med" len="med"/>
+                      <a:tailEnd type="none" w="med" len="med"/>
+                    </a:lnB>
+                    <a:solidFill>
+                      <a:srgbClr val="E65100"/>
+                    </a:solidFill>
+                  </a:tcPr>
+                </a:tc>
               </a:tr>
-              <a:tr h="594360">
+              <a:tr h="640080">
                 <a:tc>
                   <a:txBody>
                     <a:bodyPr/>
@@ -2394,12 +2730,12 @@
                             <a:srgbClr val="0D47A1"/>
                           </a:solidFill>
                         </a:rPr>
-                        <a:t>08:00-08:50</a:t>
+                        <a:t>08:00-09:00</a:t>
                       </a:r>
                       <a:endParaRPr lang="en-US" sz="700" dirty="0"/>
                     </a:p>
                   </a:txBody>
-                  <a:tcPr marL="76200" marR="76200" marT="25400" marB="25400" anchor="ctr">
+                  <a:tcPr marL="50800" marR="50800" marT="25400" marB="25400" anchor="ctr">
                     <a:lnL w="5080" cap="flat" cmpd="sng" algn="ctr">
                       <a:solidFill>
                         <a:srgbClr val="CCCCCC"/>
@@ -2450,17 +2786,17 @@
                         <a:buNone/>
                       </a:pPr>
                       <a:r>
-                        <a:rPr lang="en-US" sz="800" dirty="0">
+                        <a:rPr lang="en-US" sz="700" dirty="0">
                           <a:solidFill>
                             <a:srgbClr val="000000"/>
                           </a:solidFill>
                         </a:rPr>
-                        <a:t>愷晴　愷甯　沛沛　棣　皓宸　皓宇　Alice　奕安</a:t>
-                      </a:r>
-                      <a:endParaRPr lang="en-US" sz="800" dirty="0"/>
-                    </a:p>
-                  </a:txBody>
-                  <a:tcPr marL="76200" marR="76200" marT="25400" marB="25400" anchor="ctr">
+                        <a:t>愷晴　愷甯　沛沛　棣</a:t>
+                      </a:r>
+                      <a:endParaRPr lang="en-US" sz="700" dirty="0"/>
+                    </a:p>
+                  </a:txBody>
+                  <a:tcPr marL="50800" marR="50800" marT="25400" marB="25400" anchor="ctr">
                     <a:lnL w="5080" cap="flat" cmpd="sng" algn="ctr">
                       <a:solidFill>
                         <a:srgbClr val="CCCCCC"/>
@@ -2498,12 +2834,134 @@
                       <a:tailEnd type="none" w="med" len="med"/>
                     </a:lnB>
                     <a:solidFill>
+                      <a:srgbClr val="E8F5E9"/>
+                    </a:solidFill>
+                  </a:tcPr>
+                </a:tc>
+                <a:tc>
+                  <a:txBody>
+                    <a:bodyPr/>
+                    <a:lstStyle/>
+                    <a:p>
+                      <a:pPr algn="ctr" indent="0" marL="0">
+                        <a:buNone/>
+                      </a:pPr>
+                      <a:r>
+                        <a:rPr lang="en-US" sz="700" dirty="0">
+                          <a:solidFill>
+                            <a:srgbClr val="000000"/>
+                          </a:solidFill>
+                        </a:rPr>
+                        <a:t>皓宸　皓宇　Alice　奕安</a:t>
+                      </a:r>
+                      <a:endParaRPr lang="en-US" sz="700" dirty="0"/>
+                    </a:p>
+                  </a:txBody>
+                  <a:tcPr marL="50800" marR="50800" marT="25400" marB="25400" anchor="ctr">
+                    <a:lnL w="5080" cap="flat" cmpd="sng" algn="ctr">
+                      <a:solidFill>
+                        <a:srgbClr val="CCCCCC"/>
+                      </a:solidFill>
+                      <a:prstDash val="solid"/>
+                      <a:round/>
+                      <a:headEnd type="none" w="med" len="med"/>
+                      <a:tailEnd type="none" w="med" len="med"/>
+                    </a:lnL>
+                    <a:lnR w="5080" cap="flat" cmpd="sng" algn="ctr">
+                      <a:solidFill>
+                        <a:srgbClr val="CCCCCC"/>
+                      </a:solidFill>
+                      <a:prstDash val="solid"/>
+                      <a:round/>
+                      <a:headEnd type="none" w="med" len="med"/>
+                      <a:tailEnd type="none" w="med" len="med"/>
+                    </a:lnR>
+                    <a:lnT w="5080" cap="flat" cmpd="sng" algn="ctr">
+                      <a:solidFill>
+                        <a:srgbClr val="CCCCCC"/>
+                      </a:solidFill>
+                      <a:prstDash val="solid"/>
+                      <a:round/>
+                      <a:headEnd type="none" w="med" len="med"/>
+                      <a:tailEnd type="none" w="med" len="med"/>
+                    </a:lnT>
+                    <a:lnB w="5080" cap="flat" cmpd="sng" algn="ctr">
+                      <a:solidFill>
+                        <a:srgbClr val="CCCCCC"/>
+                      </a:solidFill>
+                      <a:prstDash val="solid"/>
+                      <a:round/>
+                      <a:headEnd type="none" w="med" len="med"/>
+                      <a:tailEnd type="none" w="med" len="med"/>
+                    </a:lnB>
+                    <a:solidFill>
                       <a:srgbClr val="E3F2FD"/>
                     </a:solidFill>
                   </a:tcPr>
                 </a:tc>
+                <a:tc>
+                  <a:txBody>
+                    <a:bodyPr/>
+                    <a:lstStyle/>
+                    <a:p>
+                      <a:pPr algn="ctr" indent="0" marL="0">
+                        <a:buNone/>
+                      </a:pPr>
+                      <a:r>
+                        <a:rPr lang="en-US" sz="700" dirty="0">
+                          <a:solidFill>
+                            <a:srgbClr val="000000"/>
+                          </a:solidFill>
+                        </a:rPr>
+                        <a:t>言穆　樂樂　Emily　Johnny　宏森　駿睿　昱臣</a:t>
+                      </a:r>
+                      <a:endParaRPr lang="en-US" sz="700" dirty="0"/>
+                    </a:p>
+                  </a:txBody>
+                  <a:tcPr marL="50800" marR="50800" marT="25400" marB="25400" anchor="ctr">
+                    <a:lnL w="5080" cap="flat" cmpd="sng" algn="ctr">
+                      <a:solidFill>
+                        <a:srgbClr val="CCCCCC"/>
+                      </a:solidFill>
+                      <a:prstDash val="solid"/>
+                      <a:round/>
+                      <a:headEnd type="none" w="med" len="med"/>
+                      <a:tailEnd type="none" w="med" len="med"/>
+                    </a:lnL>
+                    <a:lnR w="5080" cap="flat" cmpd="sng" algn="ctr">
+                      <a:solidFill>
+                        <a:srgbClr val="CCCCCC"/>
+                      </a:solidFill>
+                      <a:prstDash val="solid"/>
+                      <a:round/>
+                      <a:headEnd type="none" w="med" len="med"/>
+                      <a:tailEnd type="none" w="med" len="med"/>
+                    </a:lnR>
+                    <a:lnT w="5080" cap="flat" cmpd="sng" algn="ctr">
+                      <a:solidFill>
+                        <a:srgbClr val="CCCCCC"/>
+                      </a:solidFill>
+                      <a:prstDash val="solid"/>
+                      <a:round/>
+                      <a:headEnd type="none" w="med" len="med"/>
+                      <a:tailEnd type="none" w="med" len="med"/>
+                    </a:lnT>
+                    <a:lnB w="5080" cap="flat" cmpd="sng" algn="ctr">
+                      <a:solidFill>
+                        <a:srgbClr val="CCCCCC"/>
+                      </a:solidFill>
+                      <a:prstDash val="solid"/>
+                      <a:round/>
+                      <a:headEnd type="none" w="med" len="med"/>
+                      <a:tailEnd type="none" w="med" len="med"/>
+                    </a:lnB>
+                    <a:solidFill>
+                      <a:srgbClr val="FCE4EC"/>
+                    </a:solidFill>
+                  </a:tcPr>
+                </a:tc>
               </a:tr>
-              <a:tr h="594360">
+              <a:tr h="640080">
                 <a:tc>
                   <a:txBody>
                     <a:bodyPr/>
@@ -2518,12 +2976,12 @@
                             <a:srgbClr val="0D47A1"/>
                           </a:solidFill>
                         </a:rPr>
-                        <a:t>09:00-09:50</a:t>
+                        <a:t>09:00-10:00</a:t>
                       </a:r>
                       <a:endParaRPr lang="en-US" sz="700" dirty="0"/>
                     </a:p>
                   </a:txBody>
-                  <a:tcPr marL="76200" marR="76200" marT="25400" marB="25400" anchor="ctr">
+                  <a:tcPr marL="50800" marR="50800" marT="25400" marB="25400" anchor="ctr">
                     <a:lnL w="5080" cap="flat" cmpd="sng" algn="ctr">
                       <a:solidFill>
                         <a:srgbClr val="CCCCCC"/>
@@ -2574,17 +3032,139 @@
                         <a:buNone/>
                       </a:pPr>
                       <a:r>
-                        <a:rPr lang="en-US" sz="800" dirty="0">
+                        <a:rPr lang="en-US" sz="700" dirty="0">
                           <a:solidFill>
                             <a:srgbClr val="000000"/>
                           </a:solidFill>
                         </a:rPr>
+                        <a:t>皓宸　皓宇　Alice　奕安</a:t>
+                      </a:r>
+                      <a:endParaRPr lang="en-US" sz="700" dirty="0"/>
+                    </a:p>
+                  </a:txBody>
+                  <a:tcPr marL="50800" marR="50800" marT="25400" marB="25400" anchor="ctr">
+                    <a:lnL w="5080" cap="flat" cmpd="sng" algn="ctr">
+                      <a:solidFill>
+                        <a:srgbClr val="CCCCCC"/>
+                      </a:solidFill>
+                      <a:prstDash val="solid"/>
+                      <a:round/>
+                      <a:headEnd type="none" w="med" len="med"/>
+                      <a:tailEnd type="none" w="med" len="med"/>
+                    </a:lnL>
+                    <a:lnR w="5080" cap="flat" cmpd="sng" algn="ctr">
+                      <a:solidFill>
+                        <a:srgbClr val="CCCCCC"/>
+                      </a:solidFill>
+                      <a:prstDash val="solid"/>
+                      <a:round/>
+                      <a:headEnd type="none" w="med" len="med"/>
+                      <a:tailEnd type="none" w="med" len="med"/>
+                    </a:lnR>
+                    <a:lnT w="5080" cap="flat" cmpd="sng" algn="ctr">
+                      <a:solidFill>
+                        <a:srgbClr val="CCCCCC"/>
+                      </a:solidFill>
+                      <a:prstDash val="solid"/>
+                      <a:round/>
+                      <a:headEnd type="none" w="med" len="med"/>
+                      <a:tailEnd type="none" w="med" len="med"/>
+                    </a:lnT>
+                    <a:lnB w="5080" cap="flat" cmpd="sng" algn="ctr">
+                      <a:solidFill>
+                        <a:srgbClr val="CCCCCC"/>
+                      </a:solidFill>
+                      <a:prstDash val="solid"/>
+                      <a:round/>
+                      <a:headEnd type="none" w="med" len="med"/>
+                      <a:tailEnd type="none" w="med" len="med"/>
+                    </a:lnB>
+                    <a:solidFill>
+                      <a:srgbClr val="E8F5E9"/>
+                    </a:solidFill>
+                  </a:tcPr>
+                </a:tc>
+                <a:tc>
+                  <a:txBody>
+                    <a:bodyPr/>
+                    <a:lstStyle/>
+                    <a:p>
+                      <a:pPr algn="ctr" indent="0" marL="0">
+                        <a:buNone/>
+                      </a:pPr>
+                      <a:r>
+                        <a:rPr lang="en-US" sz="700" dirty="0">
+                          <a:solidFill>
+                            <a:srgbClr val="000000"/>
+                          </a:solidFill>
+                        </a:rPr>
+                        <a:t>愷晴　愷甯　沛沛　棣</a:t>
+                      </a:r>
+                      <a:endParaRPr lang="en-US" sz="700" dirty="0"/>
+                    </a:p>
+                  </a:txBody>
+                  <a:tcPr marL="50800" marR="50800" marT="25400" marB="25400" anchor="ctr">
+                    <a:lnL w="5080" cap="flat" cmpd="sng" algn="ctr">
+                      <a:solidFill>
+                        <a:srgbClr val="CCCCCC"/>
+                      </a:solidFill>
+                      <a:prstDash val="solid"/>
+                      <a:round/>
+                      <a:headEnd type="none" w="med" len="med"/>
+                      <a:tailEnd type="none" w="med" len="med"/>
+                    </a:lnL>
+                    <a:lnR w="5080" cap="flat" cmpd="sng" algn="ctr">
+                      <a:solidFill>
+                        <a:srgbClr val="CCCCCC"/>
+                      </a:solidFill>
+                      <a:prstDash val="solid"/>
+                      <a:round/>
+                      <a:headEnd type="none" w="med" len="med"/>
+                      <a:tailEnd type="none" w="med" len="med"/>
+                    </a:lnR>
+                    <a:lnT w="5080" cap="flat" cmpd="sng" algn="ctr">
+                      <a:solidFill>
+                        <a:srgbClr val="CCCCCC"/>
+                      </a:solidFill>
+                      <a:prstDash val="solid"/>
+                      <a:round/>
+                      <a:headEnd type="none" w="med" len="med"/>
+                      <a:tailEnd type="none" w="med" len="med"/>
+                    </a:lnT>
+                    <a:lnB w="5080" cap="flat" cmpd="sng" algn="ctr">
+                      <a:solidFill>
+                        <a:srgbClr val="CCCCCC"/>
+                      </a:solidFill>
+                      <a:prstDash val="solid"/>
+                      <a:round/>
+                      <a:headEnd type="none" w="med" len="med"/>
+                      <a:tailEnd type="none" w="med" len="med"/>
+                    </a:lnB>
+                    <a:solidFill>
+                      <a:srgbClr val="E3F2FD"/>
+                    </a:solidFill>
+                  </a:tcPr>
+                </a:tc>
+                <a:tc>
+                  <a:txBody>
+                    <a:bodyPr/>
+                    <a:lstStyle/>
+                    <a:p>
+                      <a:pPr algn="ctr" indent="0" marL="0">
+                        <a:buNone/>
+                      </a:pPr>
+                      <a:r>
+                        <a:rPr lang="en-US" sz="700" dirty="0">
+                          <a:solidFill>
+                            <a:srgbClr val="000000"/>
+                          </a:solidFill>
+                        </a:rPr>
                         <a:t>言穆　樂樂　Emily　Johnny　宏森　駿睿　昱臣</a:t>
                       </a:r>
-                      <a:endParaRPr lang="en-US" sz="800" dirty="0"/>
-                    </a:p>
-                  </a:txBody>
-                  <a:tcPr marL="76200" marR="76200" marT="25400" marB="25400" anchor="ctr">
+                      <a:endParaRPr lang="en-US" sz="700" dirty="0"/>
+                    </a:p>
+                  </a:txBody>
+                  <a:tcPr marL="50800" marR="50800" marT="25400" marB="25400" anchor="ctr">
                     <a:lnL w="5080" cap="flat" cmpd="sng" algn="ctr">
                       <a:solidFill>
                         <a:srgbClr val="CCCCCC"/>
@@ -2622,12 +3202,504 @@
                       <a:tailEnd type="none" w="med" len="med"/>
                     </a:lnB>
                     <a:solidFill>
+                      <a:srgbClr val="FCE4EC"/>
+                    </a:solidFill>
+                  </a:tcPr>
+                </a:tc>
+              </a:tr>
+              <a:tr h="640080">
+                <a:tc>
+                  <a:txBody>
+                    <a:bodyPr/>
+                    <a:lstStyle/>
+                    <a:p>
+                      <a:pPr algn="ctr" indent="0" marL="0">
+                        <a:buNone/>
+                      </a:pPr>
+                      <a:r>
+                        <a:rPr lang="en-US" sz="700" b="1" dirty="0">
+                          <a:solidFill>
+                            <a:srgbClr val="0D47A1"/>
+                          </a:solidFill>
+                        </a:rPr>
+                        <a:t>10:00-11:00</a:t>
+                      </a:r>
+                      <a:endParaRPr lang="en-US" sz="700" dirty="0"/>
+                    </a:p>
+                  </a:txBody>
+                  <a:tcPr marL="50800" marR="50800" marT="25400" marB="25400" anchor="ctr">
+                    <a:lnL w="5080" cap="flat" cmpd="sng" algn="ctr">
+                      <a:solidFill>
+                        <a:srgbClr val="CCCCCC"/>
+                      </a:solidFill>
+                      <a:prstDash val="solid"/>
+                      <a:round/>
+                      <a:headEnd type="none" w="med" len="med"/>
+                      <a:tailEnd type="none" w="med" len="med"/>
+                    </a:lnL>
+                    <a:lnR w="5080" cap="flat" cmpd="sng" algn="ctr">
+                      <a:solidFill>
+                        <a:srgbClr val="CCCCCC"/>
+                      </a:solidFill>
+                      <a:prstDash val="solid"/>
+                      <a:round/>
+                      <a:headEnd type="none" w="med" len="med"/>
+                      <a:tailEnd type="none" w="med" len="med"/>
+                    </a:lnR>
+                    <a:lnT w="5080" cap="flat" cmpd="sng" algn="ctr">
+                      <a:solidFill>
+                        <a:srgbClr val="CCCCCC"/>
+                      </a:solidFill>
+                      <a:prstDash val="solid"/>
+                      <a:round/>
+                      <a:headEnd type="none" w="med" len="med"/>
+                      <a:tailEnd type="none" w="med" len="med"/>
+                    </a:lnT>
+                    <a:lnB w="5080" cap="flat" cmpd="sng" algn="ctr">
+                      <a:solidFill>
+                        <a:srgbClr val="CCCCCC"/>
+                      </a:solidFill>
+                      <a:prstDash val="solid"/>
+                      <a:round/>
+                      <a:headEnd type="none" w="med" len="med"/>
+                      <a:tailEnd type="none" w="med" len="med"/>
+                    </a:lnB>
+                    <a:solidFill>
+                      <a:srgbClr val="E3F2FD"/>
+                    </a:solidFill>
+                  </a:tcPr>
+                </a:tc>
+                <a:tc>
+                  <a:txBody>
+                    <a:bodyPr/>
+                    <a:lstStyle/>
+                    <a:p>
+                      <a:pPr algn="ctr" indent="0" marL="0">
+                        <a:buNone/>
+                      </a:pPr>
+                      <a:r>
+                        <a:rPr lang="en-US" sz="700" dirty="0">
+                          <a:solidFill>
+                            <a:srgbClr val="000000"/>
+                          </a:solidFill>
+                        </a:rPr>
+                        <a:t>言穆　樂樂　Emily　Johnny</a:t>
+                      </a:r>
+                      <a:endParaRPr lang="en-US" sz="700" dirty="0"/>
+                    </a:p>
+                  </a:txBody>
+                  <a:tcPr marL="50800" marR="50800" marT="25400" marB="25400" anchor="ctr">
+                    <a:lnL w="5080" cap="flat" cmpd="sng" algn="ctr">
+                      <a:solidFill>
+                        <a:srgbClr val="CCCCCC"/>
+                      </a:solidFill>
+                      <a:prstDash val="solid"/>
+                      <a:round/>
+                      <a:headEnd type="none" w="med" len="med"/>
+                      <a:tailEnd type="none" w="med" len="med"/>
+                    </a:lnL>
+                    <a:lnR w="5080" cap="flat" cmpd="sng" algn="ctr">
+                      <a:solidFill>
+                        <a:srgbClr val="CCCCCC"/>
+                      </a:solidFill>
+                      <a:prstDash val="solid"/>
+                      <a:round/>
+                      <a:headEnd type="none" w="med" len="med"/>
+                      <a:tailEnd type="none" w="med" len="med"/>
+                    </a:lnR>
+                    <a:lnT w="5080" cap="flat" cmpd="sng" algn="ctr">
+                      <a:solidFill>
+                        <a:srgbClr val="CCCCCC"/>
+                      </a:solidFill>
+                      <a:prstDash val="solid"/>
+                      <a:round/>
+                      <a:headEnd type="none" w="med" len="med"/>
+                      <a:tailEnd type="none" w="med" len="med"/>
+                    </a:lnT>
+                    <a:lnB w="5080" cap="flat" cmpd="sng" algn="ctr">
+                      <a:solidFill>
+                        <a:srgbClr val="CCCCCC"/>
+                      </a:solidFill>
+                      <a:prstDash val="solid"/>
+                      <a:round/>
+                      <a:headEnd type="none" w="med" len="med"/>
+                      <a:tailEnd type="none" w="med" len="med"/>
+                    </a:lnB>
+                    <a:solidFill>
+                      <a:srgbClr val="E8F5E9"/>
+                    </a:solidFill>
+                  </a:tcPr>
+                </a:tc>
+                <a:tc>
+                  <a:txBody>
+                    <a:bodyPr/>
+                    <a:lstStyle/>
+                    <a:p>
+                      <a:pPr algn="ctr" indent="0" marL="0">
+                        <a:buNone/>
+                      </a:pPr>
+                      <a:r>
+                        <a:rPr lang="en-US" sz="700" dirty="0">
+                          <a:solidFill>
+                            <a:srgbClr val="000000"/>
+                          </a:solidFill>
+                        </a:rPr>
+                        <a:t>宏森　駿睿　昱臣　愷晴</a:t>
+                      </a:r>
+                      <a:endParaRPr lang="en-US" sz="700" dirty="0"/>
+                    </a:p>
+                  </a:txBody>
+                  <a:tcPr marL="50800" marR="50800" marT="25400" marB="25400" anchor="ctr">
+                    <a:lnL w="5080" cap="flat" cmpd="sng" algn="ctr">
+                      <a:solidFill>
+                        <a:srgbClr val="CCCCCC"/>
+                      </a:solidFill>
+                      <a:prstDash val="solid"/>
+                      <a:round/>
+                      <a:headEnd type="none" w="med" len="med"/>
+                      <a:tailEnd type="none" w="med" len="med"/>
+                    </a:lnL>
+                    <a:lnR w="5080" cap="flat" cmpd="sng" algn="ctr">
+                      <a:solidFill>
+                        <a:srgbClr val="CCCCCC"/>
+                      </a:solidFill>
+                      <a:prstDash val="solid"/>
+                      <a:round/>
+                      <a:headEnd type="none" w="med" len="med"/>
+                      <a:tailEnd type="none" w="med" len="med"/>
+                    </a:lnR>
+                    <a:lnT w="5080" cap="flat" cmpd="sng" algn="ctr">
+                      <a:solidFill>
+                        <a:srgbClr val="CCCCCC"/>
+                      </a:solidFill>
+                      <a:prstDash val="solid"/>
+                      <a:round/>
+                      <a:headEnd type="none" w="med" len="med"/>
+                      <a:tailEnd type="none" w="med" len="med"/>
+                    </a:lnT>
+                    <a:lnB w="5080" cap="flat" cmpd="sng" algn="ctr">
+                      <a:solidFill>
+                        <a:srgbClr val="CCCCCC"/>
+                      </a:solidFill>
+                      <a:prstDash val="solid"/>
+                      <a:round/>
+                      <a:headEnd type="none" w="med" len="med"/>
+                      <a:tailEnd type="none" w="med" len="med"/>
+                    </a:lnB>
+                    <a:solidFill>
+                      <a:srgbClr val="E3F2FD"/>
+                    </a:solidFill>
+                  </a:tcPr>
+                </a:tc>
+                <a:tc>
+                  <a:txBody>
+                    <a:bodyPr/>
+                    <a:lstStyle/>
+                    <a:p>
+                      <a:pPr algn="ctr" indent="0" marL="0">
+                        <a:buNone/>
+                      </a:pPr>
+                      <a:r>
+                        <a:rPr lang="en-US" sz="700" dirty="0">
+                          <a:solidFill>
+                            <a:srgbClr val="000000"/>
+                          </a:solidFill>
+                        </a:rPr>
+                        <a:t>愷甯　沛沛　棣　皓宸　皓宇　Alice　奕安</a:t>
+                      </a:r>
+                      <a:endParaRPr lang="en-US" sz="700" dirty="0"/>
+                    </a:p>
+                  </a:txBody>
+                  <a:tcPr marL="50800" marR="50800" marT="25400" marB="25400" anchor="ctr">
+                    <a:lnL w="5080" cap="flat" cmpd="sng" algn="ctr">
+                      <a:solidFill>
+                        <a:srgbClr val="CCCCCC"/>
+                      </a:solidFill>
+                      <a:prstDash val="solid"/>
+                      <a:round/>
+                      <a:headEnd type="none" w="med" len="med"/>
+                      <a:tailEnd type="none" w="med" len="med"/>
+                    </a:lnL>
+                    <a:lnR w="5080" cap="flat" cmpd="sng" algn="ctr">
+                      <a:solidFill>
+                        <a:srgbClr val="CCCCCC"/>
+                      </a:solidFill>
+                      <a:prstDash val="solid"/>
+                      <a:round/>
+                      <a:headEnd type="none" w="med" len="med"/>
+                      <a:tailEnd type="none" w="med" len="med"/>
+                    </a:lnR>
+                    <a:lnT w="5080" cap="flat" cmpd="sng" algn="ctr">
+                      <a:solidFill>
+                        <a:srgbClr val="CCCCCC"/>
+                      </a:solidFill>
+                      <a:prstDash val="solid"/>
+                      <a:round/>
+                      <a:headEnd type="none" w="med" len="med"/>
+                      <a:tailEnd type="none" w="med" len="med"/>
+                    </a:lnT>
+                    <a:lnB w="5080" cap="flat" cmpd="sng" algn="ctr">
+                      <a:solidFill>
+                        <a:srgbClr val="CCCCCC"/>
+                      </a:solidFill>
+                      <a:prstDash val="solid"/>
+                      <a:round/>
+                      <a:headEnd type="none" w="med" len="med"/>
+                      <a:tailEnd type="none" w="med" len="med"/>
+                    </a:lnB>
+                    <a:solidFill>
+                      <a:srgbClr val="FCE4EC"/>
+                    </a:solidFill>
+                  </a:tcPr>
+                </a:tc>
+              </a:tr>
+              <a:tr h="640080">
+                <a:tc>
+                  <a:txBody>
+                    <a:bodyPr/>
+                    <a:lstStyle/>
+                    <a:p>
+                      <a:pPr algn="ctr" indent="0" marL="0">
+                        <a:buNone/>
+                      </a:pPr>
+                      <a:r>
+                        <a:rPr lang="en-US" sz="700" b="1" dirty="0">
+                          <a:solidFill>
+                            <a:srgbClr val="0D47A1"/>
+                          </a:solidFill>
+                        </a:rPr>
+                        <a:t>11:00-12:00</a:t>
+                      </a:r>
+                      <a:endParaRPr lang="en-US" sz="700" dirty="0"/>
+                    </a:p>
+                  </a:txBody>
+                  <a:tcPr marL="50800" marR="50800" marT="25400" marB="25400" anchor="ctr">
+                    <a:lnL w="5080" cap="flat" cmpd="sng" algn="ctr">
+                      <a:solidFill>
+                        <a:srgbClr val="CCCCCC"/>
+                      </a:solidFill>
+                      <a:prstDash val="solid"/>
+                      <a:round/>
+                      <a:headEnd type="none" w="med" len="med"/>
+                      <a:tailEnd type="none" w="med" len="med"/>
+                    </a:lnL>
+                    <a:lnR w="5080" cap="flat" cmpd="sng" algn="ctr">
+                      <a:solidFill>
+                        <a:srgbClr val="CCCCCC"/>
+                      </a:solidFill>
+                      <a:prstDash val="solid"/>
+                      <a:round/>
+                      <a:headEnd type="none" w="med" len="med"/>
+                      <a:tailEnd type="none" w="med" len="med"/>
+                    </a:lnR>
+                    <a:lnT w="5080" cap="flat" cmpd="sng" algn="ctr">
+                      <a:solidFill>
+                        <a:srgbClr val="CCCCCC"/>
+                      </a:solidFill>
+                      <a:prstDash val="solid"/>
+                      <a:round/>
+                      <a:headEnd type="none" w="med" len="med"/>
+                      <a:tailEnd type="none" w="med" len="med"/>
+                    </a:lnT>
+                    <a:lnB w="5080" cap="flat" cmpd="sng" algn="ctr">
+                      <a:solidFill>
+                        <a:srgbClr val="CCCCCC"/>
+                      </a:solidFill>
+                      <a:prstDash val="solid"/>
+                      <a:round/>
+                      <a:headEnd type="none" w="med" len="med"/>
+                      <a:tailEnd type="none" w="med" len="med"/>
+                    </a:lnB>
+                    <a:solidFill>
                       <a:srgbClr val="F5F5F5"/>
                     </a:solidFill>
                   </a:tcPr>
                 </a:tc>
+                <a:tc>
+                  <a:txBody>
+                    <a:bodyPr/>
+                    <a:lstStyle/>
+                    <a:p>
+                      <a:pPr algn="ctr" indent="0" marL="0">
+                        <a:buNone/>
+                      </a:pPr>
+                      <a:r>
+                        <a:rPr lang="en-US" sz="700" dirty="0">
+                          <a:solidFill>
+                            <a:srgbClr val="000000"/>
+                          </a:solidFill>
+                        </a:rPr>
+                        <a:t>宏森　駿睿　昱臣　愷晴</a:t>
+                      </a:r>
+                      <a:endParaRPr lang="en-US" sz="700" dirty="0"/>
+                    </a:p>
+                  </a:txBody>
+                  <a:tcPr marL="50800" marR="50800" marT="25400" marB="25400" anchor="ctr">
+                    <a:lnL w="5080" cap="flat" cmpd="sng" algn="ctr">
+                      <a:solidFill>
+                        <a:srgbClr val="CCCCCC"/>
+                      </a:solidFill>
+                      <a:prstDash val="solid"/>
+                      <a:round/>
+                      <a:headEnd type="none" w="med" len="med"/>
+                      <a:tailEnd type="none" w="med" len="med"/>
+                    </a:lnL>
+                    <a:lnR w="5080" cap="flat" cmpd="sng" algn="ctr">
+                      <a:solidFill>
+                        <a:srgbClr val="CCCCCC"/>
+                      </a:solidFill>
+                      <a:prstDash val="solid"/>
+                      <a:round/>
+                      <a:headEnd type="none" w="med" len="med"/>
+                      <a:tailEnd type="none" w="med" len="med"/>
+                    </a:lnR>
+                    <a:lnT w="5080" cap="flat" cmpd="sng" algn="ctr">
+                      <a:solidFill>
+                        <a:srgbClr val="CCCCCC"/>
+                      </a:solidFill>
+                      <a:prstDash val="solid"/>
+                      <a:round/>
+                      <a:headEnd type="none" w="med" len="med"/>
+                      <a:tailEnd type="none" w="med" len="med"/>
+                    </a:lnT>
+                    <a:lnB w="5080" cap="flat" cmpd="sng" algn="ctr">
+                      <a:solidFill>
+                        <a:srgbClr val="CCCCCC"/>
+                      </a:solidFill>
+                      <a:prstDash val="solid"/>
+                      <a:round/>
+                      <a:headEnd type="none" w="med" len="med"/>
+                      <a:tailEnd type="none" w="med" len="med"/>
+                    </a:lnB>
+                    <a:solidFill>
+                      <a:srgbClr val="E8F5E9"/>
+                    </a:solidFill>
+                  </a:tcPr>
+                </a:tc>
+                <a:tc>
+                  <a:txBody>
+                    <a:bodyPr/>
+                    <a:lstStyle/>
+                    <a:p>
+                      <a:pPr algn="ctr" indent="0" marL="0">
+                        <a:buNone/>
+                      </a:pPr>
+                      <a:r>
+                        <a:rPr lang="en-US" sz="700" dirty="0">
+                          <a:solidFill>
+                            <a:srgbClr val="000000"/>
+                          </a:solidFill>
+                        </a:rPr>
+                        <a:t>言穆　樂樂　Emily　Johnny</a:t>
+                      </a:r>
+                      <a:endParaRPr lang="en-US" sz="700" dirty="0"/>
+                    </a:p>
+                  </a:txBody>
+                  <a:tcPr marL="50800" marR="50800" marT="25400" marB="25400" anchor="ctr">
+                    <a:lnL w="5080" cap="flat" cmpd="sng" algn="ctr">
+                      <a:solidFill>
+                        <a:srgbClr val="CCCCCC"/>
+                      </a:solidFill>
+                      <a:prstDash val="solid"/>
+                      <a:round/>
+                      <a:headEnd type="none" w="med" len="med"/>
+                      <a:tailEnd type="none" w="med" len="med"/>
+                    </a:lnL>
+                    <a:lnR w="5080" cap="flat" cmpd="sng" algn="ctr">
+                      <a:solidFill>
+                        <a:srgbClr val="CCCCCC"/>
+                      </a:solidFill>
+                      <a:prstDash val="solid"/>
+                      <a:round/>
+                      <a:headEnd type="none" w="med" len="med"/>
+                      <a:tailEnd type="none" w="med" len="med"/>
+                    </a:lnR>
+                    <a:lnT w="5080" cap="flat" cmpd="sng" algn="ctr">
+                      <a:solidFill>
+                        <a:srgbClr val="CCCCCC"/>
+                      </a:solidFill>
+                      <a:prstDash val="solid"/>
+                      <a:round/>
+                      <a:headEnd type="none" w="med" len="med"/>
+                      <a:tailEnd type="none" w="med" len="med"/>
+                    </a:lnT>
+                    <a:lnB w="5080" cap="flat" cmpd="sng" algn="ctr">
+                      <a:solidFill>
+                        <a:srgbClr val="CCCCCC"/>
+                      </a:solidFill>
+                      <a:prstDash val="solid"/>
+                      <a:round/>
+                      <a:headEnd type="none" w="med" len="med"/>
+                      <a:tailEnd type="none" w="med" len="med"/>
+                    </a:lnB>
+                    <a:solidFill>
+                      <a:srgbClr val="E3F2FD"/>
+                    </a:solidFill>
+                  </a:tcPr>
+                </a:tc>
+                <a:tc>
+                  <a:txBody>
+                    <a:bodyPr/>
+                    <a:lstStyle/>
+                    <a:p>
+                      <a:pPr algn="ctr" indent="0" marL="0">
+                        <a:buNone/>
+                      </a:pPr>
+                      <a:r>
+                        <a:rPr lang="en-US" sz="700" dirty="0">
+                          <a:solidFill>
+                            <a:srgbClr val="000000"/>
+                          </a:solidFill>
+                        </a:rPr>
+                        <a:t>愷甯　沛沛　棣　皓宸　皓宇　Alice　奕安</a:t>
+                      </a:r>
+                      <a:endParaRPr lang="en-US" sz="700" dirty="0"/>
+                    </a:p>
+                  </a:txBody>
+                  <a:tcPr marL="50800" marR="50800" marT="25400" marB="25400" anchor="ctr">
+                    <a:lnL w="5080" cap="flat" cmpd="sng" algn="ctr">
+                      <a:solidFill>
+                        <a:srgbClr val="CCCCCC"/>
+                      </a:solidFill>
+                      <a:prstDash val="solid"/>
+                      <a:round/>
+                      <a:headEnd type="none" w="med" len="med"/>
+                      <a:tailEnd type="none" w="med" len="med"/>
+                    </a:lnL>
+                    <a:lnR w="5080" cap="flat" cmpd="sng" algn="ctr">
+                      <a:solidFill>
+                        <a:srgbClr val="CCCCCC"/>
+                      </a:solidFill>
+                      <a:prstDash val="solid"/>
+                      <a:round/>
+                      <a:headEnd type="none" w="med" len="med"/>
+                      <a:tailEnd type="none" w="med" len="med"/>
+                    </a:lnR>
+                    <a:lnT w="5080" cap="flat" cmpd="sng" algn="ctr">
+                      <a:solidFill>
+                        <a:srgbClr val="CCCCCC"/>
+                      </a:solidFill>
+                      <a:prstDash val="solid"/>
+                      <a:round/>
+                      <a:headEnd type="none" w="med" len="med"/>
+                      <a:tailEnd type="none" w="med" len="med"/>
+                    </a:lnT>
+                    <a:lnB w="5080" cap="flat" cmpd="sng" algn="ctr">
+                      <a:solidFill>
+                        <a:srgbClr val="CCCCCC"/>
+                      </a:solidFill>
+                      <a:prstDash val="solid"/>
+                      <a:round/>
+                      <a:headEnd type="none" w="med" len="med"/>
+                      <a:tailEnd type="none" w="med" len="med"/>
+                    </a:lnB>
+                    <a:solidFill>
+                      <a:srgbClr val="FCE4EC"/>
+                    </a:solidFill>
+                  </a:tcPr>
+                </a:tc>
               </a:tr>
-              <a:tr h="594360">
+              <a:tr h="640080">
                 <a:tc>
                   <a:txBody>
                     <a:bodyPr/>
@@ -2642,12 +3714,12 @@
                             <a:srgbClr val="0D47A1"/>
                           </a:solidFill>
                         </a:rPr>
-                        <a:t>10:00-10:50</a:t>
+                        <a:t>13:00-14:00</a:t>
                       </a:r>
                       <a:endParaRPr lang="en-US" sz="700" dirty="0"/>
                     </a:p>
                   </a:txBody>
-                  <a:tcPr marL="76200" marR="76200" marT="25400" marB="25400" anchor="ctr">
+                  <a:tcPr marL="50800" marR="50800" marT="25400" marB="25400" anchor="ctr">
                     <a:lnL w="5080" cap="flat" cmpd="sng" algn="ctr">
                       <a:solidFill>
                         <a:srgbClr val="CCCCCC"/>
@@ -2685,6 +3757,128 @@
                       <a:tailEnd type="none" w="med" len="med"/>
                     </a:lnB>
                     <a:solidFill>
+                      <a:srgbClr val="FFF3E0"/>
+                    </a:solidFill>
+                  </a:tcPr>
+                </a:tc>
+                <a:tc>
+                  <a:txBody>
+                    <a:bodyPr/>
+                    <a:lstStyle/>
+                    <a:p>
+                      <a:pPr algn="ctr" indent="0" marL="0">
+                        <a:buNone/>
+                      </a:pPr>
+                      <a:r>
+                        <a:rPr lang="en-US" sz="700" dirty="0">
+                          <a:solidFill>
+                            <a:srgbClr val="000000"/>
+                          </a:solidFill>
+                        </a:rPr>
+                        <a:t>愷甯　沛沛　棣　皓宸</a:t>
+                      </a:r>
+                      <a:endParaRPr lang="en-US" sz="700" dirty="0"/>
+                    </a:p>
+                  </a:txBody>
+                  <a:tcPr marL="50800" marR="50800" marT="25400" marB="25400" anchor="ctr">
+                    <a:lnL w="5080" cap="flat" cmpd="sng" algn="ctr">
+                      <a:solidFill>
+                        <a:srgbClr val="CCCCCC"/>
+                      </a:solidFill>
+                      <a:prstDash val="solid"/>
+                      <a:round/>
+                      <a:headEnd type="none" w="med" len="med"/>
+                      <a:tailEnd type="none" w="med" len="med"/>
+                    </a:lnL>
+                    <a:lnR w="5080" cap="flat" cmpd="sng" algn="ctr">
+                      <a:solidFill>
+                        <a:srgbClr val="CCCCCC"/>
+                      </a:solidFill>
+                      <a:prstDash val="solid"/>
+                      <a:round/>
+                      <a:headEnd type="none" w="med" len="med"/>
+                      <a:tailEnd type="none" w="med" len="med"/>
+                    </a:lnR>
+                    <a:lnT w="5080" cap="flat" cmpd="sng" algn="ctr">
+                      <a:solidFill>
+                        <a:srgbClr val="CCCCCC"/>
+                      </a:solidFill>
+                      <a:prstDash val="solid"/>
+                      <a:round/>
+                      <a:headEnd type="none" w="med" len="med"/>
+                      <a:tailEnd type="none" w="med" len="med"/>
+                    </a:lnT>
+                    <a:lnB w="5080" cap="flat" cmpd="sng" algn="ctr">
+                      <a:solidFill>
+                        <a:srgbClr val="CCCCCC"/>
+                      </a:solidFill>
+                      <a:prstDash val="solid"/>
+                      <a:round/>
+                      <a:headEnd type="none" w="med" len="med"/>
+                      <a:tailEnd type="none" w="med" len="med"/>
+                    </a:lnB>
+                    <a:solidFill>
+                      <a:srgbClr val="E8F5E9"/>
+                    </a:solidFill>
+                  </a:tcPr>
+                </a:tc>
+                <a:tc>
+                  <a:txBody>
+                    <a:bodyPr/>
+                    <a:lstStyle/>
+                    <a:p>
+                      <a:pPr algn="ctr" indent="0" marL="0">
+                        <a:buNone/>
+                      </a:pPr>
+                      <a:r>
+                        <a:rPr lang="en-US" sz="700" dirty="0">
+                          <a:solidFill>
+                            <a:srgbClr val="000000"/>
+                          </a:solidFill>
+                        </a:rPr>
+                        <a:t>皓宇　Alice　奕安　言穆</a:t>
+                      </a:r>
+                      <a:endParaRPr lang="en-US" sz="700" dirty="0"/>
+                    </a:p>
+                  </a:txBody>
+                  <a:tcPr marL="50800" marR="50800" marT="25400" marB="25400" anchor="ctr">
+                    <a:lnL w="5080" cap="flat" cmpd="sng" algn="ctr">
+                      <a:solidFill>
+                        <a:srgbClr val="CCCCCC"/>
+                      </a:solidFill>
+                      <a:prstDash val="solid"/>
+                      <a:round/>
+                      <a:headEnd type="none" w="med" len="med"/>
+                      <a:tailEnd type="none" w="med" len="med"/>
+                    </a:lnL>
+                    <a:lnR w="5080" cap="flat" cmpd="sng" algn="ctr">
+                      <a:solidFill>
+                        <a:srgbClr val="CCCCCC"/>
+                      </a:solidFill>
+                      <a:prstDash val="solid"/>
+                      <a:round/>
+                      <a:headEnd type="none" w="med" len="med"/>
+                      <a:tailEnd type="none" w="med" len="med"/>
+                    </a:lnR>
+                    <a:lnT w="5080" cap="flat" cmpd="sng" algn="ctr">
+                      <a:solidFill>
+                        <a:srgbClr val="CCCCCC"/>
+                      </a:solidFill>
+                      <a:prstDash val="solid"/>
+                      <a:round/>
+                      <a:headEnd type="none" w="med" len="med"/>
+                      <a:tailEnd type="none" w="med" len="med"/>
+                    </a:lnT>
+                    <a:lnB w="5080" cap="flat" cmpd="sng" algn="ctr">
+                      <a:solidFill>
+                        <a:srgbClr val="CCCCCC"/>
+                      </a:solidFill>
+                      <a:prstDash val="solid"/>
+                      <a:round/>
+                      <a:headEnd type="none" w="med" len="med"/>
+                      <a:tailEnd type="none" w="med" len="med"/>
+                    </a:lnB>
+                    <a:solidFill>
                       <a:srgbClr val="E3F2FD"/>
                     </a:solidFill>
                   </a:tcPr>
@@ -2698,17 +3892,17 @@
                         <a:buNone/>
                       </a:pPr>
                       <a:r>
-                        <a:rPr lang="en-US" sz="800" dirty="0">
+                        <a:rPr lang="en-US" sz="700" dirty="0">
                           <a:solidFill>
                             <a:srgbClr val="000000"/>
                           </a:solidFill>
                         </a:rPr>
-                        <a:t>愷晴　愷甯　沛沛　棣　皓宸　皓宇　Alice　奕安</a:t>
-                      </a:r>
-                      <a:endParaRPr lang="en-US" sz="800" dirty="0"/>
-                    </a:p>
-                  </a:txBody>
-                  <a:tcPr marL="76200" marR="76200" marT="25400" marB="25400" anchor="ctr">
+                        <a:t>愷晴　樂樂　Emily　Johnny　宏森　駿睿　昱臣</a:t>
+                      </a:r>
+                      <a:endParaRPr lang="en-US" sz="700" dirty="0"/>
+                    </a:p>
+                  </a:txBody>
+                  <a:tcPr marL="50800" marR="50800" marT="25400" marB="25400" anchor="ctr">
                     <a:lnL w="5080" cap="flat" cmpd="sng" algn="ctr">
                       <a:solidFill>
                         <a:srgbClr val="CCCCCC"/>
@@ -2746,12 +3940,258 @@
                       <a:tailEnd type="none" w="med" len="med"/>
                     </a:lnB>
                     <a:solidFill>
+                      <a:srgbClr val="FCE4EC"/>
+                    </a:solidFill>
+                  </a:tcPr>
+                </a:tc>
+              </a:tr>
+              <a:tr h="640080">
+                <a:tc>
+                  <a:txBody>
+                    <a:bodyPr/>
+                    <a:lstStyle/>
+                    <a:p>
+                      <a:pPr algn="ctr" indent="0" marL="0">
+                        <a:buNone/>
+                      </a:pPr>
+                      <a:r>
+                        <a:rPr lang="en-US" sz="700" b="1" dirty="0">
+                          <a:solidFill>
+                            <a:srgbClr val="0D47A1"/>
+                          </a:solidFill>
+                        </a:rPr>
+                        <a:t>14:00-15:00</a:t>
+                      </a:r>
+                      <a:endParaRPr lang="en-US" sz="700" dirty="0"/>
+                    </a:p>
+                  </a:txBody>
+                  <a:tcPr marL="50800" marR="50800" marT="25400" marB="25400" anchor="ctr">
+                    <a:lnL w="5080" cap="flat" cmpd="sng" algn="ctr">
+                      <a:solidFill>
+                        <a:srgbClr val="CCCCCC"/>
+                      </a:solidFill>
+                      <a:prstDash val="solid"/>
+                      <a:round/>
+                      <a:headEnd type="none" w="med" len="med"/>
+                      <a:tailEnd type="none" w="med" len="med"/>
+                    </a:lnL>
+                    <a:lnR w="5080" cap="flat" cmpd="sng" algn="ctr">
+                      <a:solidFill>
+                        <a:srgbClr val="CCCCCC"/>
+                      </a:solidFill>
+                      <a:prstDash val="solid"/>
+                      <a:round/>
+                      <a:headEnd type="none" w="med" len="med"/>
+                      <a:tailEnd type="none" w="med" len="med"/>
+                    </a:lnR>
+                    <a:lnT w="5080" cap="flat" cmpd="sng" algn="ctr">
+                      <a:solidFill>
+                        <a:srgbClr val="CCCCCC"/>
+                      </a:solidFill>
+                      <a:prstDash val="solid"/>
+                      <a:round/>
+                      <a:headEnd type="none" w="med" len="med"/>
+                      <a:tailEnd type="none" w="med" len="med"/>
+                    </a:lnT>
+                    <a:lnB w="5080" cap="flat" cmpd="sng" algn="ctr">
+                      <a:solidFill>
+                        <a:srgbClr val="CCCCCC"/>
+                      </a:solidFill>
+                      <a:prstDash val="solid"/>
+                      <a:round/>
+                      <a:headEnd type="none" w="med" len="med"/>
+                      <a:tailEnd type="none" w="med" len="med"/>
+                    </a:lnB>
+                    <a:solidFill>
+                      <a:srgbClr val="F5F5F5"/>
+                    </a:solidFill>
+                  </a:tcPr>
+                </a:tc>
+                <a:tc>
+                  <a:txBody>
+                    <a:bodyPr/>
+                    <a:lstStyle/>
+                    <a:p>
+                      <a:pPr algn="ctr" indent="0" marL="0">
+                        <a:buNone/>
+                      </a:pPr>
+                      <a:r>
+                        <a:rPr lang="en-US" sz="700" dirty="0">
+                          <a:solidFill>
+                            <a:srgbClr val="000000"/>
+                          </a:solidFill>
+                        </a:rPr>
+                        <a:t>皓宇　Alice　奕安</a:t>
+                      </a:r>
+                      <a:endParaRPr lang="en-US" sz="700" dirty="0"/>
+                    </a:p>
+                  </a:txBody>
+                  <a:tcPr marL="50800" marR="50800" marT="25400" marB="25400" anchor="ctr">
+                    <a:lnL w="5080" cap="flat" cmpd="sng" algn="ctr">
+                      <a:solidFill>
+                        <a:srgbClr val="CCCCCC"/>
+                      </a:solidFill>
+                      <a:prstDash val="solid"/>
+                      <a:round/>
+                      <a:headEnd type="none" w="med" len="med"/>
+                      <a:tailEnd type="none" w="med" len="med"/>
+                    </a:lnL>
+                    <a:lnR w="5080" cap="flat" cmpd="sng" algn="ctr">
+                      <a:solidFill>
+                        <a:srgbClr val="CCCCCC"/>
+                      </a:solidFill>
+                      <a:prstDash val="solid"/>
+                      <a:round/>
+                      <a:headEnd type="none" w="med" len="med"/>
+                      <a:tailEnd type="none" w="med" len="med"/>
+                    </a:lnR>
+                    <a:lnT w="5080" cap="flat" cmpd="sng" algn="ctr">
+                      <a:solidFill>
+                        <a:srgbClr val="CCCCCC"/>
+                      </a:solidFill>
+                      <a:prstDash val="solid"/>
+                      <a:round/>
+                      <a:headEnd type="none" w="med" len="med"/>
+                      <a:tailEnd type="none" w="med" len="med"/>
+                    </a:lnT>
+                    <a:lnB w="5080" cap="flat" cmpd="sng" algn="ctr">
+                      <a:solidFill>
+                        <a:srgbClr val="CCCCCC"/>
+                      </a:solidFill>
+                      <a:prstDash val="solid"/>
+                      <a:round/>
+                      <a:headEnd type="none" w="med" len="med"/>
+                      <a:tailEnd type="none" w="med" len="med"/>
+                    </a:lnB>
+                    <a:solidFill>
+                      <a:srgbClr val="E8F5E9"/>
+                    </a:solidFill>
+                  </a:tcPr>
+                </a:tc>
+                <a:tc>
+                  <a:txBody>
+                    <a:bodyPr/>
+                    <a:lstStyle/>
+                    <a:p>
+                      <a:pPr algn="ctr" indent="0" marL="0">
+                        <a:buNone/>
+                      </a:pPr>
+                      <a:r>
+                        <a:rPr lang="en-US" sz="700" dirty="0">
+                          <a:solidFill>
+                            <a:srgbClr val="000000"/>
+                          </a:solidFill>
+                        </a:rPr>
+                        <a:t>愷甯　沛沛　棣</a:t>
+                      </a:r>
+                      <a:endParaRPr lang="en-US" sz="700" dirty="0"/>
+                    </a:p>
+                  </a:txBody>
+                  <a:tcPr marL="50800" marR="50800" marT="25400" marB="25400" anchor="ctr">
+                    <a:lnL w="5080" cap="flat" cmpd="sng" algn="ctr">
+                      <a:solidFill>
+                        <a:srgbClr val="CCCCCC"/>
+                      </a:solidFill>
+                      <a:prstDash val="solid"/>
+                      <a:round/>
+                      <a:headEnd type="none" w="med" len="med"/>
+                      <a:tailEnd type="none" w="med" len="med"/>
+                    </a:lnL>
+                    <a:lnR w="5080" cap="flat" cmpd="sng" algn="ctr">
+                      <a:solidFill>
+                        <a:srgbClr val="CCCCCC"/>
+                      </a:solidFill>
+                      <a:prstDash val="solid"/>
+                      <a:round/>
+                      <a:headEnd type="none" w="med" len="med"/>
+                      <a:tailEnd type="none" w="med" len="med"/>
+                    </a:lnR>
+                    <a:lnT w="5080" cap="flat" cmpd="sng" algn="ctr">
+                      <a:solidFill>
+                        <a:srgbClr val="CCCCCC"/>
+                      </a:solidFill>
+                      <a:prstDash val="solid"/>
+                      <a:round/>
+                      <a:headEnd type="none" w="med" len="med"/>
+                      <a:tailEnd type="none" w="med" len="med"/>
+                    </a:lnT>
+                    <a:lnB w="5080" cap="flat" cmpd="sng" algn="ctr">
+                      <a:solidFill>
+                        <a:srgbClr val="CCCCCC"/>
+                      </a:solidFill>
+                      <a:prstDash val="solid"/>
+                      <a:round/>
+                      <a:headEnd type="none" w="med" len="med"/>
+                      <a:tailEnd type="none" w="med" len="med"/>
+                    </a:lnB>
+                    <a:solidFill>
                       <a:srgbClr val="E3F2FD"/>
                     </a:solidFill>
                   </a:tcPr>
                 </a:tc>
+                <a:tc>
+                  <a:txBody>
+                    <a:bodyPr/>
+                    <a:lstStyle/>
+                    <a:p>
+                      <a:pPr algn="ctr" indent="0" marL="0">
+                        <a:buNone/>
+                      </a:pPr>
+                      <a:r>
+                        <a:rPr lang="en-US" sz="700" dirty="0">
+                          <a:solidFill>
+                            <a:srgbClr val="000000"/>
+                          </a:solidFill>
+                        </a:rPr>
+                        <a:t>愷晴　皓宸　言穆　樂樂　Emily　Johnny　宏森　駿睿　昱臣</a:t>
+                      </a:r>
+                      <a:endParaRPr lang="en-US" sz="700" dirty="0"/>
+                    </a:p>
+                  </a:txBody>
+                  <a:tcPr marL="50800" marR="50800" marT="25400" marB="25400" anchor="ctr">
+                    <a:lnL w="5080" cap="flat" cmpd="sng" algn="ctr">
+                      <a:solidFill>
+                        <a:srgbClr val="CCCCCC"/>
+                      </a:solidFill>
+                      <a:prstDash val="solid"/>
+                      <a:round/>
+                      <a:headEnd type="none" w="med" len="med"/>
+                      <a:tailEnd type="none" w="med" len="med"/>
+                    </a:lnL>
+                    <a:lnR w="5080" cap="flat" cmpd="sng" algn="ctr">
+                      <a:solidFill>
+                        <a:srgbClr val="CCCCCC"/>
+                      </a:solidFill>
+                      <a:prstDash val="solid"/>
+                      <a:round/>
+                      <a:headEnd type="none" w="med" len="med"/>
+                      <a:tailEnd type="none" w="med" len="med"/>
+                    </a:lnR>
+                    <a:lnT w="5080" cap="flat" cmpd="sng" algn="ctr">
+                      <a:solidFill>
+                        <a:srgbClr val="CCCCCC"/>
+                      </a:solidFill>
+                      <a:prstDash val="solid"/>
+                      <a:round/>
+                      <a:headEnd type="none" w="med" len="med"/>
+                      <a:tailEnd type="none" w="med" len="med"/>
+                    </a:lnT>
+                    <a:lnB w="5080" cap="flat" cmpd="sng" algn="ctr">
+                      <a:solidFill>
+                        <a:srgbClr val="CCCCCC"/>
+                      </a:solidFill>
+                      <a:prstDash val="solid"/>
+                      <a:round/>
+                      <a:headEnd type="none" w="med" len="med"/>
+                      <a:tailEnd type="none" w="med" len="med"/>
+                    </a:lnB>
+                    <a:solidFill>
+                      <a:srgbClr val="FCE4EC"/>
+                    </a:solidFill>
+                  </a:tcPr>
+                </a:tc>
               </a:tr>
-              <a:tr h="594360">
+              <a:tr h="640080">
                 <a:tc>
                   <a:txBody>
                     <a:bodyPr/>
@@ -2766,12 +4206,12 @@
                             <a:srgbClr val="0D47A1"/>
                           </a:solidFill>
                         </a:rPr>
-                        <a:t>11:00-11:50</a:t>
+                        <a:t>15:00-16:00</a:t>
                       </a:r>
                       <a:endParaRPr lang="en-US" sz="700" dirty="0"/>
                     </a:p>
                   </a:txBody>
-                  <a:tcPr marL="76200" marR="76200" marT="25400" marB="25400" anchor="ctr">
+                  <a:tcPr marL="50800" marR="50800" marT="25400" marB="25400" anchor="ctr">
                     <a:lnL w="5080" cap="flat" cmpd="sng" algn="ctr">
                       <a:solidFill>
                         <a:srgbClr val="CCCCCC"/>
@@ -2809,6 +4249,252 @@
                       <a:tailEnd type="none" w="med" len="med"/>
                     </a:lnB>
                     <a:solidFill>
+                      <a:srgbClr val="E3F2FD"/>
+                    </a:solidFill>
+                  </a:tcPr>
+                </a:tc>
+                <a:tc>
+                  <a:txBody>
+                    <a:bodyPr/>
+                    <a:lstStyle/>
+                    <a:p>
+                      <a:pPr algn="ctr" indent="0" marL="0">
+                        <a:buNone/>
+                      </a:pPr>
+                      <a:r>
+                        <a:rPr lang="en-US" sz="700" dirty="0">
+                          <a:solidFill>
+                            <a:srgbClr val="000000"/>
+                          </a:solidFill>
+                        </a:rPr>
+                        <a:t>言穆　樂樂　Emily　Johnny</a:t>
+                      </a:r>
+                      <a:endParaRPr lang="en-US" sz="700" dirty="0"/>
+                    </a:p>
+                  </a:txBody>
+                  <a:tcPr marL="50800" marR="50800" marT="25400" marB="25400" anchor="ctr">
+                    <a:lnL w="5080" cap="flat" cmpd="sng" algn="ctr">
+                      <a:solidFill>
+                        <a:srgbClr val="CCCCCC"/>
+                      </a:solidFill>
+                      <a:prstDash val="solid"/>
+                      <a:round/>
+                      <a:headEnd type="none" w="med" len="med"/>
+                      <a:tailEnd type="none" w="med" len="med"/>
+                    </a:lnL>
+                    <a:lnR w="5080" cap="flat" cmpd="sng" algn="ctr">
+                      <a:solidFill>
+                        <a:srgbClr val="CCCCCC"/>
+                      </a:solidFill>
+                      <a:prstDash val="solid"/>
+                      <a:round/>
+                      <a:headEnd type="none" w="med" len="med"/>
+                      <a:tailEnd type="none" w="med" len="med"/>
+                    </a:lnR>
+                    <a:lnT w="5080" cap="flat" cmpd="sng" algn="ctr">
+                      <a:solidFill>
+                        <a:srgbClr val="CCCCCC"/>
+                      </a:solidFill>
+                      <a:prstDash val="solid"/>
+                      <a:round/>
+                      <a:headEnd type="none" w="med" len="med"/>
+                      <a:tailEnd type="none" w="med" len="med"/>
+                    </a:lnT>
+                    <a:lnB w="5080" cap="flat" cmpd="sng" algn="ctr">
+                      <a:solidFill>
+                        <a:srgbClr val="CCCCCC"/>
+                      </a:solidFill>
+                      <a:prstDash val="solid"/>
+                      <a:round/>
+                      <a:headEnd type="none" w="med" len="med"/>
+                      <a:tailEnd type="none" w="med" len="med"/>
+                    </a:lnB>
+                    <a:solidFill>
+                      <a:srgbClr val="E8F5E9"/>
+                    </a:solidFill>
+                  </a:tcPr>
+                </a:tc>
+                <a:tc>
+                  <a:txBody>
+                    <a:bodyPr/>
+                    <a:lstStyle/>
+                    <a:p>
+                      <a:pPr algn="ctr" indent="0" marL="0">
+                        <a:buNone/>
+                      </a:pPr>
+                      <a:r>
+                        <a:rPr lang="en-US" sz="700" dirty="0">
+                          <a:solidFill>
+                            <a:srgbClr val="000000"/>
+                          </a:solidFill>
+                        </a:rPr>
+                        <a:t>皓宸　宏森　駿睿　昱臣</a:t>
+                      </a:r>
+                      <a:endParaRPr lang="en-US" sz="700" dirty="0"/>
+                    </a:p>
+                  </a:txBody>
+                  <a:tcPr marL="50800" marR="50800" marT="25400" marB="25400" anchor="ctr">
+                    <a:lnL w="5080" cap="flat" cmpd="sng" algn="ctr">
+                      <a:solidFill>
+                        <a:srgbClr val="CCCCCC"/>
+                      </a:solidFill>
+                      <a:prstDash val="solid"/>
+                      <a:round/>
+                      <a:headEnd type="none" w="med" len="med"/>
+                      <a:tailEnd type="none" w="med" len="med"/>
+                    </a:lnL>
+                    <a:lnR w="5080" cap="flat" cmpd="sng" algn="ctr">
+                      <a:solidFill>
+                        <a:srgbClr val="CCCCCC"/>
+                      </a:solidFill>
+                      <a:prstDash val="solid"/>
+                      <a:round/>
+                      <a:headEnd type="none" w="med" len="med"/>
+                      <a:tailEnd type="none" w="med" len="med"/>
+                    </a:lnR>
+                    <a:lnT w="5080" cap="flat" cmpd="sng" algn="ctr">
+                      <a:solidFill>
+                        <a:srgbClr val="CCCCCC"/>
+                      </a:solidFill>
+                      <a:prstDash val="solid"/>
+                      <a:round/>
+                      <a:headEnd type="none" w="med" len="med"/>
+                      <a:tailEnd type="none" w="med" len="med"/>
+                    </a:lnT>
+                    <a:lnB w="5080" cap="flat" cmpd="sng" algn="ctr">
+                      <a:solidFill>
+                        <a:srgbClr val="CCCCCC"/>
+                      </a:solidFill>
+                      <a:prstDash val="solid"/>
+                      <a:round/>
+                      <a:headEnd type="none" w="med" len="med"/>
+                      <a:tailEnd type="none" w="med" len="med"/>
+                    </a:lnB>
+                    <a:solidFill>
+                      <a:srgbClr val="E3F2FD"/>
+                    </a:solidFill>
+                  </a:tcPr>
+                </a:tc>
+                <a:tc>
+                  <a:txBody>
+                    <a:bodyPr/>
+                    <a:lstStyle/>
+                    <a:p>
+                      <a:pPr algn="ctr" indent="0" marL="0">
+                        <a:buNone/>
+                      </a:pPr>
+                      <a:r>
+                        <a:rPr lang="en-US" sz="700" dirty="0">
+                          <a:solidFill>
+                            <a:srgbClr val="000000"/>
+                          </a:solidFill>
+                        </a:rPr>
+                        <a:t>愷晴　愷甯　沛沛　棣　皓宇　Alice　奕安</a:t>
+                      </a:r>
+                      <a:endParaRPr lang="en-US" sz="700" dirty="0"/>
+                    </a:p>
+                  </a:txBody>
+                  <a:tcPr marL="50800" marR="50800" marT="25400" marB="25400" anchor="ctr">
+                    <a:lnL w="5080" cap="flat" cmpd="sng" algn="ctr">
+                      <a:solidFill>
+                        <a:srgbClr val="CCCCCC"/>
+                      </a:solidFill>
+                      <a:prstDash val="solid"/>
+                      <a:round/>
+                      <a:headEnd type="none" w="med" len="med"/>
+                      <a:tailEnd type="none" w="med" len="med"/>
+                    </a:lnL>
+                    <a:lnR w="5080" cap="flat" cmpd="sng" algn="ctr">
+                      <a:solidFill>
+                        <a:srgbClr val="CCCCCC"/>
+                      </a:solidFill>
+                      <a:prstDash val="solid"/>
+                      <a:round/>
+                      <a:headEnd type="none" w="med" len="med"/>
+                      <a:tailEnd type="none" w="med" len="med"/>
+                    </a:lnR>
+                    <a:lnT w="5080" cap="flat" cmpd="sng" algn="ctr">
+                      <a:solidFill>
+                        <a:srgbClr val="CCCCCC"/>
+                      </a:solidFill>
+                      <a:prstDash val="solid"/>
+                      <a:round/>
+                      <a:headEnd type="none" w="med" len="med"/>
+                      <a:tailEnd type="none" w="med" len="med"/>
+                    </a:lnT>
+                    <a:lnB w="5080" cap="flat" cmpd="sng" algn="ctr">
+                      <a:solidFill>
+                        <a:srgbClr val="CCCCCC"/>
+                      </a:solidFill>
+                      <a:prstDash val="solid"/>
+                      <a:round/>
+                      <a:headEnd type="none" w="med" len="med"/>
+                      <a:tailEnd type="none" w="med" len="med"/>
+                    </a:lnB>
+                    <a:solidFill>
+                      <a:srgbClr val="FCE4EC"/>
+                    </a:solidFill>
+                  </a:tcPr>
+                </a:tc>
+              </a:tr>
+              <a:tr h="640080">
+                <a:tc>
+                  <a:txBody>
+                    <a:bodyPr/>
+                    <a:lstStyle/>
+                    <a:p>
+                      <a:pPr algn="ctr" indent="0" marL="0">
+                        <a:buNone/>
+                      </a:pPr>
+                      <a:r>
+                        <a:rPr lang="en-US" sz="700" b="1" dirty="0">
+                          <a:solidFill>
+                            <a:srgbClr val="0D47A1"/>
+                          </a:solidFill>
+                        </a:rPr>
+                        <a:t>16:00-17:00</a:t>
+                      </a:r>
+                      <a:endParaRPr lang="en-US" sz="700" dirty="0"/>
+                    </a:p>
+                  </a:txBody>
+                  <a:tcPr marL="50800" marR="50800" marT="25400" marB="25400" anchor="ctr">
+                    <a:lnL w="5080" cap="flat" cmpd="sng" algn="ctr">
+                      <a:solidFill>
+                        <a:srgbClr val="CCCCCC"/>
+                      </a:solidFill>
+                      <a:prstDash val="solid"/>
+                      <a:round/>
+                      <a:headEnd type="none" w="med" len="med"/>
+                      <a:tailEnd type="none" w="med" len="med"/>
+                    </a:lnL>
+                    <a:lnR w="5080" cap="flat" cmpd="sng" algn="ctr">
+                      <a:solidFill>
+                        <a:srgbClr val="CCCCCC"/>
+                      </a:solidFill>
+                      <a:prstDash val="solid"/>
+                      <a:round/>
+                      <a:headEnd type="none" w="med" len="med"/>
+                      <a:tailEnd type="none" w="med" len="med"/>
+                    </a:lnR>
+                    <a:lnT w="5080" cap="flat" cmpd="sng" algn="ctr">
+                      <a:solidFill>
+                        <a:srgbClr val="CCCCCC"/>
+                      </a:solidFill>
+                      <a:prstDash val="solid"/>
+                      <a:round/>
+                      <a:headEnd type="none" w="med" len="med"/>
+                      <a:tailEnd type="none" w="med" len="med"/>
+                    </a:lnT>
+                    <a:lnB w="5080" cap="flat" cmpd="sng" algn="ctr">
+                      <a:solidFill>
+                        <a:srgbClr val="CCCCCC"/>
+                      </a:solidFill>
+                      <a:prstDash val="solid"/>
+                      <a:round/>
+                      <a:headEnd type="none" w="med" len="med"/>
+                      <a:tailEnd type="none" w="med" len="med"/>
+                    </a:lnB>
+                    <a:solidFill>
                       <a:srgbClr val="F5F5F5"/>
                     </a:solidFill>
                   </a:tcPr>
@@ -2822,17 +4508,17 @@
                         <a:buNone/>
                       </a:pPr>
                       <a:r>
-                        <a:rPr lang="en-US" sz="800" dirty="0">
+                        <a:rPr lang="en-US" sz="700" dirty="0">
                           <a:solidFill>
                             <a:srgbClr val="000000"/>
                           </a:solidFill>
                         </a:rPr>
-                        <a:t>言穆　樂樂　Emily　Johnny　宏森　駿睿　昱臣</a:t>
-                      </a:r>
-                      <a:endParaRPr lang="en-US" sz="800" dirty="0"/>
-                    </a:p>
-                  </a:txBody>
-                  <a:tcPr marL="76200" marR="76200" marT="25400" marB="25400" anchor="ctr">
+                        <a:t>宏森　駿睿　昱臣</a:t>
+                      </a:r>
+                      <a:endParaRPr lang="en-US" sz="700" dirty="0"/>
+                    </a:p>
+                  </a:txBody>
+                  <a:tcPr marL="50800" marR="50800" marT="25400" marB="25400" anchor="ctr">
                     <a:lnL w="5080" cap="flat" cmpd="sng" algn="ctr">
                       <a:solidFill>
                         <a:srgbClr val="CCCCCC"/>
@@ -2870,12 +4556,10 @@
                       <a:tailEnd type="none" w="med" len="med"/>
                     </a:lnB>
                     <a:solidFill>
-                      <a:srgbClr val="F5F5F5"/>
-                    </a:solidFill>
-                  </a:tcPr>
-                </a:tc>
-              </a:tr>
-              <a:tr h="594360">
+                      <a:srgbClr val="E8F5E9"/>
+                    </a:solidFill>
+                  </a:tcPr>
+                </a:tc>
                 <a:tc>
                   <a:txBody>
                     <a:bodyPr/>
@@ -2885,17 +4569,17 @@
                         <a:buNone/>
                       </a:pPr>
                       <a:r>
-                        <a:rPr lang="en-US" sz="700" b="1" dirty="0">
-                          <a:solidFill>
-                            <a:srgbClr val="0D47A1"/>
-                          </a:solidFill>
-                        </a:rPr>
-                        <a:t>13:00-13:50</a:t>
+                        <a:rPr lang="en-US" sz="700" dirty="0">
+                          <a:solidFill>
+                            <a:srgbClr val="000000"/>
+                          </a:solidFill>
+                        </a:rPr>
+                        <a:t>樂樂　Emily　Johnny</a:t>
                       </a:r>
                       <a:endParaRPr lang="en-US" sz="700" dirty="0"/>
                     </a:p>
                   </a:txBody>
-                  <a:tcPr marL="76200" marR="76200" marT="25400" marB="25400" anchor="ctr">
+                  <a:tcPr marL="50800" marR="50800" marT="25400" marB="25400" anchor="ctr">
                     <a:lnL w="5080" cap="flat" cmpd="sng" algn="ctr">
                       <a:solidFill>
                         <a:srgbClr val="CCCCCC"/>
@@ -2933,7 +4617,7 @@
                       <a:tailEnd type="none" w="med" len="med"/>
                     </a:lnB>
                     <a:solidFill>
-                      <a:srgbClr val="FFF3E0"/>
+                      <a:srgbClr val="E3F2FD"/>
                     </a:solidFill>
                   </a:tcPr>
                 </a:tc>
@@ -2946,17 +4630,17 @@
                         <a:buNone/>
                       </a:pPr>
                       <a:r>
-                        <a:rPr lang="en-US" sz="800" dirty="0">
+                        <a:rPr lang="en-US" sz="700" dirty="0">
                           <a:solidFill>
                             <a:srgbClr val="000000"/>
                           </a:solidFill>
                         </a:rPr>
-                        <a:t>愷晴　愷甯　沛沛　棣　皓宸　皓宇　Alice　奕安</a:t>
-                      </a:r>
-                      <a:endParaRPr lang="en-US" sz="800" dirty="0"/>
-                    </a:p>
-                  </a:txBody>
-                  <a:tcPr marL="76200" marR="76200" marT="25400" marB="25400" anchor="ctr">
+                        <a:t>愷晴　愷甯　沛沛　棣　皓宸　皓宇　Alice　奕安　言穆</a:t>
+                      </a:r>
+                      <a:endParaRPr lang="en-US" sz="700" dirty="0"/>
+                    </a:p>
+                  </a:txBody>
+                  <a:tcPr marL="50800" marR="50800" marT="25400" marB="25400" anchor="ctr">
                     <a:lnL w="5080" cap="flat" cmpd="sng" algn="ctr">
                       <a:solidFill>
                         <a:srgbClr val="CCCCCC"/>
@@ -2994,379 +4678,7 @@
                       <a:tailEnd type="none" w="med" len="med"/>
                     </a:lnB>
                     <a:solidFill>
-                      <a:srgbClr val="FFF3E0"/>
-                    </a:solidFill>
-                  </a:tcPr>
-                </a:tc>
-              </a:tr>
-              <a:tr h="594360">
-                <a:tc>
-                  <a:txBody>
-                    <a:bodyPr/>
-                    <a:lstStyle/>
-                    <a:p>
-                      <a:pPr algn="ctr" indent="0" marL="0">
-                        <a:buNone/>
-                      </a:pPr>
-                      <a:r>
-                        <a:rPr lang="en-US" sz="700" b="1" dirty="0">
-                          <a:solidFill>
-                            <a:srgbClr val="0D47A1"/>
-                          </a:solidFill>
-                        </a:rPr>
-                        <a:t>14:00-14:50</a:t>
-                      </a:r>
-                      <a:endParaRPr lang="en-US" sz="700" dirty="0"/>
-                    </a:p>
-                  </a:txBody>
-                  <a:tcPr marL="76200" marR="76200" marT="25400" marB="25400" anchor="ctr">
-                    <a:lnL w="5080" cap="flat" cmpd="sng" algn="ctr">
-                      <a:solidFill>
-                        <a:srgbClr val="CCCCCC"/>
-                      </a:solidFill>
-                      <a:prstDash val="solid"/>
-                      <a:round/>
-                      <a:headEnd type="none" w="med" len="med"/>
-                      <a:tailEnd type="none" w="med" len="med"/>
-                    </a:lnL>
-                    <a:lnR w="5080" cap="flat" cmpd="sng" algn="ctr">
-                      <a:solidFill>
-                        <a:srgbClr val="CCCCCC"/>
-                      </a:solidFill>
-                      <a:prstDash val="solid"/>
-                      <a:round/>
-                      <a:headEnd type="none" w="med" len="med"/>
-                      <a:tailEnd type="none" w="med" len="med"/>
-                    </a:lnR>
-                    <a:lnT w="5080" cap="flat" cmpd="sng" algn="ctr">
-                      <a:solidFill>
-                        <a:srgbClr val="CCCCCC"/>
-                      </a:solidFill>
-                      <a:prstDash val="solid"/>
-                      <a:round/>
-                      <a:headEnd type="none" w="med" len="med"/>
-                      <a:tailEnd type="none" w="med" len="med"/>
-                    </a:lnT>
-                    <a:lnB w="5080" cap="flat" cmpd="sng" algn="ctr">
-                      <a:solidFill>
-                        <a:srgbClr val="CCCCCC"/>
-                      </a:solidFill>
-                      <a:prstDash val="solid"/>
-                      <a:round/>
-                      <a:headEnd type="none" w="med" len="med"/>
-                      <a:tailEnd type="none" w="med" len="med"/>
-                    </a:lnB>
-                    <a:solidFill>
-                      <a:srgbClr val="F5F5F5"/>
-                    </a:solidFill>
-                  </a:tcPr>
-                </a:tc>
-                <a:tc>
-                  <a:txBody>
-                    <a:bodyPr/>
-                    <a:lstStyle/>
-                    <a:p>
-                      <a:pPr algn="ctr" indent="0" marL="0">
-                        <a:buNone/>
-                      </a:pPr>
-                      <a:r>
-                        <a:rPr lang="en-US" sz="800" dirty="0">
-                          <a:solidFill>
-                            <a:srgbClr val="000000"/>
-                          </a:solidFill>
-                        </a:rPr>
-                        <a:t>言穆　樂樂　Emily　Johnny　宏森　駿睿　昱臣</a:t>
-                      </a:r>
-                      <a:endParaRPr lang="en-US" sz="800" dirty="0"/>
-                    </a:p>
-                  </a:txBody>
-                  <a:tcPr marL="76200" marR="76200" marT="25400" marB="25400" anchor="ctr">
-                    <a:lnL w="5080" cap="flat" cmpd="sng" algn="ctr">
-                      <a:solidFill>
-                        <a:srgbClr val="CCCCCC"/>
-                      </a:solidFill>
-                      <a:prstDash val="solid"/>
-                      <a:round/>
-                      <a:headEnd type="none" w="med" len="med"/>
-                      <a:tailEnd type="none" w="med" len="med"/>
-                    </a:lnL>
-                    <a:lnR w="5080" cap="flat" cmpd="sng" algn="ctr">
-                      <a:solidFill>
-                        <a:srgbClr val="CCCCCC"/>
-                      </a:solidFill>
-                      <a:prstDash val="solid"/>
-                      <a:round/>
-                      <a:headEnd type="none" w="med" len="med"/>
-                      <a:tailEnd type="none" w="med" len="med"/>
-                    </a:lnR>
-                    <a:lnT w="5080" cap="flat" cmpd="sng" algn="ctr">
-                      <a:solidFill>
-                        <a:srgbClr val="CCCCCC"/>
-                      </a:solidFill>
-                      <a:prstDash val="solid"/>
-                      <a:round/>
-                      <a:headEnd type="none" w="med" len="med"/>
-                      <a:tailEnd type="none" w="med" len="med"/>
-                    </a:lnT>
-                    <a:lnB w="5080" cap="flat" cmpd="sng" algn="ctr">
-                      <a:solidFill>
-                        <a:srgbClr val="CCCCCC"/>
-                      </a:solidFill>
-                      <a:prstDash val="solid"/>
-                      <a:round/>
-                      <a:headEnd type="none" w="med" len="med"/>
-                      <a:tailEnd type="none" w="med" len="med"/>
-                    </a:lnB>
-                    <a:solidFill>
-                      <a:srgbClr val="F5F5F5"/>
-                    </a:solidFill>
-                  </a:tcPr>
-                </a:tc>
-              </a:tr>
-              <a:tr h="594360">
-                <a:tc>
-                  <a:txBody>
-                    <a:bodyPr/>
-                    <a:lstStyle/>
-                    <a:p>
-                      <a:pPr algn="ctr" indent="0" marL="0">
-                        <a:buNone/>
-                      </a:pPr>
-                      <a:r>
-                        <a:rPr lang="en-US" sz="700" b="1" dirty="0">
-                          <a:solidFill>
-                            <a:srgbClr val="0D47A1"/>
-                          </a:solidFill>
-                        </a:rPr>
-                        <a:t>15:00-15:50</a:t>
-                      </a:r>
-                      <a:endParaRPr lang="en-US" sz="700" dirty="0"/>
-                    </a:p>
-                  </a:txBody>
-                  <a:tcPr marL="76200" marR="76200" marT="25400" marB="25400" anchor="ctr">
-                    <a:lnL w="5080" cap="flat" cmpd="sng" algn="ctr">
-                      <a:solidFill>
-                        <a:srgbClr val="CCCCCC"/>
-                      </a:solidFill>
-                      <a:prstDash val="solid"/>
-                      <a:round/>
-                      <a:headEnd type="none" w="med" len="med"/>
-                      <a:tailEnd type="none" w="med" len="med"/>
-                    </a:lnL>
-                    <a:lnR w="5080" cap="flat" cmpd="sng" algn="ctr">
-                      <a:solidFill>
-                        <a:srgbClr val="CCCCCC"/>
-                      </a:solidFill>
-                      <a:prstDash val="solid"/>
-                      <a:round/>
-                      <a:headEnd type="none" w="med" len="med"/>
-                      <a:tailEnd type="none" w="med" len="med"/>
-                    </a:lnR>
-                    <a:lnT w="5080" cap="flat" cmpd="sng" algn="ctr">
-                      <a:solidFill>
-                        <a:srgbClr val="CCCCCC"/>
-                      </a:solidFill>
-                      <a:prstDash val="solid"/>
-                      <a:round/>
-                      <a:headEnd type="none" w="med" len="med"/>
-                      <a:tailEnd type="none" w="med" len="med"/>
-                    </a:lnT>
-                    <a:lnB w="5080" cap="flat" cmpd="sng" algn="ctr">
-                      <a:solidFill>
-                        <a:srgbClr val="CCCCCC"/>
-                      </a:solidFill>
-                      <a:prstDash val="solid"/>
-                      <a:round/>
-                      <a:headEnd type="none" w="med" len="med"/>
-                      <a:tailEnd type="none" w="med" len="med"/>
-                    </a:lnB>
-                    <a:solidFill>
-                      <a:srgbClr val="E3F2FD"/>
-                    </a:solidFill>
-                  </a:tcPr>
-                </a:tc>
-                <a:tc>
-                  <a:txBody>
-                    <a:bodyPr/>
-                    <a:lstStyle/>
-                    <a:p>
-                      <a:pPr algn="ctr" indent="0" marL="0">
-                        <a:buNone/>
-                      </a:pPr>
-                      <a:r>
-                        <a:rPr lang="en-US" sz="800" dirty="0">
-                          <a:solidFill>
-                            <a:srgbClr val="000000"/>
-                          </a:solidFill>
-                        </a:rPr>
-                        <a:t>愷晴　愷甯　沛沛　棣　皓宸　皓宇　Alice　奕安</a:t>
-                      </a:r>
-                      <a:endParaRPr lang="en-US" sz="800" dirty="0"/>
-                    </a:p>
-                  </a:txBody>
-                  <a:tcPr marL="76200" marR="76200" marT="25400" marB="25400" anchor="ctr">
-                    <a:lnL w="5080" cap="flat" cmpd="sng" algn="ctr">
-                      <a:solidFill>
-                        <a:srgbClr val="CCCCCC"/>
-                      </a:solidFill>
-                      <a:prstDash val="solid"/>
-                      <a:round/>
-                      <a:headEnd type="none" w="med" len="med"/>
-                      <a:tailEnd type="none" w="med" len="med"/>
-                    </a:lnL>
-                    <a:lnR w="5080" cap="flat" cmpd="sng" algn="ctr">
-                      <a:solidFill>
-                        <a:srgbClr val="CCCCCC"/>
-                      </a:solidFill>
-                      <a:prstDash val="solid"/>
-                      <a:round/>
-                      <a:headEnd type="none" w="med" len="med"/>
-                      <a:tailEnd type="none" w="med" len="med"/>
-                    </a:lnR>
-                    <a:lnT w="5080" cap="flat" cmpd="sng" algn="ctr">
-                      <a:solidFill>
-                        <a:srgbClr val="CCCCCC"/>
-                      </a:solidFill>
-                      <a:prstDash val="solid"/>
-                      <a:round/>
-                      <a:headEnd type="none" w="med" len="med"/>
-                      <a:tailEnd type="none" w="med" len="med"/>
-                    </a:lnT>
-                    <a:lnB w="5080" cap="flat" cmpd="sng" algn="ctr">
-                      <a:solidFill>
-                        <a:srgbClr val="CCCCCC"/>
-                      </a:solidFill>
-                      <a:prstDash val="solid"/>
-                      <a:round/>
-                      <a:headEnd type="none" w="med" len="med"/>
-                      <a:tailEnd type="none" w="med" len="med"/>
-                    </a:lnB>
-                    <a:solidFill>
-                      <a:srgbClr val="E3F2FD"/>
-                    </a:solidFill>
-                  </a:tcPr>
-                </a:tc>
-              </a:tr>
-              <a:tr h="594360">
-                <a:tc>
-                  <a:txBody>
-                    <a:bodyPr/>
-                    <a:lstStyle/>
-                    <a:p>
-                      <a:pPr algn="ctr" indent="0" marL="0">
-                        <a:buNone/>
-                      </a:pPr>
-                      <a:r>
-                        <a:rPr lang="en-US" sz="700" b="1" dirty="0">
-                          <a:solidFill>
-                            <a:srgbClr val="0D47A1"/>
-                          </a:solidFill>
-                        </a:rPr>
-                        <a:t>16:00-16:50</a:t>
-                      </a:r>
-                      <a:endParaRPr lang="en-US" sz="700" dirty="0"/>
-                    </a:p>
-                  </a:txBody>
-                  <a:tcPr marL="76200" marR="76200" marT="25400" marB="25400" anchor="ctr">
-                    <a:lnL w="5080" cap="flat" cmpd="sng" algn="ctr">
-                      <a:solidFill>
-                        <a:srgbClr val="CCCCCC"/>
-                      </a:solidFill>
-                      <a:prstDash val="solid"/>
-                      <a:round/>
-                      <a:headEnd type="none" w="med" len="med"/>
-                      <a:tailEnd type="none" w="med" len="med"/>
-                    </a:lnL>
-                    <a:lnR w="5080" cap="flat" cmpd="sng" algn="ctr">
-                      <a:solidFill>
-                        <a:srgbClr val="CCCCCC"/>
-                      </a:solidFill>
-                      <a:prstDash val="solid"/>
-                      <a:round/>
-                      <a:headEnd type="none" w="med" len="med"/>
-                      <a:tailEnd type="none" w="med" len="med"/>
-                    </a:lnR>
-                    <a:lnT w="5080" cap="flat" cmpd="sng" algn="ctr">
-                      <a:solidFill>
-                        <a:srgbClr val="CCCCCC"/>
-                      </a:solidFill>
-                      <a:prstDash val="solid"/>
-                      <a:round/>
-                      <a:headEnd type="none" w="med" len="med"/>
-                      <a:tailEnd type="none" w="med" len="med"/>
-                    </a:lnT>
-                    <a:lnB w="5080" cap="flat" cmpd="sng" algn="ctr">
-                      <a:solidFill>
-                        <a:srgbClr val="CCCCCC"/>
-                      </a:solidFill>
-                      <a:prstDash val="solid"/>
-                      <a:round/>
-                      <a:headEnd type="none" w="med" len="med"/>
-                      <a:tailEnd type="none" w="med" len="med"/>
-                    </a:lnB>
-                    <a:solidFill>
-                      <a:srgbClr val="F5F5F5"/>
-                    </a:solidFill>
-                  </a:tcPr>
-                </a:tc>
-                <a:tc>
-                  <a:txBody>
-                    <a:bodyPr/>
-                    <a:lstStyle/>
-                    <a:p>
-                      <a:pPr algn="ctr" indent="0" marL="0">
-                        <a:buNone/>
-                      </a:pPr>
-                      <a:r>
-                        <a:rPr lang="en-US" sz="800" dirty="0">
-                          <a:solidFill>
-                            <a:srgbClr val="000000"/>
-                          </a:solidFill>
-                        </a:rPr>
-                        <a:t>言穆　樂樂　Emily　Johnny　宏森　駿睿　昱臣</a:t>
-                      </a:r>
-                      <a:endParaRPr lang="en-US" sz="800" dirty="0"/>
-                    </a:p>
-                  </a:txBody>
-                  <a:tcPr marL="76200" marR="76200" marT="25400" marB="25400" anchor="ctr">
-                    <a:lnL w="5080" cap="flat" cmpd="sng" algn="ctr">
-                      <a:solidFill>
-                        <a:srgbClr val="CCCCCC"/>
-                      </a:solidFill>
-                      <a:prstDash val="solid"/>
-                      <a:round/>
-                      <a:headEnd type="none" w="med" len="med"/>
-                      <a:tailEnd type="none" w="med" len="med"/>
-                    </a:lnL>
-                    <a:lnR w="5080" cap="flat" cmpd="sng" algn="ctr">
-                      <a:solidFill>
-                        <a:srgbClr val="CCCCCC"/>
-                      </a:solidFill>
-                      <a:prstDash val="solid"/>
-                      <a:round/>
-                      <a:headEnd type="none" w="med" len="med"/>
-                      <a:tailEnd type="none" w="med" len="med"/>
-                    </a:lnR>
-                    <a:lnT w="5080" cap="flat" cmpd="sng" algn="ctr">
-                      <a:solidFill>
-                        <a:srgbClr val="CCCCCC"/>
-                      </a:solidFill>
-                      <a:prstDash val="solid"/>
-                      <a:round/>
-                      <a:headEnd type="none" w="med" len="med"/>
-                      <a:tailEnd type="none" w="med" len="med"/>
-                    </a:lnT>
-                    <a:lnB w="5080" cap="flat" cmpd="sng" algn="ctr">
-                      <a:solidFill>
-                        <a:srgbClr val="CCCCCC"/>
-                      </a:solidFill>
-                      <a:prstDash val="solid"/>
-                      <a:round/>
-                      <a:headEnd type="none" w="med" len="med"/>
-                      <a:tailEnd type="none" w="med" len="med"/>
-                    </a:lnB>
-                    <a:solidFill>
-                      <a:srgbClr val="F5F5F5"/>
+                      <a:srgbClr val="FCE4EC"/>
                     </a:solidFill>
                   </a:tcPr>
                 </a:tc>
@@ -3377,13 +4689,13 @@
       </p:graphicFrame>
       <p:sp>
         <p:nvSpPr>
-          <p:cNvPr id="5" name="Shape 2"/>
+          <p:cNvPr id="6" name="Shape 3"/>
           <p:cNvSpPr/>
           <p:nvPr/>
         </p:nvSpPr>
         <p:spPr>
           <a:xfrm>
-            <a:off x="274320" y="6400800"/>
+            <a:off x="274320" y="6949440"/>
             <a:ext cx="6949440" cy="36576"/>
           </a:xfrm>
           <a:prstGeom prst="rect">
@@ -3397,13 +4709,13 @@
       </p:sp>
       <p:sp>
         <p:nvSpPr>
-          <p:cNvPr id="6" name="Text 3"/>
+          <p:cNvPr id="7" name="Text 4"/>
           <p:cNvSpPr/>
           <p:nvPr/>
         </p:nvSpPr>
         <p:spPr>
           <a:xfrm>
-            <a:off x="274320" y="6583680"/>
+            <a:off x="274320" y="7132320"/>
             <a:ext cx="6949440" cy="320040"/>
           </a:xfrm>
           <a:prstGeom prst="rect">
@@ -3425,619 +4737,9 @@
                   <a:srgbClr val="0D47A1"/>
                 </a:solidFill>
               </a:rPr>
-              <a:t>👥 團體分組（各由一位老師負責）</a:t>
+              <a:t>👥 團體：全班合併 1 班（1 位老師），每人每天 2 堂</a:t>
             </a:r>
             <a:endParaRPr lang="en-US" sz="1200" dirty="0"/>
-          </a:p>
-        </p:txBody>
-      </p:sp>
-      <p:graphicFrame>
-        <p:nvGraphicFramePr>
-          <p:cNvPr id="5" name="Table 1"/>
-          <p:cNvGraphicFramePr>
-            <a:graphicFrameLocks noGrp="1"/>
-          </p:cNvGraphicFramePr>
-          <p:nvPr>
-            <p:extLst>
-              <p:ext uri="{D42A27DB-BD31-4B8C-83A1-F6EECF244321}">
-                <p14:modId xmlns:p14="http://schemas.microsoft.com/office/powerpoint/2010/main" val="1579011935"/>
-              </p:ext>
-            </p:extLst>
-          </p:nvPr>
-        </p:nvGraphicFramePr>
-        <p:xfrm>
-          <a:off x="457200" y="6949440"/>
-          <a:ext cx="6583680" cy="914400"/>
-        </p:xfrm>
-        <a:graphic>
-          <a:graphicData uri="http://schemas.openxmlformats.org/drawingml/2006/table">
-            <a:tbl>
-              <a:tblPr/>
-              <a:tblGrid>
-                <a:gridCol w="457200"/>
-                <a:gridCol w="5029200"/>
-                <a:gridCol w="914400"/>
-              </a:tblGrid>
-              <a:tr h="274320">
-                <a:tc>
-                  <a:txBody>
-                    <a:bodyPr/>
-                    <a:lstStyle/>
-                    <a:p>
-                      <a:pPr indent="0" marL="0">
-                        <a:buNone/>
-                      </a:pPr>
-                      <a:r>
-                        <a:rPr lang="en-US" sz="1000" b="1" dirty="0">
-                          <a:solidFill>
-                            <a:srgbClr val="FFFFFF"/>
-                          </a:solidFill>
-                        </a:rPr>
-                        <a:t>組</a:t>
-                      </a:r>
-                      <a:endParaRPr lang="en-US" sz="1000" dirty="0"/>
-                    </a:p>
-                  </a:txBody>
-                  <a:tcPr marL="76200" marR="76200" marT="25400" marB="25400">
-                    <a:lnL w="6350" cap="flat" cmpd="sng" algn="ctr">
-                      <a:solidFill>
-                        <a:srgbClr val="CCCCCC"/>
-                      </a:solidFill>
-                      <a:prstDash val="solid"/>
-                      <a:round/>
-                      <a:headEnd type="none" w="med" len="med"/>
-                      <a:tailEnd type="none" w="med" len="med"/>
-                    </a:lnL>
-                    <a:lnR w="6350" cap="flat" cmpd="sng" algn="ctr">
-                      <a:solidFill>
-                        <a:srgbClr val="CCCCCC"/>
-                      </a:solidFill>
-                      <a:prstDash val="solid"/>
-                      <a:round/>
-                      <a:headEnd type="none" w="med" len="med"/>
-                      <a:tailEnd type="none" w="med" len="med"/>
-                    </a:lnR>
-                    <a:lnT w="6350" cap="flat" cmpd="sng" algn="ctr">
-                      <a:solidFill>
-                        <a:srgbClr val="CCCCCC"/>
-                      </a:solidFill>
-                      <a:prstDash val="solid"/>
-                      <a:round/>
-                      <a:headEnd type="none" w="med" len="med"/>
-                      <a:tailEnd type="none" w="med" len="med"/>
-                    </a:lnT>
-                    <a:lnB w="6350" cap="flat" cmpd="sng" algn="ctr">
-                      <a:solidFill>
-                        <a:srgbClr val="CCCCCC"/>
-                      </a:solidFill>
-                      <a:prstDash val="solid"/>
-                      <a:round/>
-                      <a:headEnd type="none" w="med" len="med"/>
-                      <a:tailEnd type="none" w="med" len="med"/>
-                    </a:lnB>
-                    <a:solidFill>
-                      <a:srgbClr val="0D47A1"/>
-                    </a:solidFill>
-                  </a:tcPr>
-                </a:tc>
-                <a:tc>
-                  <a:txBody>
-                    <a:bodyPr/>
-                    <a:lstStyle/>
-                    <a:p>
-                      <a:pPr indent="0" marL="0">
-                        <a:buNone/>
-                      </a:pPr>
-                      <a:r>
-                        <a:rPr lang="en-US" sz="1000" b="1" dirty="0">
-                          <a:solidFill>
-                            <a:srgbClr val="FFFFFF"/>
-                          </a:solidFill>
-                        </a:rPr>
-                        <a:t>成員</a:t>
-                      </a:r>
-                      <a:endParaRPr lang="en-US" sz="1000" dirty="0"/>
-                    </a:p>
-                  </a:txBody>
-                  <a:tcPr marL="76200" marR="76200" marT="25400" marB="25400">
-                    <a:lnL w="6350" cap="flat" cmpd="sng" algn="ctr">
-                      <a:solidFill>
-                        <a:srgbClr val="CCCCCC"/>
-                      </a:solidFill>
-                      <a:prstDash val="solid"/>
-                      <a:round/>
-                      <a:headEnd type="none" w="med" len="med"/>
-                      <a:tailEnd type="none" w="med" len="med"/>
-                    </a:lnL>
-                    <a:lnR w="6350" cap="flat" cmpd="sng" algn="ctr">
-                      <a:solidFill>
-                        <a:srgbClr val="CCCCCC"/>
-                      </a:solidFill>
-                      <a:prstDash val="solid"/>
-                      <a:round/>
-                      <a:headEnd type="none" w="med" len="med"/>
-                      <a:tailEnd type="none" w="med" len="med"/>
-                    </a:lnR>
-                    <a:lnT w="6350" cap="flat" cmpd="sng" algn="ctr">
-                      <a:solidFill>
-                        <a:srgbClr val="CCCCCC"/>
-                      </a:solidFill>
-                      <a:prstDash val="solid"/>
-                      <a:round/>
-                      <a:headEnd type="none" w="med" len="med"/>
-                      <a:tailEnd type="none" w="med" len="med"/>
-                    </a:lnT>
-                    <a:lnB w="6350" cap="flat" cmpd="sng" algn="ctr">
-                      <a:solidFill>
-                        <a:srgbClr val="CCCCCC"/>
-                      </a:solidFill>
-                      <a:prstDash val="solid"/>
-                      <a:round/>
-                      <a:headEnd type="none" w="med" len="med"/>
-                      <a:tailEnd type="none" w="med" len="med"/>
-                    </a:lnB>
-                    <a:solidFill>
-                      <a:srgbClr val="0D47A1"/>
-                    </a:solidFill>
-                  </a:tcPr>
-                </a:tc>
-                <a:tc>
-                  <a:txBody>
-                    <a:bodyPr/>
-                    <a:lstStyle/>
-                    <a:p>
-                      <a:pPr indent="0" marL="0">
-                        <a:buNone/>
-                      </a:pPr>
-                      <a:r>
-                        <a:rPr lang="en-US" sz="1000" b="1" dirty="0">
-                          <a:solidFill>
-                            <a:srgbClr val="FFFFFF"/>
-                          </a:solidFill>
-                        </a:rPr>
-                        <a:t>人數</a:t>
-                      </a:r>
-                      <a:endParaRPr lang="en-US" sz="1000" dirty="0"/>
-                    </a:p>
-                  </a:txBody>
-                  <a:tcPr marL="76200" marR="76200" marT="25400" marB="25400">
-                    <a:lnL w="6350" cap="flat" cmpd="sng" algn="ctr">
-                      <a:solidFill>
-                        <a:srgbClr val="CCCCCC"/>
-                      </a:solidFill>
-                      <a:prstDash val="solid"/>
-                      <a:round/>
-                      <a:headEnd type="none" w="med" len="med"/>
-                      <a:tailEnd type="none" w="med" len="med"/>
-                    </a:lnL>
-                    <a:lnR w="6350" cap="flat" cmpd="sng" algn="ctr">
-                      <a:solidFill>
-                        <a:srgbClr val="CCCCCC"/>
-                      </a:solidFill>
-                      <a:prstDash val="solid"/>
-                      <a:round/>
-                      <a:headEnd type="none" w="med" len="med"/>
-                      <a:tailEnd type="none" w="med" len="med"/>
-                    </a:lnR>
-                    <a:lnT w="6350" cap="flat" cmpd="sng" algn="ctr">
-                      <a:solidFill>
-                        <a:srgbClr val="CCCCCC"/>
-                      </a:solidFill>
-                      <a:prstDash val="solid"/>
-                      <a:round/>
-                      <a:headEnd type="none" w="med" len="med"/>
-                      <a:tailEnd type="none" w="med" len="med"/>
-                    </a:lnT>
-                    <a:lnB w="6350" cap="flat" cmpd="sng" algn="ctr">
-                      <a:solidFill>
-                        <a:srgbClr val="CCCCCC"/>
-                      </a:solidFill>
-                      <a:prstDash val="solid"/>
-                      <a:round/>
-                      <a:headEnd type="none" w="med" len="med"/>
-                      <a:tailEnd type="none" w="med" len="med"/>
-                    </a:lnB>
-                    <a:solidFill>
-                      <a:srgbClr val="0D47A1"/>
-                    </a:solidFill>
-                  </a:tcPr>
-                </a:tc>
-              </a:tr>
-              <a:tr h="274320">
-                <a:tc>
-                  <a:txBody>
-                    <a:bodyPr/>
-                    <a:lstStyle/>
-                    <a:p>
-                      <a:pPr indent="0" marL="0">
-                        <a:buNone/>
-                      </a:pPr>
-                      <a:r>
-                        <a:rPr lang="en-US" sz="1000" b="1" dirty="0">
-                          <a:solidFill>
-                            <a:srgbClr val="000000"/>
-                          </a:solidFill>
-                        </a:rPr>
-                        <a:t>G1</a:t>
-                      </a:r>
-                      <a:endParaRPr lang="en-US" sz="1000" dirty="0"/>
-                    </a:p>
-                  </a:txBody>
-                  <a:tcPr marL="76200" marR="76200" marT="25400" marB="25400">
-                    <a:lnL w="6350" cap="flat" cmpd="sng" algn="ctr">
-                      <a:solidFill>
-                        <a:srgbClr val="CCCCCC"/>
-                      </a:solidFill>
-                      <a:prstDash val="solid"/>
-                      <a:round/>
-                      <a:headEnd type="none" w="med" len="med"/>
-                      <a:tailEnd type="none" w="med" len="med"/>
-                    </a:lnL>
-                    <a:lnR w="6350" cap="flat" cmpd="sng" algn="ctr">
-                      <a:solidFill>
-                        <a:srgbClr val="CCCCCC"/>
-                      </a:solidFill>
-                      <a:prstDash val="solid"/>
-                      <a:round/>
-                      <a:headEnd type="none" w="med" len="med"/>
-                      <a:tailEnd type="none" w="med" len="med"/>
-                    </a:lnR>
-                    <a:lnT w="6350" cap="flat" cmpd="sng" algn="ctr">
-                      <a:solidFill>
-                        <a:srgbClr val="CCCCCC"/>
-                      </a:solidFill>
-                      <a:prstDash val="solid"/>
-                      <a:round/>
-                      <a:headEnd type="none" w="med" len="med"/>
-                      <a:tailEnd type="none" w="med" len="med"/>
-                    </a:lnT>
-                    <a:lnB w="6350" cap="flat" cmpd="sng" algn="ctr">
-                      <a:solidFill>
-                        <a:srgbClr val="CCCCCC"/>
-                      </a:solidFill>
-                      <a:prstDash val="solid"/>
-                      <a:round/>
-                      <a:headEnd type="none" w="med" len="med"/>
-                      <a:tailEnd type="none" w="med" len="med"/>
-                    </a:lnB>
-                    <a:solidFill>
-                      <a:srgbClr val="FCE4EC"/>
-                    </a:solidFill>
-                  </a:tcPr>
-                </a:tc>
-                <a:tc>
-                  <a:txBody>
-                    <a:bodyPr/>
-                    <a:lstStyle/>
-                    <a:p>
-                      <a:pPr indent="0" marL="0">
-                        <a:buNone/>
-                      </a:pPr>
-                      <a:r>
-                        <a:rPr lang="en-US" sz="900" dirty="0">
-                          <a:solidFill>
-                            <a:srgbClr val="000000"/>
-                          </a:solidFill>
-                        </a:rPr>
-                        <a:t>愷晴、愷甯、沛沛、棣、皓宸、皓宇、Alice、奕安</a:t>
-                      </a:r>
-                      <a:endParaRPr lang="en-US" sz="900" dirty="0"/>
-                    </a:p>
-                  </a:txBody>
-                  <a:tcPr marL="76200" marR="76200" marT="25400" marB="25400">
-                    <a:lnL w="6350" cap="flat" cmpd="sng" algn="ctr">
-                      <a:solidFill>
-                        <a:srgbClr val="CCCCCC"/>
-                      </a:solidFill>
-                      <a:prstDash val="solid"/>
-                      <a:round/>
-                      <a:headEnd type="none" w="med" len="med"/>
-                      <a:tailEnd type="none" w="med" len="med"/>
-                    </a:lnL>
-                    <a:lnR w="6350" cap="flat" cmpd="sng" algn="ctr">
-                      <a:solidFill>
-                        <a:srgbClr val="CCCCCC"/>
-                      </a:solidFill>
-                      <a:prstDash val="solid"/>
-                      <a:round/>
-                      <a:headEnd type="none" w="med" len="med"/>
-                      <a:tailEnd type="none" w="med" len="med"/>
-                    </a:lnR>
-                    <a:lnT w="6350" cap="flat" cmpd="sng" algn="ctr">
-                      <a:solidFill>
-                        <a:srgbClr val="CCCCCC"/>
-                      </a:solidFill>
-                      <a:prstDash val="solid"/>
-                      <a:round/>
-                      <a:headEnd type="none" w="med" len="med"/>
-                      <a:tailEnd type="none" w="med" len="med"/>
-                    </a:lnT>
-                    <a:lnB w="6350" cap="flat" cmpd="sng" algn="ctr">
-                      <a:solidFill>
-                        <a:srgbClr val="CCCCCC"/>
-                      </a:solidFill>
-                      <a:prstDash val="solid"/>
-                      <a:round/>
-                      <a:headEnd type="none" w="med" len="med"/>
-                      <a:tailEnd type="none" w="med" len="med"/>
-                    </a:lnB>
-                  </a:tcPr>
-                </a:tc>
-                <a:tc>
-                  <a:txBody>
-                    <a:bodyPr/>
-                    <a:lstStyle/>
-                    <a:p>
-                      <a:pPr indent="0" marL="0">
-                        <a:buNone/>
-                      </a:pPr>
-                      <a:r>
-                        <a:rPr lang="en-US" sz="900" dirty="0">
-                          <a:solidFill>
-                            <a:srgbClr val="000000"/>
-                          </a:solidFill>
-                        </a:rPr>
-                        <a:t>8 人</a:t>
-                      </a:r>
-                      <a:endParaRPr lang="en-US" sz="900" dirty="0"/>
-                    </a:p>
-                  </a:txBody>
-                  <a:tcPr marL="76200" marR="76200" marT="25400" marB="25400">
-                    <a:lnL w="6350" cap="flat" cmpd="sng" algn="ctr">
-                      <a:solidFill>
-                        <a:srgbClr val="CCCCCC"/>
-                      </a:solidFill>
-                      <a:prstDash val="solid"/>
-                      <a:round/>
-                      <a:headEnd type="none" w="med" len="med"/>
-                      <a:tailEnd type="none" w="med" len="med"/>
-                    </a:lnL>
-                    <a:lnR w="6350" cap="flat" cmpd="sng" algn="ctr">
-                      <a:solidFill>
-                        <a:srgbClr val="CCCCCC"/>
-                      </a:solidFill>
-                      <a:prstDash val="solid"/>
-                      <a:round/>
-                      <a:headEnd type="none" w="med" len="med"/>
-                      <a:tailEnd type="none" w="med" len="med"/>
-                    </a:lnR>
-                    <a:lnT w="6350" cap="flat" cmpd="sng" algn="ctr">
-                      <a:solidFill>
-                        <a:srgbClr val="CCCCCC"/>
-                      </a:solidFill>
-                      <a:prstDash val="solid"/>
-                      <a:round/>
-                      <a:headEnd type="none" w="med" len="med"/>
-                      <a:tailEnd type="none" w="med" len="med"/>
-                    </a:lnT>
-                    <a:lnB w="6350" cap="flat" cmpd="sng" algn="ctr">
-                      <a:solidFill>
-                        <a:srgbClr val="CCCCCC"/>
-                      </a:solidFill>
-                      <a:prstDash val="solid"/>
-                      <a:round/>
-                      <a:headEnd type="none" w="med" len="med"/>
-                      <a:tailEnd type="none" w="med" len="med"/>
-                    </a:lnB>
-                  </a:tcPr>
-                </a:tc>
-              </a:tr>
-              <a:tr h="274320">
-                <a:tc>
-                  <a:txBody>
-                    <a:bodyPr/>
-                    <a:lstStyle/>
-                    <a:p>
-                      <a:pPr indent="0" marL="0">
-                        <a:buNone/>
-                      </a:pPr>
-                      <a:r>
-                        <a:rPr lang="en-US" sz="1000" b="1" dirty="0">
-                          <a:solidFill>
-                            <a:srgbClr val="000000"/>
-                          </a:solidFill>
-                        </a:rPr>
-                        <a:t>G2</a:t>
-                      </a:r>
-                      <a:endParaRPr lang="en-US" sz="1000" dirty="0"/>
-                    </a:p>
-                  </a:txBody>
-                  <a:tcPr marL="76200" marR="76200" marT="25400" marB="25400">
-                    <a:lnL w="6350" cap="flat" cmpd="sng" algn="ctr">
-                      <a:solidFill>
-                        <a:srgbClr val="CCCCCC"/>
-                      </a:solidFill>
-                      <a:prstDash val="solid"/>
-                      <a:round/>
-                      <a:headEnd type="none" w="med" len="med"/>
-                      <a:tailEnd type="none" w="med" len="med"/>
-                    </a:lnL>
-                    <a:lnR w="6350" cap="flat" cmpd="sng" algn="ctr">
-                      <a:solidFill>
-                        <a:srgbClr val="CCCCCC"/>
-                      </a:solidFill>
-                      <a:prstDash val="solid"/>
-                      <a:round/>
-                      <a:headEnd type="none" w="med" len="med"/>
-                      <a:tailEnd type="none" w="med" len="med"/>
-                    </a:lnR>
-                    <a:lnT w="6350" cap="flat" cmpd="sng" algn="ctr">
-                      <a:solidFill>
-                        <a:srgbClr val="CCCCCC"/>
-                      </a:solidFill>
-                      <a:prstDash val="solid"/>
-                      <a:round/>
-                      <a:headEnd type="none" w="med" len="med"/>
-                      <a:tailEnd type="none" w="med" len="med"/>
-                    </a:lnT>
-                    <a:lnB w="6350" cap="flat" cmpd="sng" algn="ctr">
-                      <a:solidFill>
-                        <a:srgbClr val="CCCCCC"/>
-                      </a:solidFill>
-                      <a:prstDash val="solid"/>
-                      <a:round/>
-                      <a:headEnd type="none" w="med" len="med"/>
-                      <a:tailEnd type="none" w="med" len="med"/>
-                    </a:lnB>
-                    <a:solidFill>
-                      <a:srgbClr val="E3F2FD"/>
-                    </a:solidFill>
-                  </a:tcPr>
-                </a:tc>
-                <a:tc>
-                  <a:txBody>
-                    <a:bodyPr/>
-                    <a:lstStyle/>
-                    <a:p>
-                      <a:pPr indent="0" marL="0">
-                        <a:buNone/>
-                      </a:pPr>
-                      <a:r>
-                        <a:rPr lang="en-US" sz="900" dirty="0">
-                          <a:solidFill>
-                            <a:srgbClr val="000000"/>
-                          </a:solidFill>
-                        </a:rPr>
-                        <a:t>言穆、樂樂、Emily、Johnny、宏森、駿睿、昱臣</a:t>
-                      </a:r>
-                      <a:endParaRPr lang="en-US" sz="900" dirty="0"/>
-                    </a:p>
-                  </a:txBody>
-                  <a:tcPr marL="76200" marR="76200" marT="25400" marB="25400">
-                    <a:lnL w="6350" cap="flat" cmpd="sng" algn="ctr">
-                      <a:solidFill>
-                        <a:srgbClr val="CCCCCC"/>
-                      </a:solidFill>
-                      <a:prstDash val="solid"/>
-                      <a:round/>
-                      <a:headEnd type="none" w="med" len="med"/>
-                      <a:tailEnd type="none" w="med" len="med"/>
-                    </a:lnL>
-                    <a:lnR w="6350" cap="flat" cmpd="sng" algn="ctr">
-                      <a:solidFill>
-                        <a:srgbClr val="CCCCCC"/>
-                      </a:solidFill>
-                      <a:prstDash val="solid"/>
-                      <a:round/>
-                      <a:headEnd type="none" w="med" len="med"/>
-                      <a:tailEnd type="none" w="med" len="med"/>
-                    </a:lnR>
-                    <a:lnT w="6350" cap="flat" cmpd="sng" algn="ctr">
-                      <a:solidFill>
-                        <a:srgbClr val="CCCCCC"/>
-                      </a:solidFill>
-                      <a:prstDash val="solid"/>
-                      <a:round/>
-                      <a:headEnd type="none" w="med" len="med"/>
-                      <a:tailEnd type="none" w="med" len="med"/>
-                    </a:lnT>
-                    <a:lnB w="6350" cap="flat" cmpd="sng" algn="ctr">
-                      <a:solidFill>
-                        <a:srgbClr val="CCCCCC"/>
-                      </a:solidFill>
-                      <a:prstDash val="solid"/>
-                      <a:round/>
-                      <a:headEnd type="none" w="med" len="med"/>
-                      <a:tailEnd type="none" w="med" len="med"/>
-                    </a:lnB>
-                  </a:tcPr>
-                </a:tc>
-                <a:tc>
-                  <a:txBody>
-                    <a:bodyPr/>
-                    <a:lstStyle/>
-                    <a:p>
-                      <a:pPr indent="0" marL="0">
-                        <a:buNone/>
-                      </a:pPr>
-                      <a:r>
-                        <a:rPr lang="en-US" sz="900" dirty="0">
-                          <a:solidFill>
-                            <a:srgbClr val="000000"/>
-                          </a:solidFill>
-                        </a:rPr>
-                        <a:t>7 人</a:t>
-                      </a:r>
-                      <a:endParaRPr lang="en-US" sz="900" dirty="0"/>
-                    </a:p>
-                  </a:txBody>
-                  <a:tcPr marL="76200" marR="76200" marT="25400" marB="25400">
-                    <a:lnL w="6350" cap="flat" cmpd="sng" algn="ctr">
-                      <a:solidFill>
-                        <a:srgbClr val="CCCCCC"/>
-                      </a:solidFill>
-                      <a:prstDash val="solid"/>
-                      <a:round/>
-                      <a:headEnd type="none" w="med" len="med"/>
-                      <a:tailEnd type="none" w="med" len="med"/>
-                    </a:lnL>
-                    <a:lnR w="6350" cap="flat" cmpd="sng" algn="ctr">
-                      <a:solidFill>
-                        <a:srgbClr val="CCCCCC"/>
-                      </a:solidFill>
-                      <a:prstDash val="solid"/>
-                      <a:round/>
-                      <a:headEnd type="none" w="med" len="med"/>
-                      <a:tailEnd type="none" w="med" len="med"/>
-                    </a:lnR>
-                    <a:lnT w="6350" cap="flat" cmpd="sng" algn="ctr">
-                      <a:solidFill>
-                        <a:srgbClr val="CCCCCC"/>
-                      </a:solidFill>
-                      <a:prstDash val="solid"/>
-                      <a:round/>
-                      <a:headEnd type="none" w="med" len="med"/>
-                      <a:tailEnd type="none" w="med" len="med"/>
-                    </a:lnT>
-                    <a:lnB w="6350" cap="flat" cmpd="sng" algn="ctr">
-                      <a:solidFill>
-                        <a:srgbClr val="CCCCCC"/>
-                      </a:solidFill>
-                      <a:prstDash val="solid"/>
-                      <a:round/>
-                      <a:headEnd type="none" w="med" len="med"/>
-                      <a:tailEnd type="none" w="med" len="med"/>
-                    </a:lnB>
-                  </a:tcPr>
-                </a:tc>
-              </a:tr>
-            </a:tbl>
-          </a:graphicData>
-        </a:graphic>
-      </p:graphicFrame>
-      <p:sp>
-        <p:nvSpPr>
-          <p:cNvPr id="8" name="Text 4"/>
-          <p:cNvSpPr/>
-          <p:nvPr/>
-        </p:nvSpPr>
-        <p:spPr>
-          <a:xfrm>
-            <a:off x="274320" y="7772400"/>
-            <a:ext cx="6949440" cy="274320"/>
-          </a:xfrm>
-          <a:prstGeom prst="rect">
-            <a:avLst/>
-          </a:prstGeom>
-          <a:noFill/>
-          <a:ln/>
-        </p:spPr>
-        <p:txBody>
-          <a:bodyPr wrap="square" rtlCol="0" anchor="ctr"/>
-          <a:lstStyle/>
-          <a:p>
-            <a:pPr indent="0" marL="0">
-              <a:buNone/>
-            </a:pPr>
-            <a:r>
-              <a:rPr lang="en-US" sz="900" i="1" dirty="0">
-                <a:solidFill>
-                  <a:srgbClr val="888888"/>
-                </a:solidFill>
-              </a:rPr>
-              <a:t>團體課每人每天 2 堂（100 分），安排於未輪到 1:1 之時段</a:t>
-            </a:r>
-            <a:endParaRPr lang="en-US" sz="900" dirty="0"/>
           </a:p>
         </p:txBody>
       </p:sp>
@@ -4103,7 +4805,7 @@
                   <a:srgbClr val="0D47A1"/>
                 </a:solidFill>
               </a:rPr>
-              <a:t>🔄 1:1 每日輪值表</a:t>
+              <a:t>🔄 口說／寫作 1:1 每日輪值</a:t>
             </a:r>
             <a:endParaRPr lang="en-US" sz="1800" dirty="0"/>
           </a:p>
@@ -4139,7 +4841,7 @@
                   <a:srgbClr val="C62828"/>
                 </a:solidFill>
               </a:rPr>
-              <a:t>全員每天 1:1 × 4 堂（200 分）✅　公平輪值，無人多堂</a:t>
+              <a:t>全員：口說 2 堂（120 分）＋ 寫作 2 堂（120 分）✅</a:t>
             </a:r>
             <a:endParaRPr lang="en-US" sz="1200" dirty="0"/>
           </a:p>
@@ -4168,7 +4870,7 @@
             <a:tbl>
               <a:tblPr/>
               <a:tblGrid>
-                <a:gridCol w="594360"/>
+                <a:gridCol w="640080"/>
                 <a:gridCol w="777240"/>
                 <a:gridCol w="777240"/>
                 <a:gridCol w="777240"/>
@@ -4178,7 +4880,7 @@
                 <a:gridCol w="777240"/>
                 <a:gridCol w="777240"/>
               </a:tblGrid>
-              <a:tr h="219456">
+              <a:tr h="210312">
                 <a:tc>
                   <a:txBody>
                     <a:bodyPr/>
@@ -4188,14 +4890,14 @@
                         <a:buNone/>
                       </a:pPr>
                       <a:r>
-                        <a:rPr lang="en-US" sz="800" b="1" dirty="0">
+                        <a:rPr lang="en-US" sz="700" b="1" dirty="0">
                           <a:solidFill>
                             <a:srgbClr val="FFFFFF"/>
                           </a:solidFill>
                         </a:rPr>
                         <a:t>學員</a:t>
                       </a:r>
-                      <a:endParaRPr lang="en-US" sz="800" dirty="0"/>
+                      <a:endParaRPr lang="en-US" sz="700" dirty="0"/>
                     </a:p>
                   </a:txBody>
                   <a:tcPr marL="25400" marR="25400" marT="12700" marB="12700">
@@ -4249,14 +4951,14 @@
                         <a:buNone/>
                       </a:pPr>
                       <a:r>
-                        <a:rPr lang="en-US" sz="600" b="1" dirty="0">
+                        <a:rPr lang="en-US" sz="500" b="1" dirty="0">
                           <a:solidFill>
                             <a:srgbClr val="FFFFFF"/>
                           </a:solidFill>
                         </a:rPr>
-                        <a:t>08:00-08:50</a:t>
-                      </a:r>
-                      <a:endParaRPr lang="en-US" sz="600" dirty="0"/>
+                        <a:t>08:00-09:00</a:t>
+                      </a:r>
+                      <a:endParaRPr lang="en-US" sz="500" dirty="0"/>
                     </a:p>
                   </a:txBody>
                   <a:tcPr marL="25400" marR="25400" marT="12700" marB="12700">
@@ -4310,14 +5012,14 @@
                         <a:buNone/>
                       </a:pPr>
                       <a:r>
-                        <a:rPr lang="en-US" sz="600" b="1" dirty="0">
+                        <a:rPr lang="en-US" sz="500" b="1" dirty="0">
                           <a:solidFill>
                             <a:srgbClr val="FFFFFF"/>
                           </a:solidFill>
                         </a:rPr>
-                        <a:t>09:00-09:50</a:t>
-                      </a:r>
-                      <a:endParaRPr lang="en-US" sz="600" dirty="0"/>
+                        <a:t>09:00-10:00</a:t>
+                      </a:r>
+                      <a:endParaRPr lang="en-US" sz="500" dirty="0"/>
                     </a:p>
                   </a:txBody>
                   <a:tcPr marL="25400" marR="25400" marT="12700" marB="12700">
@@ -4371,14 +5073,14 @@
                         <a:buNone/>
                       </a:pPr>
                       <a:r>
-                        <a:rPr lang="en-US" sz="600" b="1" dirty="0">
+                        <a:rPr lang="en-US" sz="500" b="1" dirty="0">
                           <a:solidFill>
                             <a:srgbClr val="FFFFFF"/>
                           </a:solidFill>
                         </a:rPr>
-                        <a:t>10:00-10:50</a:t>
-                      </a:r>
-                      <a:endParaRPr lang="en-US" sz="600" dirty="0"/>
+                        <a:t>10:00-11:00</a:t>
+                      </a:r>
+                      <a:endParaRPr lang="en-US" sz="500" dirty="0"/>
                     </a:p>
                   </a:txBody>
                   <a:tcPr marL="25400" marR="25400" marT="12700" marB="12700">
@@ -4432,14 +5134,14 @@
                         <a:buNone/>
                       </a:pPr>
                       <a:r>
-                        <a:rPr lang="en-US" sz="600" b="1" dirty="0">
+                        <a:rPr lang="en-US" sz="500" b="1" dirty="0">
                           <a:solidFill>
                             <a:srgbClr val="FFFFFF"/>
                           </a:solidFill>
                         </a:rPr>
-                        <a:t>11:00-11:50</a:t>
-                      </a:r>
-                      <a:endParaRPr lang="en-US" sz="600" dirty="0"/>
+                        <a:t>11:00-12:00</a:t>
+                      </a:r>
+                      <a:endParaRPr lang="en-US" sz="500" dirty="0"/>
                     </a:p>
                   </a:txBody>
                   <a:tcPr marL="25400" marR="25400" marT="12700" marB="12700">
@@ -4493,14 +5195,14 @@
                         <a:buNone/>
                       </a:pPr>
                       <a:r>
-                        <a:rPr lang="en-US" sz="600" b="1" dirty="0">
+                        <a:rPr lang="en-US" sz="500" b="1" dirty="0">
                           <a:solidFill>
                             <a:srgbClr val="FFFFFF"/>
                           </a:solidFill>
                         </a:rPr>
-                        <a:t>13:00-13:50</a:t>
-                      </a:r>
-                      <a:endParaRPr lang="en-US" sz="600" dirty="0"/>
+                        <a:t>13:00-14:00</a:t>
+                      </a:r>
+                      <a:endParaRPr lang="en-US" sz="500" dirty="0"/>
                     </a:p>
                   </a:txBody>
                   <a:tcPr marL="25400" marR="25400" marT="12700" marB="12700">
@@ -4554,14 +5256,14 @@
                         <a:buNone/>
                       </a:pPr>
                       <a:r>
-                        <a:rPr lang="en-US" sz="600" b="1" dirty="0">
+                        <a:rPr lang="en-US" sz="500" b="1" dirty="0">
                           <a:solidFill>
                             <a:srgbClr val="FFFFFF"/>
                           </a:solidFill>
                         </a:rPr>
-                        <a:t>14:00-14:50</a:t>
-                      </a:r>
-                      <a:endParaRPr lang="en-US" sz="600" dirty="0"/>
+                        <a:t>14:00-15:00</a:t>
+                      </a:r>
+                      <a:endParaRPr lang="en-US" sz="500" dirty="0"/>
                     </a:p>
                   </a:txBody>
                   <a:tcPr marL="25400" marR="25400" marT="12700" marB="12700">
@@ -4615,14 +5317,14 @@
                         <a:buNone/>
                       </a:pPr>
                       <a:r>
-                        <a:rPr lang="en-US" sz="600" b="1" dirty="0">
+                        <a:rPr lang="en-US" sz="500" b="1" dirty="0">
                           <a:solidFill>
                             <a:srgbClr val="FFFFFF"/>
                           </a:solidFill>
                         </a:rPr>
-                        <a:t>15:00-15:50</a:t>
-                      </a:r>
-                      <a:endParaRPr lang="en-US" sz="600" dirty="0"/>
+                        <a:t>15:00-16:00</a:t>
+                      </a:r>
+                      <a:endParaRPr lang="en-US" sz="500" dirty="0"/>
                     </a:p>
                   </a:txBody>
                   <a:tcPr marL="25400" marR="25400" marT="12700" marB="12700">
@@ -4676,14 +5378,14 @@
                         <a:buNone/>
                       </a:pPr>
                       <a:r>
-                        <a:rPr lang="en-US" sz="600" b="1" dirty="0">
+                        <a:rPr lang="en-US" sz="500" b="1" dirty="0">
                           <a:solidFill>
                             <a:srgbClr val="FFFFFF"/>
                           </a:solidFill>
                         </a:rPr>
-                        <a:t>16:00-16:50</a:t>
-                      </a:r>
-                      <a:endParaRPr lang="en-US" sz="600" dirty="0"/>
+                        <a:t>16:00-17:00</a:t>
+                      </a:r>
+                      <a:endParaRPr lang="en-US" sz="500" dirty="0"/>
                     </a:p>
                   </a:txBody>
                   <a:tcPr marL="25400" marR="25400" marT="12700" marB="12700">
@@ -4729,7 +5431,7 @@
                   </a:tcPr>
                 </a:tc>
               </a:tr>
-              <a:tr h="219456">
+              <a:tr h="210312">
                 <a:tc>
                   <a:txBody>
                     <a:bodyPr/>
@@ -4739,14 +5441,14 @@
                         <a:buNone/>
                       </a:pPr>
                       <a:r>
-                        <a:rPr lang="en-US" sz="600" b="1" dirty="0">
+                        <a:rPr lang="en-US" sz="500" b="1" dirty="0">
                           <a:solidFill>
                             <a:srgbClr val="000000"/>
                           </a:solidFill>
                         </a:rPr>
                         <a:t>愷晴</a:t>
                       </a:r>
-                      <a:endParaRPr lang="en-US" sz="600" dirty="0"/>
+                      <a:endParaRPr lang="en-US" sz="500" dirty="0"/>
                     </a:p>
                   </a:txBody>
                   <a:tcPr marL="25400" marR="25400" marT="12700" marB="12700">
@@ -4799,10 +5501,10 @@
                       <a:r>
                         <a:rPr lang="en-US" sz="600" dirty="0">
                           <a:solidFill>
-                            <a:srgbClr val="333333"/>
-                          </a:solidFill>
-                        </a:rPr>
-                        <a:t>1:1</a:t>
+                            <a:srgbClr val="000000"/>
+                          </a:solidFill>
+                        </a:rPr>
+                        <a:t>🗣</a:t>
                       </a:r>
                       <a:endParaRPr lang="en-US" sz="600" dirty="0"/>
                     </a:p>
@@ -4860,10 +5562,10 @@
                       <a:r>
                         <a:rPr lang="en-US" sz="600" dirty="0">
                           <a:solidFill>
-                            <a:srgbClr val="999999"/>
-                          </a:solidFill>
-                        </a:rPr>
-                        <a:t>▸</a:t>
+                            <a:srgbClr val="000000"/>
+                          </a:solidFill>
+                        </a:rPr>
+                        <a:t>✏️</a:t>
                       </a:r>
                       <a:endParaRPr lang="en-US" sz="600" dirty="0"/>
                     </a:p>
@@ -4906,7 +5608,7 @@
                       <a:tailEnd type="none" w="med" len="med"/>
                     </a:lnB>
                     <a:solidFill>
-                      <a:srgbClr val="F5F5F5"/>
+                      <a:srgbClr val="E3F2FD"/>
                     </a:solidFill>
                   </a:tcPr>
                 </a:tc>
@@ -4921,10 +5623,10 @@
                       <a:r>
                         <a:rPr lang="en-US" sz="600" dirty="0">
                           <a:solidFill>
-                            <a:srgbClr val="333333"/>
-                          </a:solidFill>
-                        </a:rPr>
-                        <a:t>1:1</a:t>
+                            <a:srgbClr val="000000"/>
+                          </a:solidFill>
+                        </a:rPr>
+                        <a:t>✏️</a:t>
                       </a:r>
                       <a:endParaRPr lang="en-US" sz="600" dirty="0"/>
                     </a:p>
@@ -4967,7 +5669,7 @@
                       <a:tailEnd type="none" w="med" len="med"/>
                     </a:lnB>
                     <a:solidFill>
-                      <a:srgbClr val="E8F5E9"/>
+                      <a:srgbClr val="E3F2FD"/>
                     </a:solidFill>
                   </a:tcPr>
                 </a:tc>
@@ -4982,10 +5684,10 @@
                       <a:r>
                         <a:rPr lang="en-US" sz="600" dirty="0">
                           <a:solidFill>
-                            <a:srgbClr val="999999"/>
-                          </a:solidFill>
-                        </a:rPr>
-                        <a:t>▸</a:t>
+                            <a:srgbClr val="000000"/>
+                          </a:solidFill>
+                        </a:rPr>
+                        <a:t>🗣</a:t>
                       </a:r>
                       <a:endParaRPr lang="en-US" sz="600" dirty="0"/>
                     </a:p>
@@ -5028,7 +5730,7 @@
                       <a:tailEnd type="none" w="med" len="med"/>
                     </a:lnB>
                     <a:solidFill>
-                      <a:srgbClr val="F5F5F5"/>
+                      <a:srgbClr val="E8F5E9"/>
                     </a:solidFill>
                   </a:tcPr>
                 </a:tc>
@@ -5040,14 +5742,6 @@
                       <a:pPr algn="ctr" indent="0" marL="0">
                         <a:buNone/>
                       </a:pPr>
-                      <a:r>
-                        <a:rPr lang="en-US" sz="600" dirty="0">
-                          <a:solidFill>
-                            <a:srgbClr val="333333"/>
-                          </a:solidFill>
-                        </a:rPr>
-                        <a:t>1:1</a:t>
-                      </a:r>
                       <a:endParaRPr lang="en-US" sz="600" dirty="0"/>
                     </a:p>
                   </a:txBody>
@@ -5089,7 +5783,7 @@
                       <a:tailEnd type="none" w="med" len="med"/>
                     </a:lnB>
                     <a:solidFill>
-                      <a:srgbClr val="E8F5E9"/>
+                      <a:srgbClr val="F5F5F5"/>
                     </a:solidFill>
                   </a:tcPr>
                 </a:tc>
@@ -5101,14 +5795,6 @@
                       <a:pPr algn="ctr" indent="0" marL="0">
                         <a:buNone/>
                       </a:pPr>
-                      <a:r>
-                        <a:rPr lang="en-US" sz="600" dirty="0">
-                          <a:solidFill>
-                            <a:srgbClr val="999999"/>
-                          </a:solidFill>
-                        </a:rPr>
-                        <a:t>▸</a:t>
-                      </a:r>
                       <a:endParaRPr lang="en-US" sz="600" dirty="0"/>
                     </a:p>
                   </a:txBody>
@@ -5162,14 +5848,6 @@
                       <a:pPr algn="ctr" indent="0" marL="0">
                         <a:buNone/>
                       </a:pPr>
-                      <a:r>
-                        <a:rPr lang="en-US" sz="600" dirty="0">
-                          <a:solidFill>
-                            <a:srgbClr val="333333"/>
-                          </a:solidFill>
-                        </a:rPr>
-                        <a:t>1:1</a:t>
-                      </a:r>
                       <a:endParaRPr lang="en-US" sz="600" dirty="0"/>
                     </a:p>
                   </a:txBody>
@@ -5211,7 +5889,7 @@
                       <a:tailEnd type="none" w="med" len="med"/>
                     </a:lnB>
                     <a:solidFill>
-                      <a:srgbClr val="E8F5E9"/>
+                      <a:srgbClr val="F5F5F5"/>
                     </a:solidFill>
                   </a:tcPr>
                 </a:tc>
@@ -5223,14 +5901,6 @@
                       <a:pPr algn="ctr" indent="0" marL="0">
                         <a:buNone/>
                       </a:pPr>
-                      <a:r>
-                        <a:rPr lang="en-US" sz="600" dirty="0">
-                          <a:solidFill>
-                            <a:srgbClr val="999999"/>
-                          </a:solidFill>
-                        </a:rPr>
-                        <a:t>▸</a:t>
-                      </a:r>
                       <a:endParaRPr lang="en-US" sz="600" dirty="0"/>
                     </a:p>
                   </a:txBody>
@@ -5277,7 +5947,7 @@
                   </a:tcPr>
                 </a:tc>
               </a:tr>
-              <a:tr h="219456">
+              <a:tr h="210312">
                 <a:tc>
                   <a:txBody>
                     <a:bodyPr/>
@@ -5287,14 +5957,14 @@
                         <a:buNone/>
                       </a:pPr>
                       <a:r>
-                        <a:rPr lang="en-US" sz="600" b="1" dirty="0">
+                        <a:rPr lang="en-US" sz="500" b="1" dirty="0">
                           <a:solidFill>
                             <a:srgbClr val="000000"/>
                           </a:solidFill>
                         </a:rPr>
                         <a:t>愷甯</a:t>
                       </a:r>
-                      <a:endParaRPr lang="en-US" sz="600" dirty="0"/>
+                      <a:endParaRPr lang="en-US" sz="500" dirty="0"/>
                     </a:p>
                   </a:txBody>
                   <a:tcPr marL="25400" marR="25400" marT="12700" marB="12700">
@@ -5347,10 +6017,10 @@
                       <a:r>
                         <a:rPr lang="en-US" sz="600" dirty="0">
                           <a:solidFill>
-                            <a:srgbClr val="333333"/>
-                          </a:solidFill>
-                        </a:rPr>
-                        <a:t>1:1</a:t>
+                            <a:srgbClr val="000000"/>
+                          </a:solidFill>
+                        </a:rPr>
+                        <a:t>🗣</a:t>
                       </a:r>
                       <a:endParaRPr lang="en-US" sz="600" dirty="0"/>
                     </a:p>
@@ -5408,10 +6078,10 @@
                       <a:r>
                         <a:rPr lang="en-US" sz="600" dirty="0">
                           <a:solidFill>
-                            <a:srgbClr val="999999"/>
-                          </a:solidFill>
-                        </a:rPr>
-                        <a:t>▸</a:t>
+                            <a:srgbClr val="000000"/>
+                          </a:solidFill>
+                        </a:rPr>
+                        <a:t>✏️</a:t>
                       </a:r>
                       <a:endParaRPr lang="en-US" sz="600" dirty="0"/>
                     </a:p>
@@ -5454,7 +6124,7 @@
                       <a:tailEnd type="none" w="med" len="med"/>
                     </a:lnB>
                     <a:solidFill>
-                      <a:srgbClr val="F5F5F5"/>
+                      <a:srgbClr val="E3F2FD"/>
                     </a:solidFill>
                   </a:tcPr>
                 </a:tc>
@@ -5466,14 +6136,6 @@
                       <a:pPr algn="ctr" indent="0" marL="0">
                         <a:buNone/>
                       </a:pPr>
-                      <a:r>
-                        <a:rPr lang="en-US" sz="600" dirty="0">
-                          <a:solidFill>
-                            <a:srgbClr val="333333"/>
-                          </a:solidFill>
-                        </a:rPr>
-                        <a:t>1:1</a:t>
-                      </a:r>
                       <a:endParaRPr lang="en-US" sz="600" dirty="0"/>
                     </a:p>
                   </a:txBody>
@@ -5515,7 +6177,7 @@
                       <a:tailEnd type="none" w="med" len="med"/>
                     </a:lnB>
                     <a:solidFill>
-                      <a:srgbClr val="E8F5E9"/>
+                      <a:srgbClr val="F5F5F5"/>
                     </a:solidFill>
                   </a:tcPr>
                 </a:tc>
@@ -5527,14 +6189,6 @@
                       <a:pPr algn="ctr" indent="0" marL="0">
                         <a:buNone/>
                       </a:pPr>
-                      <a:r>
-                        <a:rPr lang="en-US" sz="600" dirty="0">
-                          <a:solidFill>
-                            <a:srgbClr val="999999"/>
-                          </a:solidFill>
-                        </a:rPr>
-                        <a:t>▸</a:t>
-                      </a:r>
                       <a:endParaRPr lang="en-US" sz="600" dirty="0"/>
                     </a:p>
                   </a:txBody>
@@ -5591,10 +6245,10 @@
                       <a:r>
                         <a:rPr lang="en-US" sz="600" dirty="0">
                           <a:solidFill>
-                            <a:srgbClr val="333333"/>
-                          </a:solidFill>
-                        </a:rPr>
-                        <a:t>1:1</a:t>
+                            <a:srgbClr val="000000"/>
+                          </a:solidFill>
+                        </a:rPr>
+                        <a:t>🗣</a:t>
                       </a:r>
                       <a:endParaRPr lang="en-US" sz="600" dirty="0"/>
                     </a:p>
@@ -5652,10 +6306,10 @@
                       <a:r>
                         <a:rPr lang="en-US" sz="600" dirty="0">
                           <a:solidFill>
-                            <a:srgbClr val="999999"/>
-                          </a:solidFill>
-                        </a:rPr>
-                        <a:t>▸</a:t>
+                            <a:srgbClr val="000000"/>
+                          </a:solidFill>
+                        </a:rPr>
+                        <a:t>✏️</a:t>
                       </a:r>
                       <a:endParaRPr lang="en-US" sz="600" dirty="0"/>
                     </a:p>
@@ -5698,7 +6352,7 @@
                       <a:tailEnd type="none" w="med" len="med"/>
                     </a:lnB>
                     <a:solidFill>
-                      <a:srgbClr val="F5F5F5"/>
+                      <a:srgbClr val="E3F2FD"/>
                     </a:solidFill>
                   </a:tcPr>
                 </a:tc>
@@ -5710,14 +6364,6 @@
                       <a:pPr algn="ctr" indent="0" marL="0">
                         <a:buNone/>
                       </a:pPr>
-                      <a:r>
-                        <a:rPr lang="en-US" sz="600" dirty="0">
-                          <a:solidFill>
-                            <a:srgbClr val="333333"/>
-                          </a:solidFill>
-                        </a:rPr>
-                        <a:t>1:1</a:t>
-                      </a:r>
                       <a:endParaRPr lang="en-US" sz="600" dirty="0"/>
                     </a:p>
                   </a:txBody>
@@ -5759,7 +6405,7 @@
                       <a:tailEnd type="none" w="med" len="med"/>
                     </a:lnB>
                     <a:solidFill>
-                      <a:srgbClr val="E8F5E9"/>
+                      <a:srgbClr val="F5F5F5"/>
                     </a:solidFill>
                   </a:tcPr>
                 </a:tc>
@@ -5771,14 +6417,6 @@
                       <a:pPr algn="ctr" indent="0" marL="0">
                         <a:buNone/>
                       </a:pPr>
-                      <a:r>
-                        <a:rPr lang="en-US" sz="600" dirty="0">
-                          <a:solidFill>
-                            <a:srgbClr val="999999"/>
-                          </a:solidFill>
-                        </a:rPr>
-                        <a:t>▸</a:t>
-                      </a:r>
                       <a:endParaRPr lang="en-US" sz="600" dirty="0"/>
                     </a:p>
                   </a:txBody>
@@ -5825,7 +6463,7 @@
                   </a:tcPr>
                 </a:tc>
               </a:tr>
-              <a:tr h="219456">
+              <a:tr h="210312">
                 <a:tc>
                   <a:txBody>
                     <a:bodyPr/>
@@ -5835,14 +6473,14 @@
                         <a:buNone/>
                       </a:pPr>
                       <a:r>
-                        <a:rPr lang="en-US" sz="600" b="1" dirty="0">
+                        <a:rPr lang="en-US" sz="500" b="1" dirty="0">
                           <a:solidFill>
                             <a:srgbClr val="000000"/>
                           </a:solidFill>
                         </a:rPr>
                         <a:t>沛沛</a:t>
                       </a:r>
-                      <a:endParaRPr lang="en-US" sz="600" dirty="0"/>
+                      <a:endParaRPr lang="en-US" sz="500" dirty="0"/>
                     </a:p>
                   </a:txBody>
                   <a:tcPr marL="25400" marR="25400" marT="12700" marB="12700">
@@ -5895,10 +6533,10 @@
                       <a:r>
                         <a:rPr lang="en-US" sz="600" dirty="0">
                           <a:solidFill>
-                            <a:srgbClr val="333333"/>
-                          </a:solidFill>
-                        </a:rPr>
-                        <a:t>1:1</a:t>
+                            <a:srgbClr val="000000"/>
+                          </a:solidFill>
+                        </a:rPr>
+                        <a:t>🗣</a:t>
                       </a:r>
                       <a:endParaRPr lang="en-US" sz="600" dirty="0"/>
                     </a:p>
@@ -5956,10 +6594,10 @@
                       <a:r>
                         <a:rPr lang="en-US" sz="600" dirty="0">
                           <a:solidFill>
-                            <a:srgbClr val="999999"/>
-                          </a:solidFill>
-                        </a:rPr>
-                        <a:t>▸</a:t>
+                            <a:srgbClr val="000000"/>
+                          </a:solidFill>
+                        </a:rPr>
+                        <a:t>✏️</a:t>
                       </a:r>
                       <a:endParaRPr lang="en-US" sz="600" dirty="0"/>
                     </a:p>
@@ -6002,7 +6640,7 @@
                       <a:tailEnd type="none" w="med" len="med"/>
                     </a:lnB>
                     <a:solidFill>
-                      <a:srgbClr val="F5F5F5"/>
+                      <a:srgbClr val="E3F2FD"/>
                     </a:solidFill>
                   </a:tcPr>
                 </a:tc>
@@ -6014,14 +6652,6 @@
                       <a:pPr algn="ctr" indent="0" marL="0">
                         <a:buNone/>
                       </a:pPr>
-                      <a:r>
-                        <a:rPr lang="en-US" sz="600" dirty="0">
-                          <a:solidFill>
-                            <a:srgbClr val="333333"/>
-                          </a:solidFill>
-                        </a:rPr>
-                        <a:t>1:1</a:t>
-                      </a:r>
                       <a:endParaRPr lang="en-US" sz="600" dirty="0"/>
                     </a:p>
                   </a:txBody>
@@ -6063,7 +6693,7 @@
                       <a:tailEnd type="none" w="med" len="med"/>
                     </a:lnB>
                     <a:solidFill>
-                      <a:srgbClr val="E8F5E9"/>
+                      <a:srgbClr val="F5F5F5"/>
                     </a:solidFill>
                   </a:tcPr>
                 </a:tc>
@@ -6075,14 +6705,6 @@
                       <a:pPr algn="ctr" indent="0" marL="0">
                         <a:buNone/>
                       </a:pPr>
-                      <a:r>
-                        <a:rPr lang="en-US" sz="600" dirty="0">
-                          <a:solidFill>
-                            <a:srgbClr val="999999"/>
-                          </a:solidFill>
-                        </a:rPr>
-                        <a:t>▸</a:t>
-                      </a:r>
                       <a:endParaRPr lang="en-US" sz="600" dirty="0"/>
                     </a:p>
                   </a:txBody>
@@ -6139,10 +6761,10 @@
                       <a:r>
                         <a:rPr lang="en-US" sz="600" dirty="0">
                           <a:solidFill>
-                            <a:srgbClr val="333333"/>
-                          </a:solidFill>
-                        </a:rPr>
-                        <a:t>1:1</a:t>
+                            <a:srgbClr val="000000"/>
+                          </a:solidFill>
+                        </a:rPr>
+                        <a:t>🗣</a:t>
                       </a:r>
                       <a:endParaRPr lang="en-US" sz="600" dirty="0"/>
                     </a:p>
@@ -6200,10 +6822,10 @@
                       <a:r>
                         <a:rPr lang="en-US" sz="600" dirty="0">
                           <a:solidFill>
-                            <a:srgbClr val="999999"/>
-                          </a:solidFill>
-                        </a:rPr>
-                        <a:t>▸</a:t>
+                            <a:srgbClr val="000000"/>
+                          </a:solidFill>
+                        </a:rPr>
+                        <a:t>✏️</a:t>
                       </a:r>
                       <a:endParaRPr lang="en-US" sz="600" dirty="0"/>
                     </a:p>
@@ -6246,7 +6868,7 @@
                       <a:tailEnd type="none" w="med" len="med"/>
                     </a:lnB>
                     <a:solidFill>
-                      <a:srgbClr val="F5F5F5"/>
+                      <a:srgbClr val="E3F2FD"/>
                     </a:solidFill>
                   </a:tcPr>
                 </a:tc>
@@ -6258,14 +6880,6 @@
                       <a:pPr algn="ctr" indent="0" marL="0">
                         <a:buNone/>
                       </a:pPr>
-                      <a:r>
-                        <a:rPr lang="en-US" sz="600" dirty="0">
-                          <a:solidFill>
-                            <a:srgbClr val="333333"/>
-                          </a:solidFill>
-                        </a:rPr>
-                        <a:t>1:1</a:t>
-                      </a:r>
                       <a:endParaRPr lang="en-US" sz="600" dirty="0"/>
                     </a:p>
                   </a:txBody>
@@ -6307,7 +6921,7 @@
                       <a:tailEnd type="none" w="med" len="med"/>
                     </a:lnB>
                     <a:solidFill>
-                      <a:srgbClr val="E8F5E9"/>
+                      <a:srgbClr val="F5F5F5"/>
                     </a:solidFill>
                   </a:tcPr>
                 </a:tc>
@@ -6319,14 +6933,6 @@
                       <a:pPr algn="ctr" indent="0" marL="0">
                         <a:buNone/>
                       </a:pPr>
-                      <a:r>
-                        <a:rPr lang="en-US" sz="600" dirty="0">
-                          <a:solidFill>
-                            <a:srgbClr val="999999"/>
-                          </a:solidFill>
-                        </a:rPr>
-                        <a:t>▸</a:t>
-                      </a:r>
                       <a:endParaRPr lang="en-US" sz="600" dirty="0"/>
                     </a:p>
                   </a:txBody>
@@ -6373,7 +6979,7 @@
                   </a:tcPr>
                 </a:tc>
               </a:tr>
-              <a:tr h="219456">
+              <a:tr h="210312">
                 <a:tc>
                   <a:txBody>
                     <a:bodyPr/>
@@ -6383,14 +6989,14 @@
                         <a:buNone/>
                       </a:pPr>
                       <a:r>
-                        <a:rPr lang="en-US" sz="600" b="1" dirty="0">
+                        <a:rPr lang="en-US" sz="500" b="1" dirty="0">
                           <a:solidFill>
                             <a:srgbClr val="000000"/>
                           </a:solidFill>
                         </a:rPr>
                         <a:t>棣</a:t>
                       </a:r>
-                      <a:endParaRPr lang="en-US" sz="600" dirty="0"/>
+                      <a:endParaRPr lang="en-US" sz="500" dirty="0"/>
                     </a:p>
                   </a:txBody>
                   <a:tcPr marL="25400" marR="25400" marT="12700" marB="12700">
@@ -6443,10 +7049,10 @@
                       <a:r>
                         <a:rPr lang="en-US" sz="600" dirty="0">
                           <a:solidFill>
-                            <a:srgbClr val="333333"/>
-                          </a:solidFill>
-                        </a:rPr>
-                        <a:t>1:1</a:t>
+                            <a:srgbClr val="000000"/>
+                          </a:solidFill>
+                        </a:rPr>
+                        <a:t>🗣</a:t>
                       </a:r>
                       <a:endParaRPr lang="en-US" sz="600" dirty="0"/>
                     </a:p>
@@ -6504,10 +7110,10 @@
                       <a:r>
                         <a:rPr lang="en-US" sz="600" dirty="0">
                           <a:solidFill>
-                            <a:srgbClr val="999999"/>
-                          </a:solidFill>
-                        </a:rPr>
-                        <a:t>▸</a:t>
+                            <a:srgbClr val="000000"/>
+                          </a:solidFill>
+                        </a:rPr>
+                        <a:t>✏️</a:t>
                       </a:r>
                       <a:endParaRPr lang="en-US" sz="600" dirty="0"/>
                     </a:p>
@@ -6550,7 +7156,7 @@
                       <a:tailEnd type="none" w="med" len="med"/>
                     </a:lnB>
                     <a:solidFill>
-                      <a:srgbClr val="F5F5F5"/>
+                      <a:srgbClr val="E3F2FD"/>
                     </a:solidFill>
                   </a:tcPr>
                 </a:tc>
@@ -6562,14 +7168,6 @@
                       <a:pPr algn="ctr" indent="0" marL="0">
                         <a:buNone/>
                       </a:pPr>
-                      <a:r>
-                        <a:rPr lang="en-US" sz="600" dirty="0">
-                          <a:solidFill>
-                            <a:srgbClr val="333333"/>
-                          </a:solidFill>
-                        </a:rPr>
-                        <a:t>1:1</a:t>
-                      </a:r>
                       <a:endParaRPr lang="en-US" sz="600" dirty="0"/>
                     </a:p>
                   </a:txBody>
@@ -6611,7 +7209,7 @@
                       <a:tailEnd type="none" w="med" len="med"/>
                     </a:lnB>
                     <a:solidFill>
-                      <a:srgbClr val="E8F5E9"/>
+                      <a:srgbClr val="F5F5F5"/>
                     </a:solidFill>
                   </a:tcPr>
                 </a:tc>
@@ -6623,14 +7221,6 @@
                       <a:pPr algn="ctr" indent="0" marL="0">
                         <a:buNone/>
                       </a:pPr>
-                      <a:r>
-                        <a:rPr lang="en-US" sz="600" dirty="0">
-                          <a:solidFill>
-                            <a:srgbClr val="999999"/>
-                          </a:solidFill>
-                        </a:rPr>
-                        <a:t>▸</a:t>
-                      </a:r>
                       <a:endParaRPr lang="en-US" sz="600" dirty="0"/>
                     </a:p>
                   </a:txBody>
@@ -6687,10 +7277,10 @@
                       <a:r>
                         <a:rPr lang="en-US" sz="600" dirty="0">
                           <a:solidFill>
-                            <a:srgbClr val="333333"/>
-                          </a:solidFill>
-                        </a:rPr>
-                        <a:t>1:1</a:t>
+                            <a:srgbClr val="000000"/>
+                          </a:solidFill>
+                        </a:rPr>
+                        <a:t>🗣</a:t>
                       </a:r>
                       <a:endParaRPr lang="en-US" sz="600" dirty="0"/>
                     </a:p>
@@ -6748,10 +7338,10 @@
                       <a:r>
                         <a:rPr lang="en-US" sz="600" dirty="0">
                           <a:solidFill>
-                            <a:srgbClr val="999999"/>
-                          </a:solidFill>
-                        </a:rPr>
-                        <a:t>▸</a:t>
+                            <a:srgbClr val="000000"/>
+                          </a:solidFill>
+                        </a:rPr>
+                        <a:t>✏️</a:t>
                       </a:r>
                       <a:endParaRPr lang="en-US" sz="600" dirty="0"/>
                     </a:p>
@@ -6794,7 +7384,7 @@
                       <a:tailEnd type="none" w="med" len="med"/>
                     </a:lnB>
                     <a:solidFill>
-                      <a:srgbClr val="F5F5F5"/>
+                      <a:srgbClr val="E3F2FD"/>
                     </a:solidFill>
                   </a:tcPr>
                 </a:tc>
@@ -6806,14 +7396,6 @@
                       <a:pPr algn="ctr" indent="0" marL="0">
                         <a:buNone/>
                       </a:pPr>
-                      <a:r>
-                        <a:rPr lang="en-US" sz="600" dirty="0">
-                          <a:solidFill>
-                            <a:srgbClr val="333333"/>
-                          </a:solidFill>
-                        </a:rPr>
-                        <a:t>1:1</a:t>
-                      </a:r>
                       <a:endParaRPr lang="en-US" sz="600" dirty="0"/>
                     </a:p>
                   </a:txBody>
@@ -6855,7 +7437,7 @@
                       <a:tailEnd type="none" w="med" len="med"/>
                     </a:lnB>
                     <a:solidFill>
-                      <a:srgbClr val="E8F5E9"/>
+                      <a:srgbClr val="F5F5F5"/>
                     </a:solidFill>
                   </a:tcPr>
                 </a:tc>
@@ -6867,14 +7449,6 @@
                       <a:pPr algn="ctr" indent="0" marL="0">
                         <a:buNone/>
                       </a:pPr>
-                      <a:r>
-                        <a:rPr lang="en-US" sz="600" dirty="0">
-                          <a:solidFill>
-                            <a:srgbClr val="999999"/>
-                          </a:solidFill>
-                        </a:rPr>
-                        <a:t>▸</a:t>
-                      </a:r>
                       <a:endParaRPr lang="en-US" sz="600" dirty="0"/>
                     </a:p>
                   </a:txBody>
@@ -6921,7 +7495,7 @@
                   </a:tcPr>
                 </a:tc>
               </a:tr>
-              <a:tr h="219456">
+              <a:tr h="210312">
                 <a:tc>
                   <a:txBody>
                     <a:bodyPr/>
@@ -6931,14 +7505,14 @@
                         <a:buNone/>
                       </a:pPr>
                       <a:r>
-                        <a:rPr lang="en-US" sz="600" b="1" dirty="0">
+                        <a:rPr lang="en-US" sz="500" b="1" dirty="0">
                           <a:solidFill>
                             <a:srgbClr val="000000"/>
                           </a:solidFill>
                         </a:rPr>
                         <a:t>皓宸</a:t>
                       </a:r>
-                      <a:endParaRPr lang="en-US" sz="600" dirty="0"/>
+                      <a:endParaRPr lang="en-US" sz="500" dirty="0"/>
                     </a:p>
                   </a:txBody>
                   <a:tcPr marL="25400" marR="25400" marT="12700" marB="12700">
@@ -6991,10 +7565,10 @@
                       <a:r>
                         <a:rPr lang="en-US" sz="600" dirty="0">
                           <a:solidFill>
-                            <a:srgbClr val="333333"/>
-                          </a:solidFill>
-                        </a:rPr>
-                        <a:t>1:1</a:t>
+                            <a:srgbClr val="000000"/>
+                          </a:solidFill>
+                        </a:rPr>
+                        <a:t>✏️</a:t>
                       </a:r>
                       <a:endParaRPr lang="en-US" sz="600" dirty="0"/>
                     </a:p>
@@ -7037,7 +7611,7 @@
                       <a:tailEnd type="none" w="med" len="med"/>
                     </a:lnB>
                     <a:solidFill>
-                      <a:srgbClr val="E8F5E9"/>
+                      <a:srgbClr val="E3F2FD"/>
                     </a:solidFill>
                   </a:tcPr>
                 </a:tc>
@@ -7052,10 +7626,10 @@
                       <a:r>
                         <a:rPr lang="en-US" sz="600" dirty="0">
                           <a:solidFill>
-                            <a:srgbClr val="999999"/>
-                          </a:solidFill>
-                        </a:rPr>
-                        <a:t>▸</a:t>
+                            <a:srgbClr val="000000"/>
+                          </a:solidFill>
+                        </a:rPr>
+                        <a:t>🗣</a:t>
                       </a:r>
                       <a:endParaRPr lang="en-US" sz="600" dirty="0"/>
                     </a:p>
@@ -7098,7 +7672,7 @@
                       <a:tailEnd type="none" w="med" len="med"/>
                     </a:lnB>
                     <a:solidFill>
-                      <a:srgbClr val="F5F5F5"/>
+                      <a:srgbClr val="E8F5E9"/>
                     </a:solidFill>
                   </a:tcPr>
                 </a:tc>
@@ -7110,14 +7684,6 @@
                       <a:pPr algn="ctr" indent="0" marL="0">
                         <a:buNone/>
                       </a:pPr>
-                      <a:r>
-                        <a:rPr lang="en-US" sz="600" dirty="0">
-                          <a:solidFill>
-                            <a:srgbClr val="333333"/>
-                          </a:solidFill>
-                        </a:rPr>
-                        <a:t>1:1</a:t>
-                      </a:r>
                       <a:endParaRPr lang="en-US" sz="600" dirty="0"/>
                     </a:p>
                   </a:txBody>
@@ -7159,7 +7725,7 @@
                       <a:tailEnd type="none" w="med" len="med"/>
                     </a:lnB>
                     <a:solidFill>
-                      <a:srgbClr val="E8F5E9"/>
+                      <a:srgbClr val="F5F5F5"/>
                     </a:solidFill>
                   </a:tcPr>
                 </a:tc>
@@ -7171,14 +7737,6 @@
                       <a:pPr algn="ctr" indent="0" marL="0">
                         <a:buNone/>
                       </a:pPr>
-                      <a:r>
-                        <a:rPr lang="en-US" sz="600" dirty="0">
-                          <a:solidFill>
-                            <a:srgbClr val="999999"/>
-                          </a:solidFill>
-                        </a:rPr>
-                        <a:t>▸</a:t>
-                      </a:r>
                       <a:endParaRPr lang="en-US" sz="600" dirty="0"/>
                     </a:p>
                   </a:txBody>
@@ -7235,10 +7793,10 @@
                       <a:r>
                         <a:rPr lang="en-US" sz="600" dirty="0">
                           <a:solidFill>
-                            <a:srgbClr val="333333"/>
-                          </a:solidFill>
-                        </a:rPr>
-                        <a:t>1:1</a:t>
+                            <a:srgbClr val="000000"/>
+                          </a:solidFill>
+                        </a:rPr>
+                        <a:t>🗣</a:t>
                       </a:r>
                       <a:endParaRPr lang="en-US" sz="600" dirty="0"/>
                     </a:p>
@@ -7293,14 +7851,6 @@
                       <a:pPr algn="ctr" indent="0" marL="0">
                         <a:buNone/>
                       </a:pPr>
-                      <a:r>
-                        <a:rPr lang="en-US" sz="600" dirty="0">
-                          <a:solidFill>
-                            <a:srgbClr val="999999"/>
-                          </a:solidFill>
-                        </a:rPr>
-                        <a:t>▸</a:t>
-                      </a:r>
                       <a:endParaRPr lang="en-US" sz="600" dirty="0"/>
                     </a:p>
                   </a:txBody>
@@ -7357,10 +7907,10 @@
                       <a:r>
                         <a:rPr lang="en-US" sz="600" dirty="0">
                           <a:solidFill>
-                            <a:srgbClr val="333333"/>
-                          </a:solidFill>
-                        </a:rPr>
-                        <a:t>1:1</a:t>
+                            <a:srgbClr val="000000"/>
+                          </a:solidFill>
+                        </a:rPr>
+                        <a:t>✏️</a:t>
                       </a:r>
                       <a:endParaRPr lang="en-US" sz="600" dirty="0"/>
                     </a:p>
@@ -7403,7 +7953,7 @@
                       <a:tailEnd type="none" w="med" len="med"/>
                     </a:lnB>
                     <a:solidFill>
-                      <a:srgbClr val="E8F5E9"/>
+                      <a:srgbClr val="E3F2FD"/>
                     </a:solidFill>
                   </a:tcPr>
                 </a:tc>
@@ -7415,14 +7965,6 @@
                       <a:pPr algn="ctr" indent="0" marL="0">
                         <a:buNone/>
                       </a:pPr>
-                      <a:r>
-                        <a:rPr lang="en-US" sz="600" dirty="0">
-                          <a:solidFill>
-                            <a:srgbClr val="999999"/>
-                          </a:solidFill>
-                        </a:rPr>
-                        <a:t>▸</a:t>
-                      </a:r>
                       <a:endParaRPr lang="en-US" sz="600" dirty="0"/>
                     </a:p>
                   </a:txBody>
@@ -7469,7 +8011,7 @@
                   </a:tcPr>
                 </a:tc>
               </a:tr>
-              <a:tr h="219456">
+              <a:tr h="210312">
                 <a:tc>
                   <a:txBody>
                     <a:bodyPr/>
@@ -7479,14 +8021,14 @@
                         <a:buNone/>
                       </a:pPr>
                       <a:r>
-                        <a:rPr lang="en-US" sz="600" b="1" dirty="0">
+                        <a:rPr lang="en-US" sz="500" b="1" dirty="0">
                           <a:solidFill>
                             <a:srgbClr val="000000"/>
                           </a:solidFill>
                         </a:rPr>
                         <a:t>皓宇</a:t>
                       </a:r>
-                      <a:endParaRPr lang="en-US" sz="600" dirty="0"/>
+                      <a:endParaRPr lang="en-US" sz="500" dirty="0"/>
                     </a:p>
                   </a:txBody>
                   <a:tcPr marL="25400" marR="25400" marT="12700" marB="12700">
@@ -7539,10 +8081,10 @@
                       <a:r>
                         <a:rPr lang="en-US" sz="600" dirty="0">
                           <a:solidFill>
-                            <a:srgbClr val="333333"/>
-                          </a:solidFill>
-                        </a:rPr>
-                        <a:t>1:1</a:t>
+                            <a:srgbClr val="000000"/>
+                          </a:solidFill>
+                        </a:rPr>
+                        <a:t>✏️</a:t>
                       </a:r>
                       <a:endParaRPr lang="en-US" sz="600" dirty="0"/>
                     </a:p>
@@ -7585,7 +8127,7 @@
                       <a:tailEnd type="none" w="med" len="med"/>
                     </a:lnB>
                     <a:solidFill>
-                      <a:srgbClr val="E8F5E9"/>
+                      <a:srgbClr val="E3F2FD"/>
                     </a:solidFill>
                   </a:tcPr>
                 </a:tc>
@@ -7600,10 +8142,10 @@
                       <a:r>
                         <a:rPr lang="en-US" sz="600" dirty="0">
                           <a:solidFill>
-                            <a:srgbClr val="999999"/>
-                          </a:solidFill>
-                        </a:rPr>
-                        <a:t>▸</a:t>
+                            <a:srgbClr val="000000"/>
+                          </a:solidFill>
+                        </a:rPr>
+                        <a:t>🗣</a:t>
                       </a:r>
                       <a:endParaRPr lang="en-US" sz="600" dirty="0"/>
                     </a:p>
@@ -7646,7 +8188,7 @@
                       <a:tailEnd type="none" w="med" len="med"/>
                     </a:lnB>
                     <a:solidFill>
-                      <a:srgbClr val="F5F5F5"/>
+                      <a:srgbClr val="E8F5E9"/>
                     </a:solidFill>
                   </a:tcPr>
                 </a:tc>
@@ -7658,14 +8200,6 @@
                       <a:pPr algn="ctr" indent="0" marL="0">
                         <a:buNone/>
                       </a:pPr>
-                      <a:r>
-                        <a:rPr lang="en-US" sz="600" dirty="0">
-                          <a:solidFill>
-                            <a:srgbClr val="333333"/>
-                          </a:solidFill>
-                        </a:rPr>
-                        <a:t>1:1</a:t>
-                      </a:r>
                       <a:endParaRPr lang="en-US" sz="600" dirty="0"/>
                     </a:p>
                   </a:txBody>
@@ -7707,7 +8241,7 @@
                       <a:tailEnd type="none" w="med" len="med"/>
                     </a:lnB>
                     <a:solidFill>
-                      <a:srgbClr val="E8F5E9"/>
+                      <a:srgbClr val="F5F5F5"/>
                     </a:solidFill>
                   </a:tcPr>
                 </a:tc>
@@ -7719,14 +8253,6 @@
                       <a:pPr algn="ctr" indent="0" marL="0">
                         <a:buNone/>
                       </a:pPr>
-                      <a:r>
-                        <a:rPr lang="en-US" sz="600" dirty="0">
-                          <a:solidFill>
-                            <a:srgbClr val="999999"/>
-                          </a:solidFill>
-                        </a:rPr>
-                        <a:t>▸</a:t>
-                      </a:r>
                       <a:endParaRPr lang="en-US" sz="600" dirty="0"/>
                     </a:p>
                   </a:txBody>
@@ -7783,10 +8309,10 @@
                       <a:r>
                         <a:rPr lang="en-US" sz="600" dirty="0">
                           <a:solidFill>
-                            <a:srgbClr val="333333"/>
-                          </a:solidFill>
-                        </a:rPr>
-                        <a:t>1:1</a:t>
+                            <a:srgbClr val="000000"/>
+                          </a:solidFill>
+                        </a:rPr>
+                        <a:t>✏️</a:t>
                       </a:r>
                       <a:endParaRPr lang="en-US" sz="600" dirty="0"/>
                     </a:p>
@@ -7829,7 +8355,7 @@
                       <a:tailEnd type="none" w="med" len="med"/>
                     </a:lnB>
                     <a:solidFill>
-                      <a:srgbClr val="E8F5E9"/>
+                      <a:srgbClr val="E3F2FD"/>
                     </a:solidFill>
                   </a:tcPr>
                 </a:tc>
@@ -7844,10 +8370,10 @@
                       <a:r>
                         <a:rPr lang="en-US" sz="600" dirty="0">
                           <a:solidFill>
-                            <a:srgbClr val="999999"/>
-                          </a:solidFill>
-                        </a:rPr>
-                        <a:t>▸</a:t>
+                            <a:srgbClr val="000000"/>
+                          </a:solidFill>
+                        </a:rPr>
+                        <a:t>🗣</a:t>
                       </a:r>
                       <a:endParaRPr lang="en-US" sz="600" dirty="0"/>
                     </a:p>
@@ -7890,7 +8416,7 @@
                       <a:tailEnd type="none" w="med" len="med"/>
                     </a:lnB>
                     <a:solidFill>
-                      <a:srgbClr val="F5F5F5"/>
+                      <a:srgbClr val="E8F5E9"/>
                     </a:solidFill>
                   </a:tcPr>
                 </a:tc>
@@ -7902,14 +8428,6 @@
                       <a:pPr algn="ctr" indent="0" marL="0">
                         <a:buNone/>
                       </a:pPr>
-                      <a:r>
-                        <a:rPr lang="en-US" sz="600" dirty="0">
-                          <a:solidFill>
-                            <a:srgbClr val="333333"/>
-                          </a:solidFill>
-                        </a:rPr>
-                        <a:t>1:1</a:t>
-                      </a:r>
                       <a:endParaRPr lang="en-US" sz="600" dirty="0"/>
                     </a:p>
                   </a:txBody>
@@ -7951,7 +8469,7 @@
                       <a:tailEnd type="none" w="med" len="med"/>
                     </a:lnB>
                     <a:solidFill>
-                      <a:srgbClr val="E8F5E9"/>
+                      <a:srgbClr val="F5F5F5"/>
                     </a:solidFill>
                   </a:tcPr>
                 </a:tc>
@@ -7963,14 +8481,6 @@
                       <a:pPr algn="ctr" indent="0" marL="0">
                         <a:buNone/>
                       </a:pPr>
-                      <a:r>
-                        <a:rPr lang="en-US" sz="600" dirty="0">
-                          <a:solidFill>
-                            <a:srgbClr val="999999"/>
-                          </a:solidFill>
-                        </a:rPr>
-                        <a:t>▸</a:t>
-                      </a:r>
                       <a:endParaRPr lang="en-US" sz="600" dirty="0"/>
                     </a:p>
                   </a:txBody>
@@ -8017,7 +8527,7 @@
                   </a:tcPr>
                 </a:tc>
               </a:tr>
-              <a:tr h="219456">
+              <a:tr h="210312">
                 <a:tc>
                   <a:txBody>
                     <a:bodyPr/>
@@ -8027,14 +8537,14 @@
                         <a:buNone/>
                       </a:pPr>
                       <a:r>
-                        <a:rPr lang="en-US" sz="600" b="1" dirty="0">
+                        <a:rPr lang="en-US" sz="500" b="1" dirty="0">
                           <a:solidFill>
                             <a:srgbClr val="000000"/>
                           </a:solidFill>
                         </a:rPr>
                         <a:t>Alice</a:t>
                       </a:r>
-                      <a:endParaRPr lang="en-US" sz="600" dirty="0"/>
+                      <a:endParaRPr lang="en-US" sz="500" dirty="0"/>
                     </a:p>
                   </a:txBody>
                   <a:tcPr marL="25400" marR="25400" marT="12700" marB="12700">
@@ -8087,10 +8597,10 @@
                       <a:r>
                         <a:rPr lang="en-US" sz="600" dirty="0">
                           <a:solidFill>
-                            <a:srgbClr val="333333"/>
-                          </a:solidFill>
-                        </a:rPr>
-                        <a:t>1:1</a:t>
+                            <a:srgbClr val="000000"/>
+                          </a:solidFill>
+                        </a:rPr>
+                        <a:t>✏️</a:t>
                       </a:r>
                       <a:endParaRPr lang="en-US" sz="600" dirty="0"/>
                     </a:p>
@@ -8133,7 +8643,7 @@
                       <a:tailEnd type="none" w="med" len="med"/>
                     </a:lnB>
                     <a:solidFill>
-                      <a:srgbClr val="E8F5E9"/>
+                      <a:srgbClr val="E3F2FD"/>
                     </a:solidFill>
                   </a:tcPr>
                 </a:tc>
@@ -8148,10 +8658,10 @@
                       <a:r>
                         <a:rPr lang="en-US" sz="600" dirty="0">
                           <a:solidFill>
-                            <a:srgbClr val="999999"/>
-                          </a:solidFill>
-                        </a:rPr>
-                        <a:t>▸</a:t>
+                            <a:srgbClr val="000000"/>
+                          </a:solidFill>
+                        </a:rPr>
+                        <a:t>🗣</a:t>
                       </a:r>
                       <a:endParaRPr lang="en-US" sz="600" dirty="0"/>
                     </a:p>
@@ -8194,7 +8704,7 @@
                       <a:tailEnd type="none" w="med" len="med"/>
                     </a:lnB>
                     <a:solidFill>
-                      <a:srgbClr val="F5F5F5"/>
+                      <a:srgbClr val="E8F5E9"/>
                     </a:solidFill>
                   </a:tcPr>
                 </a:tc>
@@ -8206,14 +8716,6 @@
                       <a:pPr algn="ctr" indent="0" marL="0">
                         <a:buNone/>
                       </a:pPr>
-                      <a:r>
-                        <a:rPr lang="en-US" sz="600" dirty="0">
-                          <a:solidFill>
-                            <a:srgbClr val="333333"/>
-                          </a:solidFill>
-                        </a:rPr>
-                        <a:t>1:1</a:t>
-                      </a:r>
                       <a:endParaRPr lang="en-US" sz="600" dirty="0"/>
                     </a:p>
                   </a:txBody>
@@ -8255,7 +8757,7 @@
                       <a:tailEnd type="none" w="med" len="med"/>
                     </a:lnB>
                     <a:solidFill>
-                      <a:srgbClr val="E8F5E9"/>
+                      <a:srgbClr val="F5F5F5"/>
                     </a:solidFill>
                   </a:tcPr>
                 </a:tc>
@@ -8267,14 +8769,6 @@
                       <a:pPr algn="ctr" indent="0" marL="0">
                         <a:buNone/>
                       </a:pPr>
-                      <a:r>
-                        <a:rPr lang="en-US" sz="600" dirty="0">
-                          <a:solidFill>
-                            <a:srgbClr val="999999"/>
-                          </a:solidFill>
-                        </a:rPr>
-                        <a:t>▸</a:t>
-                      </a:r>
                       <a:endParaRPr lang="en-US" sz="600" dirty="0"/>
                     </a:p>
                   </a:txBody>
@@ -8331,10 +8825,10 @@
                       <a:r>
                         <a:rPr lang="en-US" sz="600" dirty="0">
                           <a:solidFill>
-                            <a:srgbClr val="333333"/>
-                          </a:solidFill>
-                        </a:rPr>
-                        <a:t>1:1</a:t>
+                            <a:srgbClr val="000000"/>
+                          </a:solidFill>
+                        </a:rPr>
+                        <a:t>✏️</a:t>
                       </a:r>
                       <a:endParaRPr lang="en-US" sz="600" dirty="0"/>
                     </a:p>
@@ -8377,7 +8871,7 @@
                       <a:tailEnd type="none" w="med" len="med"/>
                     </a:lnB>
                     <a:solidFill>
-                      <a:srgbClr val="E8F5E9"/>
+                      <a:srgbClr val="E3F2FD"/>
                     </a:solidFill>
                   </a:tcPr>
                 </a:tc>
@@ -8392,10 +8886,10 @@
                       <a:r>
                         <a:rPr lang="en-US" sz="600" dirty="0">
                           <a:solidFill>
-                            <a:srgbClr val="999999"/>
-                          </a:solidFill>
-                        </a:rPr>
-                        <a:t>▸</a:t>
+                            <a:srgbClr val="000000"/>
+                          </a:solidFill>
+                        </a:rPr>
+                        <a:t>🗣</a:t>
                       </a:r>
                       <a:endParaRPr lang="en-US" sz="600" dirty="0"/>
                     </a:p>
@@ -8438,7 +8932,7 @@
                       <a:tailEnd type="none" w="med" len="med"/>
                     </a:lnB>
                     <a:solidFill>
-                      <a:srgbClr val="F5F5F5"/>
+                      <a:srgbClr val="E8F5E9"/>
                     </a:solidFill>
                   </a:tcPr>
                 </a:tc>
@@ -8450,14 +8944,6 @@
                       <a:pPr algn="ctr" indent="0" marL="0">
                         <a:buNone/>
                       </a:pPr>
-                      <a:r>
-                        <a:rPr lang="en-US" sz="600" dirty="0">
-                          <a:solidFill>
-                            <a:srgbClr val="333333"/>
-                          </a:solidFill>
-                        </a:rPr>
-                        <a:t>1:1</a:t>
-                      </a:r>
                       <a:endParaRPr lang="en-US" sz="600" dirty="0"/>
                     </a:p>
                   </a:txBody>
@@ -8499,7 +8985,7 @@
                       <a:tailEnd type="none" w="med" len="med"/>
                     </a:lnB>
                     <a:solidFill>
-                      <a:srgbClr val="E8F5E9"/>
+                      <a:srgbClr val="F5F5F5"/>
                     </a:solidFill>
                   </a:tcPr>
                 </a:tc>
@@ -8511,14 +8997,6 @@
                       <a:pPr algn="ctr" indent="0" marL="0">
                         <a:buNone/>
                       </a:pPr>
-                      <a:r>
-                        <a:rPr lang="en-US" sz="600" dirty="0">
-                          <a:solidFill>
-                            <a:srgbClr val="999999"/>
-                          </a:solidFill>
-                        </a:rPr>
-                        <a:t>▸</a:t>
-                      </a:r>
                       <a:endParaRPr lang="en-US" sz="600" dirty="0"/>
                     </a:p>
                   </a:txBody>
@@ -8565,7 +9043,7 @@
                   </a:tcPr>
                 </a:tc>
               </a:tr>
-              <a:tr h="219456">
+              <a:tr h="210312">
                 <a:tc>
                   <a:txBody>
                     <a:bodyPr/>
@@ -8575,14 +9053,14 @@
                         <a:buNone/>
                       </a:pPr>
                       <a:r>
-                        <a:rPr lang="en-US" sz="600" b="1" dirty="0">
+                        <a:rPr lang="en-US" sz="500" b="1" dirty="0">
                           <a:solidFill>
                             <a:srgbClr val="000000"/>
                           </a:solidFill>
                         </a:rPr>
                         <a:t>奕安</a:t>
                       </a:r>
-                      <a:endParaRPr lang="en-US" sz="600" dirty="0"/>
+                      <a:endParaRPr lang="en-US" sz="500" dirty="0"/>
                     </a:p>
                   </a:txBody>
                   <a:tcPr marL="25400" marR="25400" marT="12700" marB="12700">
@@ -8635,10 +9113,10 @@
                       <a:r>
                         <a:rPr lang="en-US" sz="600" dirty="0">
                           <a:solidFill>
-                            <a:srgbClr val="333333"/>
-                          </a:solidFill>
-                        </a:rPr>
-                        <a:t>1:1</a:t>
+                            <a:srgbClr val="000000"/>
+                          </a:solidFill>
+                        </a:rPr>
+                        <a:t>✏️</a:t>
                       </a:r>
                       <a:endParaRPr lang="en-US" sz="600" dirty="0"/>
                     </a:p>
@@ -8681,7 +9159,7 @@
                       <a:tailEnd type="none" w="med" len="med"/>
                     </a:lnB>
                     <a:solidFill>
-                      <a:srgbClr val="E8F5E9"/>
+                      <a:srgbClr val="E3F2FD"/>
                     </a:solidFill>
                   </a:tcPr>
                 </a:tc>
@@ -8696,10 +9174,10 @@
                       <a:r>
                         <a:rPr lang="en-US" sz="600" dirty="0">
                           <a:solidFill>
-                            <a:srgbClr val="999999"/>
-                          </a:solidFill>
-                        </a:rPr>
-                        <a:t>▸</a:t>
+                            <a:srgbClr val="000000"/>
+                          </a:solidFill>
+                        </a:rPr>
+                        <a:t>🗣</a:t>
                       </a:r>
                       <a:endParaRPr lang="en-US" sz="600" dirty="0"/>
                     </a:p>
@@ -8742,7 +9220,7 @@
                       <a:tailEnd type="none" w="med" len="med"/>
                     </a:lnB>
                     <a:solidFill>
-                      <a:srgbClr val="F5F5F5"/>
+                      <a:srgbClr val="E8F5E9"/>
                     </a:solidFill>
                   </a:tcPr>
                 </a:tc>
@@ -8754,14 +9232,6 @@
                       <a:pPr algn="ctr" indent="0" marL="0">
                         <a:buNone/>
                       </a:pPr>
-                      <a:r>
-                        <a:rPr lang="en-US" sz="600" dirty="0">
-                          <a:solidFill>
-                            <a:srgbClr val="333333"/>
-                          </a:solidFill>
-                        </a:rPr>
-                        <a:t>1:1</a:t>
-                      </a:r>
                       <a:endParaRPr lang="en-US" sz="600" dirty="0"/>
                     </a:p>
                   </a:txBody>
@@ -8803,7 +9273,7 @@
                       <a:tailEnd type="none" w="med" len="med"/>
                     </a:lnB>
                     <a:solidFill>
-                      <a:srgbClr val="E8F5E9"/>
+                      <a:srgbClr val="F5F5F5"/>
                     </a:solidFill>
                   </a:tcPr>
                 </a:tc>
@@ -8815,14 +9285,6 @@
                       <a:pPr algn="ctr" indent="0" marL="0">
                         <a:buNone/>
                       </a:pPr>
-                      <a:r>
-                        <a:rPr lang="en-US" sz="600" dirty="0">
-                          <a:solidFill>
-                            <a:srgbClr val="999999"/>
-                          </a:solidFill>
-                        </a:rPr>
-                        <a:t>▸</a:t>
-                      </a:r>
                       <a:endParaRPr lang="en-US" sz="600" dirty="0"/>
                     </a:p>
                   </a:txBody>
@@ -8879,10 +9341,10 @@
                       <a:r>
                         <a:rPr lang="en-US" sz="600" dirty="0">
                           <a:solidFill>
-                            <a:srgbClr val="333333"/>
-                          </a:solidFill>
-                        </a:rPr>
-                        <a:t>1:1</a:t>
+                            <a:srgbClr val="000000"/>
+                          </a:solidFill>
+                        </a:rPr>
+                        <a:t>✏️</a:t>
                       </a:r>
                       <a:endParaRPr lang="en-US" sz="600" dirty="0"/>
                     </a:p>
@@ -8925,7 +9387,7 @@
                       <a:tailEnd type="none" w="med" len="med"/>
                     </a:lnB>
                     <a:solidFill>
-                      <a:srgbClr val="E8F5E9"/>
+                      <a:srgbClr val="E3F2FD"/>
                     </a:solidFill>
                   </a:tcPr>
                 </a:tc>
@@ -8940,10 +9402,10 @@
                       <a:r>
                         <a:rPr lang="en-US" sz="600" dirty="0">
                           <a:solidFill>
-                            <a:srgbClr val="999999"/>
-                          </a:solidFill>
-                        </a:rPr>
-                        <a:t>▸</a:t>
+                            <a:srgbClr val="000000"/>
+                          </a:solidFill>
+                        </a:rPr>
+                        <a:t>🗣</a:t>
                       </a:r>
                       <a:endParaRPr lang="en-US" sz="600" dirty="0"/>
                     </a:p>
@@ -8986,7 +9448,7 @@
                       <a:tailEnd type="none" w="med" len="med"/>
                     </a:lnB>
                     <a:solidFill>
-                      <a:srgbClr val="F5F5F5"/>
+                      <a:srgbClr val="E8F5E9"/>
                     </a:solidFill>
                   </a:tcPr>
                 </a:tc>
@@ -8998,14 +9460,6 @@
                       <a:pPr algn="ctr" indent="0" marL="0">
                         <a:buNone/>
                       </a:pPr>
-                      <a:r>
-                        <a:rPr lang="en-US" sz="600" dirty="0">
-                          <a:solidFill>
-                            <a:srgbClr val="333333"/>
-                          </a:solidFill>
-                        </a:rPr>
-                        <a:t>1:1</a:t>
-                      </a:r>
                       <a:endParaRPr lang="en-US" sz="600" dirty="0"/>
                     </a:p>
                   </a:txBody>
@@ -9047,7 +9501,7 @@
                       <a:tailEnd type="none" w="med" len="med"/>
                     </a:lnB>
                     <a:solidFill>
-                      <a:srgbClr val="E8F5E9"/>
+                      <a:srgbClr val="F5F5F5"/>
                     </a:solidFill>
                   </a:tcPr>
                 </a:tc>
@@ -9059,14 +9513,6 @@
                       <a:pPr algn="ctr" indent="0" marL="0">
                         <a:buNone/>
                       </a:pPr>
-                      <a:r>
-                        <a:rPr lang="en-US" sz="600" dirty="0">
-                          <a:solidFill>
-                            <a:srgbClr val="999999"/>
-                          </a:solidFill>
-                        </a:rPr>
-                        <a:t>▸</a:t>
-                      </a:r>
                       <a:endParaRPr lang="en-US" sz="600" dirty="0"/>
                     </a:p>
                   </a:txBody>
@@ -9113,7 +9559,7 @@
                   </a:tcPr>
                 </a:tc>
               </a:tr>
-              <a:tr h="219456">
+              <a:tr h="210312">
                 <a:tc>
                   <a:txBody>
                     <a:bodyPr/>
@@ -9123,14 +9569,14 @@
                         <a:buNone/>
                       </a:pPr>
                       <a:r>
-                        <a:rPr lang="en-US" sz="600" b="1" dirty="0">
+                        <a:rPr lang="en-US" sz="500" b="1" dirty="0">
                           <a:solidFill>
                             <a:srgbClr val="000000"/>
                           </a:solidFill>
                         </a:rPr>
                         <a:t>言穆</a:t>
                       </a:r>
-                      <a:endParaRPr lang="en-US" sz="600" dirty="0"/>
+                      <a:endParaRPr lang="en-US" sz="500" dirty="0"/>
                     </a:p>
                   </a:txBody>
                   <a:tcPr marL="25400" marR="25400" marT="12700" marB="12700">
@@ -9180,14 +9626,6 @@
                       <a:pPr algn="ctr" indent="0" marL="0">
                         <a:buNone/>
                       </a:pPr>
-                      <a:r>
-                        <a:rPr lang="en-US" sz="600" dirty="0">
-                          <a:solidFill>
-                            <a:srgbClr val="999999"/>
-                          </a:solidFill>
-                        </a:rPr>
-                        <a:t>▸</a:t>
-                      </a:r>
                       <a:endParaRPr lang="en-US" sz="600" dirty="0"/>
                     </a:p>
                   </a:txBody>
@@ -9241,14 +9679,6 @@
                       <a:pPr algn="ctr" indent="0" marL="0">
                         <a:buNone/>
                       </a:pPr>
-                      <a:r>
-                        <a:rPr lang="en-US" sz="600" dirty="0">
-                          <a:solidFill>
-                            <a:srgbClr val="333333"/>
-                          </a:solidFill>
-                        </a:rPr>
-                        <a:t>1:1</a:t>
-                      </a:r>
                       <a:endParaRPr lang="en-US" sz="600" dirty="0"/>
                     </a:p>
                   </a:txBody>
@@ -9290,7 +9720,7 @@
                       <a:tailEnd type="none" w="med" len="med"/>
                     </a:lnB>
                     <a:solidFill>
-                      <a:srgbClr val="E8F5E9"/>
+                      <a:srgbClr val="F5F5F5"/>
                     </a:solidFill>
                   </a:tcPr>
                 </a:tc>
@@ -9305,10 +9735,10 @@
                       <a:r>
                         <a:rPr lang="en-US" sz="600" dirty="0">
                           <a:solidFill>
-                            <a:srgbClr val="999999"/>
-                          </a:solidFill>
-                        </a:rPr>
-                        <a:t>▸</a:t>
+                            <a:srgbClr val="000000"/>
+                          </a:solidFill>
+                        </a:rPr>
+                        <a:t>🗣</a:t>
                       </a:r>
                       <a:endParaRPr lang="en-US" sz="600" dirty="0"/>
                     </a:p>
@@ -9351,7 +9781,7 @@
                       <a:tailEnd type="none" w="med" len="med"/>
                     </a:lnB>
                     <a:solidFill>
-                      <a:srgbClr val="F5F5F5"/>
+                      <a:srgbClr val="E8F5E9"/>
                     </a:solidFill>
                   </a:tcPr>
                 </a:tc>
@@ -9366,10 +9796,10 @@
                       <a:r>
                         <a:rPr lang="en-US" sz="600" dirty="0">
                           <a:solidFill>
-                            <a:srgbClr val="333333"/>
-                          </a:solidFill>
-                        </a:rPr>
-                        <a:t>1:1</a:t>
+                            <a:srgbClr val="000000"/>
+                          </a:solidFill>
+                        </a:rPr>
+                        <a:t>✏️</a:t>
                       </a:r>
                       <a:endParaRPr lang="en-US" sz="600" dirty="0"/>
                     </a:p>
@@ -9412,7 +9842,7 @@
                       <a:tailEnd type="none" w="med" len="med"/>
                     </a:lnB>
                     <a:solidFill>
-                      <a:srgbClr val="E8F5E9"/>
+                      <a:srgbClr val="E3F2FD"/>
                     </a:solidFill>
                   </a:tcPr>
                 </a:tc>
@@ -9427,10 +9857,10 @@
                       <a:r>
                         <a:rPr lang="en-US" sz="600" dirty="0">
                           <a:solidFill>
-                            <a:srgbClr val="999999"/>
-                          </a:solidFill>
-                        </a:rPr>
-                        <a:t>▸</a:t>
+                            <a:srgbClr val="000000"/>
+                          </a:solidFill>
+                        </a:rPr>
+                        <a:t>✏️</a:t>
                       </a:r>
                       <a:endParaRPr lang="en-US" sz="600" dirty="0"/>
                     </a:p>
@@ -9473,7 +9903,7 @@
                       <a:tailEnd type="none" w="med" len="med"/>
                     </a:lnB>
                     <a:solidFill>
-                      <a:srgbClr val="F5F5F5"/>
+                      <a:srgbClr val="E3F2FD"/>
                     </a:solidFill>
                   </a:tcPr>
                 </a:tc>
@@ -9485,14 +9915,6 @@
                       <a:pPr algn="ctr" indent="0" marL="0">
                         <a:buNone/>
                       </a:pPr>
-                      <a:r>
-                        <a:rPr lang="en-US" sz="600" dirty="0">
-                          <a:solidFill>
-                            <a:srgbClr val="333333"/>
-                          </a:solidFill>
-                        </a:rPr>
-                        <a:t>1:1</a:t>
-                      </a:r>
                       <a:endParaRPr lang="en-US" sz="600" dirty="0"/>
                     </a:p>
                   </a:txBody>
@@ -9534,7 +9956,7 @@
                       <a:tailEnd type="none" w="med" len="med"/>
                     </a:lnB>
                     <a:solidFill>
-                      <a:srgbClr val="E8F5E9"/>
+                      <a:srgbClr val="F5F5F5"/>
                     </a:solidFill>
                   </a:tcPr>
                 </a:tc>
@@ -9549,10 +9971,10 @@
                       <a:r>
                         <a:rPr lang="en-US" sz="600" dirty="0">
                           <a:solidFill>
-                            <a:srgbClr val="999999"/>
-                          </a:solidFill>
-                        </a:rPr>
-                        <a:t>▸</a:t>
+                            <a:srgbClr val="000000"/>
+                          </a:solidFill>
+                        </a:rPr>
+                        <a:t>🗣</a:t>
                       </a:r>
                       <a:endParaRPr lang="en-US" sz="600" dirty="0"/>
                     </a:p>
@@ -9595,7 +10017,7 @@
                       <a:tailEnd type="none" w="med" len="med"/>
                     </a:lnB>
                     <a:solidFill>
-                      <a:srgbClr val="F5F5F5"/>
+                      <a:srgbClr val="E8F5E9"/>
                     </a:solidFill>
                   </a:tcPr>
                 </a:tc>
@@ -9607,14 +10029,6 @@
                       <a:pPr algn="ctr" indent="0" marL="0">
                         <a:buNone/>
                       </a:pPr>
-                      <a:r>
-                        <a:rPr lang="en-US" sz="600" dirty="0">
-                          <a:solidFill>
-                            <a:srgbClr val="333333"/>
-                          </a:solidFill>
-                        </a:rPr>
-                        <a:t>1:1</a:t>
-                      </a:r>
                       <a:endParaRPr lang="en-US" sz="600" dirty="0"/>
                     </a:p>
                   </a:txBody>
@@ -9656,12 +10070,12 @@
                       <a:tailEnd type="none" w="med" len="med"/>
                     </a:lnB>
                     <a:solidFill>
-                      <a:srgbClr val="E8F5E9"/>
+                      <a:srgbClr val="F5F5F5"/>
                     </a:solidFill>
                   </a:tcPr>
                 </a:tc>
               </a:tr>
-              <a:tr h="219456">
+              <a:tr h="210312">
                 <a:tc>
                   <a:txBody>
                     <a:bodyPr/>
@@ -9671,14 +10085,14 @@
                         <a:buNone/>
                       </a:pPr>
                       <a:r>
-                        <a:rPr lang="en-US" sz="600" b="1" dirty="0">
+                        <a:rPr lang="en-US" sz="500" b="1" dirty="0">
                           <a:solidFill>
                             <a:srgbClr val="000000"/>
                           </a:solidFill>
                         </a:rPr>
                         <a:t>樂樂</a:t>
                       </a:r>
-                      <a:endParaRPr lang="en-US" sz="600" dirty="0"/>
+                      <a:endParaRPr lang="en-US" sz="500" dirty="0"/>
                     </a:p>
                   </a:txBody>
                   <a:tcPr marL="25400" marR="25400" marT="12700" marB="12700">
@@ -9728,14 +10142,6 @@
                       <a:pPr algn="ctr" indent="0" marL="0">
                         <a:buNone/>
                       </a:pPr>
-                      <a:r>
-                        <a:rPr lang="en-US" sz="600" dirty="0">
-                          <a:solidFill>
-                            <a:srgbClr val="999999"/>
-                          </a:solidFill>
-                        </a:rPr>
-                        <a:t>▸</a:t>
-                      </a:r>
                       <a:endParaRPr lang="en-US" sz="600" dirty="0"/>
                     </a:p>
                   </a:txBody>
@@ -9789,14 +10195,6 @@
                       <a:pPr algn="ctr" indent="0" marL="0">
                         <a:buNone/>
                       </a:pPr>
-                      <a:r>
-                        <a:rPr lang="en-US" sz="600" dirty="0">
-                          <a:solidFill>
-                            <a:srgbClr val="333333"/>
-                          </a:solidFill>
-                        </a:rPr>
-                        <a:t>1:1</a:t>
-                      </a:r>
                       <a:endParaRPr lang="en-US" sz="600" dirty="0"/>
                     </a:p>
                   </a:txBody>
@@ -9838,7 +10236,7 @@
                       <a:tailEnd type="none" w="med" len="med"/>
                     </a:lnB>
                     <a:solidFill>
-                      <a:srgbClr val="E8F5E9"/>
+                      <a:srgbClr val="F5F5F5"/>
                     </a:solidFill>
                   </a:tcPr>
                 </a:tc>
@@ -9853,10 +10251,10 @@
                       <a:r>
                         <a:rPr lang="en-US" sz="600" dirty="0">
                           <a:solidFill>
-                            <a:srgbClr val="999999"/>
-                          </a:solidFill>
-                        </a:rPr>
-                        <a:t>▸</a:t>
+                            <a:srgbClr val="000000"/>
+                          </a:solidFill>
+                        </a:rPr>
+                        <a:t>🗣</a:t>
                       </a:r>
                       <a:endParaRPr lang="en-US" sz="600" dirty="0"/>
                     </a:p>
@@ -9899,7 +10297,7 @@
                       <a:tailEnd type="none" w="med" len="med"/>
                     </a:lnB>
                     <a:solidFill>
-                      <a:srgbClr val="F5F5F5"/>
+                      <a:srgbClr val="E8F5E9"/>
                     </a:solidFill>
                   </a:tcPr>
                 </a:tc>
@@ -9914,10 +10312,10 @@
                       <a:r>
                         <a:rPr lang="en-US" sz="600" dirty="0">
                           <a:solidFill>
-                            <a:srgbClr val="333333"/>
-                          </a:solidFill>
-                        </a:rPr>
-                        <a:t>1:1</a:t>
+                            <a:srgbClr val="000000"/>
+                          </a:solidFill>
+                        </a:rPr>
+                        <a:t>✏️</a:t>
                       </a:r>
                       <a:endParaRPr lang="en-US" sz="600" dirty="0"/>
                     </a:p>
@@ -9960,7 +10358,7 @@
                       <a:tailEnd type="none" w="med" len="med"/>
                     </a:lnB>
                     <a:solidFill>
-                      <a:srgbClr val="E8F5E9"/>
+                      <a:srgbClr val="E3F2FD"/>
                     </a:solidFill>
                   </a:tcPr>
                 </a:tc>
@@ -9972,14 +10370,6 @@
                       <a:pPr algn="ctr" indent="0" marL="0">
                         <a:buNone/>
                       </a:pPr>
-                      <a:r>
-                        <a:rPr lang="en-US" sz="600" dirty="0">
-                          <a:solidFill>
-                            <a:srgbClr val="999999"/>
-                          </a:solidFill>
-                        </a:rPr>
-                        <a:t>▸</a:t>
-                      </a:r>
                       <a:endParaRPr lang="en-US" sz="600" dirty="0"/>
                     </a:p>
                   </a:txBody>
@@ -10033,14 +10423,6 @@
                       <a:pPr algn="ctr" indent="0" marL="0">
                         <a:buNone/>
                       </a:pPr>
-                      <a:r>
-                        <a:rPr lang="en-US" sz="600" dirty="0">
-                          <a:solidFill>
-                            <a:srgbClr val="333333"/>
-                          </a:solidFill>
-                        </a:rPr>
-                        <a:t>1:1</a:t>
-                      </a:r>
                       <a:endParaRPr lang="en-US" sz="600" dirty="0"/>
                     </a:p>
                   </a:txBody>
@@ -10082,7 +10464,7 @@
                       <a:tailEnd type="none" w="med" len="med"/>
                     </a:lnB>
                     <a:solidFill>
-                      <a:srgbClr val="E8F5E9"/>
+                      <a:srgbClr val="F5F5F5"/>
                     </a:solidFill>
                   </a:tcPr>
                 </a:tc>
@@ -10097,10 +10479,10 @@
                       <a:r>
                         <a:rPr lang="en-US" sz="600" dirty="0">
                           <a:solidFill>
-                            <a:srgbClr val="999999"/>
-                          </a:solidFill>
-                        </a:rPr>
-                        <a:t>▸</a:t>
+                            <a:srgbClr val="000000"/>
+                          </a:solidFill>
+                        </a:rPr>
+                        <a:t>🗣</a:t>
                       </a:r>
                       <a:endParaRPr lang="en-US" sz="600" dirty="0"/>
                     </a:p>
@@ -10143,7 +10525,7 @@
                       <a:tailEnd type="none" w="med" len="med"/>
                     </a:lnB>
                     <a:solidFill>
-                      <a:srgbClr val="F5F5F5"/>
+                      <a:srgbClr val="E8F5E9"/>
                     </a:solidFill>
                   </a:tcPr>
                 </a:tc>
@@ -10158,10 +10540,10 @@
                       <a:r>
                         <a:rPr lang="en-US" sz="600" dirty="0">
                           <a:solidFill>
-                            <a:srgbClr val="333333"/>
-                          </a:solidFill>
-                        </a:rPr>
-                        <a:t>1:1</a:t>
+                            <a:srgbClr val="000000"/>
+                          </a:solidFill>
+                        </a:rPr>
+                        <a:t>✏️</a:t>
                       </a:r>
                       <a:endParaRPr lang="en-US" sz="600" dirty="0"/>
                     </a:p>
@@ -10204,12 +10586,12 @@
                       <a:tailEnd type="none" w="med" len="med"/>
                     </a:lnB>
                     <a:solidFill>
-                      <a:srgbClr val="E8F5E9"/>
+                      <a:srgbClr val="E3F2FD"/>
                     </a:solidFill>
                   </a:tcPr>
                 </a:tc>
               </a:tr>
-              <a:tr h="219456">
+              <a:tr h="210312">
                 <a:tc>
                   <a:txBody>
                     <a:bodyPr/>
@@ -10219,14 +10601,14 @@
                         <a:buNone/>
                       </a:pPr>
                       <a:r>
-                        <a:rPr lang="en-US" sz="600" b="1" dirty="0">
+                        <a:rPr lang="en-US" sz="500" b="1" dirty="0">
                           <a:solidFill>
                             <a:srgbClr val="000000"/>
                           </a:solidFill>
                         </a:rPr>
                         <a:t>Emily</a:t>
                       </a:r>
-                      <a:endParaRPr lang="en-US" sz="600" dirty="0"/>
+                      <a:endParaRPr lang="en-US" sz="500" dirty="0"/>
                     </a:p>
                   </a:txBody>
                   <a:tcPr marL="25400" marR="25400" marT="12700" marB="12700">
@@ -10276,14 +10658,6 @@
                       <a:pPr algn="ctr" indent="0" marL="0">
                         <a:buNone/>
                       </a:pPr>
-                      <a:r>
-                        <a:rPr lang="en-US" sz="600" dirty="0">
-                          <a:solidFill>
-                            <a:srgbClr val="999999"/>
-                          </a:solidFill>
-                        </a:rPr>
-                        <a:t>▸</a:t>
-                      </a:r>
                       <a:endParaRPr lang="en-US" sz="600" dirty="0"/>
                     </a:p>
                   </a:txBody>
@@ -10337,14 +10711,6 @@
                       <a:pPr algn="ctr" indent="0" marL="0">
                         <a:buNone/>
                       </a:pPr>
-                      <a:r>
-                        <a:rPr lang="en-US" sz="600" dirty="0">
-                          <a:solidFill>
-                            <a:srgbClr val="333333"/>
-                          </a:solidFill>
-                        </a:rPr>
-                        <a:t>1:1</a:t>
-                      </a:r>
                       <a:endParaRPr lang="en-US" sz="600" dirty="0"/>
                     </a:p>
                   </a:txBody>
@@ -10386,7 +10752,7 @@
                       <a:tailEnd type="none" w="med" len="med"/>
                     </a:lnB>
                     <a:solidFill>
-                      <a:srgbClr val="E8F5E9"/>
+                      <a:srgbClr val="F5F5F5"/>
                     </a:solidFill>
                   </a:tcPr>
                 </a:tc>
@@ -10401,10 +10767,10 @@
                       <a:r>
                         <a:rPr lang="en-US" sz="600" dirty="0">
                           <a:solidFill>
-                            <a:srgbClr val="999999"/>
-                          </a:solidFill>
-                        </a:rPr>
-                        <a:t>▸</a:t>
+                            <a:srgbClr val="000000"/>
+                          </a:solidFill>
+                        </a:rPr>
+                        <a:t>🗣</a:t>
                       </a:r>
                       <a:endParaRPr lang="en-US" sz="600" dirty="0"/>
                     </a:p>
@@ -10447,7 +10813,7 @@
                       <a:tailEnd type="none" w="med" len="med"/>
                     </a:lnB>
                     <a:solidFill>
-                      <a:srgbClr val="F5F5F5"/>
+                      <a:srgbClr val="E8F5E9"/>
                     </a:solidFill>
                   </a:tcPr>
                 </a:tc>
@@ -10462,10 +10828,10 @@
                       <a:r>
                         <a:rPr lang="en-US" sz="600" dirty="0">
                           <a:solidFill>
-                            <a:srgbClr val="333333"/>
-                          </a:solidFill>
-                        </a:rPr>
-                        <a:t>1:1</a:t>
+                            <a:srgbClr val="000000"/>
+                          </a:solidFill>
+                        </a:rPr>
+                        <a:t>✏️</a:t>
                       </a:r>
                       <a:endParaRPr lang="en-US" sz="600" dirty="0"/>
                     </a:p>
@@ -10508,7 +10874,7 @@
                       <a:tailEnd type="none" w="med" len="med"/>
                     </a:lnB>
                     <a:solidFill>
-                      <a:srgbClr val="E8F5E9"/>
+                      <a:srgbClr val="E3F2FD"/>
                     </a:solidFill>
                   </a:tcPr>
                 </a:tc>
@@ -10520,14 +10886,6 @@
                       <a:pPr algn="ctr" indent="0" marL="0">
                         <a:buNone/>
                       </a:pPr>
-                      <a:r>
-                        <a:rPr lang="en-US" sz="600" dirty="0">
-                          <a:solidFill>
-                            <a:srgbClr val="999999"/>
-                          </a:solidFill>
-                        </a:rPr>
-                        <a:t>▸</a:t>
-                      </a:r>
                       <a:endParaRPr lang="en-US" sz="600" dirty="0"/>
                     </a:p>
                   </a:txBody>
@@ -10581,14 +10939,6 @@
                       <a:pPr algn="ctr" indent="0" marL="0">
                         <a:buNone/>
                       </a:pPr>
-                      <a:r>
-                        <a:rPr lang="en-US" sz="600" dirty="0">
-                          <a:solidFill>
-                            <a:srgbClr val="333333"/>
-                          </a:solidFill>
-                        </a:rPr>
-                        <a:t>1:1</a:t>
-                      </a:r>
                       <a:endParaRPr lang="en-US" sz="600" dirty="0"/>
                     </a:p>
                   </a:txBody>
@@ -10630,7 +10980,7 @@
                       <a:tailEnd type="none" w="med" len="med"/>
                     </a:lnB>
                     <a:solidFill>
-                      <a:srgbClr val="E8F5E9"/>
+                      <a:srgbClr val="F5F5F5"/>
                     </a:solidFill>
                   </a:tcPr>
                 </a:tc>
@@ -10645,10 +10995,10 @@
                       <a:r>
                         <a:rPr lang="en-US" sz="600" dirty="0">
                           <a:solidFill>
-                            <a:srgbClr val="999999"/>
-                          </a:solidFill>
-                        </a:rPr>
-                        <a:t>▸</a:t>
+                            <a:srgbClr val="000000"/>
+                          </a:solidFill>
+                        </a:rPr>
+                        <a:t>🗣</a:t>
                       </a:r>
                       <a:endParaRPr lang="en-US" sz="600" dirty="0"/>
                     </a:p>
@@ -10691,7 +11041,7 @@
                       <a:tailEnd type="none" w="med" len="med"/>
                     </a:lnB>
                     <a:solidFill>
-                      <a:srgbClr val="F5F5F5"/>
+                      <a:srgbClr val="E8F5E9"/>
                     </a:solidFill>
                   </a:tcPr>
                 </a:tc>
@@ -10706,10 +11056,10 @@
                       <a:r>
                         <a:rPr lang="en-US" sz="600" dirty="0">
                           <a:solidFill>
-                            <a:srgbClr val="333333"/>
-                          </a:solidFill>
-                        </a:rPr>
-                        <a:t>1:1</a:t>
+                            <a:srgbClr val="000000"/>
+                          </a:solidFill>
+                        </a:rPr>
+                        <a:t>✏️</a:t>
                       </a:r>
                       <a:endParaRPr lang="en-US" sz="600" dirty="0"/>
                     </a:p>
@@ -10752,12 +11102,12 @@
                       <a:tailEnd type="none" w="med" len="med"/>
                     </a:lnB>
                     <a:solidFill>
-                      <a:srgbClr val="E8F5E9"/>
+                      <a:srgbClr val="E3F2FD"/>
                     </a:solidFill>
                   </a:tcPr>
                 </a:tc>
               </a:tr>
-              <a:tr h="219456">
+              <a:tr h="210312">
                 <a:tc>
                   <a:txBody>
                     <a:bodyPr/>
@@ -10767,14 +11117,14 @@
                         <a:buNone/>
                       </a:pPr>
                       <a:r>
-                        <a:rPr lang="en-US" sz="600" b="1" dirty="0">
+                        <a:rPr lang="en-US" sz="500" b="1" dirty="0">
                           <a:solidFill>
                             <a:srgbClr val="000000"/>
                           </a:solidFill>
                         </a:rPr>
                         <a:t>Johnny</a:t>
                       </a:r>
-                      <a:endParaRPr lang="en-US" sz="600" dirty="0"/>
+                      <a:endParaRPr lang="en-US" sz="500" dirty="0"/>
                     </a:p>
                   </a:txBody>
                   <a:tcPr marL="25400" marR="25400" marT="12700" marB="12700">
@@ -10824,14 +11174,6 @@
                       <a:pPr algn="ctr" indent="0" marL="0">
                         <a:buNone/>
                       </a:pPr>
-                      <a:r>
-                        <a:rPr lang="en-US" sz="600" dirty="0">
-                          <a:solidFill>
-                            <a:srgbClr val="999999"/>
-                          </a:solidFill>
-                        </a:rPr>
-                        <a:t>▸</a:t>
-                      </a:r>
                       <a:endParaRPr lang="en-US" sz="600" dirty="0"/>
                     </a:p>
                   </a:txBody>
@@ -10885,14 +11227,6 @@
                       <a:pPr algn="ctr" indent="0" marL="0">
                         <a:buNone/>
                       </a:pPr>
-                      <a:r>
-                        <a:rPr lang="en-US" sz="600" dirty="0">
-                          <a:solidFill>
-                            <a:srgbClr val="333333"/>
-                          </a:solidFill>
-                        </a:rPr>
-                        <a:t>1:1</a:t>
-                      </a:r>
                       <a:endParaRPr lang="en-US" sz="600" dirty="0"/>
                     </a:p>
                   </a:txBody>
@@ -10934,7 +11268,7 @@
                       <a:tailEnd type="none" w="med" len="med"/>
                     </a:lnB>
                     <a:solidFill>
-                      <a:srgbClr val="E8F5E9"/>
+                      <a:srgbClr val="F5F5F5"/>
                     </a:solidFill>
                   </a:tcPr>
                 </a:tc>
@@ -10949,10 +11283,10 @@
                       <a:r>
                         <a:rPr lang="en-US" sz="600" dirty="0">
                           <a:solidFill>
-                            <a:srgbClr val="999999"/>
-                          </a:solidFill>
-                        </a:rPr>
-                        <a:t>▸</a:t>
+                            <a:srgbClr val="000000"/>
+                          </a:solidFill>
+                        </a:rPr>
+                        <a:t>🗣</a:t>
                       </a:r>
                       <a:endParaRPr lang="en-US" sz="600" dirty="0"/>
                     </a:p>
@@ -10995,7 +11329,7 @@
                       <a:tailEnd type="none" w="med" len="med"/>
                     </a:lnB>
                     <a:solidFill>
-                      <a:srgbClr val="F5F5F5"/>
+                      <a:srgbClr val="E8F5E9"/>
                     </a:solidFill>
                   </a:tcPr>
                 </a:tc>
@@ -11010,10 +11344,10 @@
                       <a:r>
                         <a:rPr lang="en-US" sz="600" dirty="0">
                           <a:solidFill>
-                            <a:srgbClr val="333333"/>
-                          </a:solidFill>
-                        </a:rPr>
-                        <a:t>1:1</a:t>
+                            <a:srgbClr val="000000"/>
+                          </a:solidFill>
+                        </a:rPr>
+                        <a:t>✏️</a:t>
                       </a:r>
                       <a:endParaRPr lang="en-US" sz="600" dirty="0"/>
                     </a:p>
@@ -11056,7 +11390,7 @@
                       <a:tailEnd type="none" w="med" len="med"/>
                     </a:lnB>
                     <a:solidFill>
-                      <a:srgbClr val="E8F5E9"/>
+                      <a:srgbClr val="E3F2FD"/>
                     </a:solidFill>
                   </a:tcPr>
                 </a:tc>
@@ -11068,14 +11402,6 @@
                       <a:pPr algn="ctr" indent="0" marL="0">
                         <a:buNone/>
                       </a:pPr>
-                      <a:r>
-                        <a:rPr lang="en-US" sz="600" dirty="0">
-                          <a:solidFill>
-                            <a:srgbClr val="999999"/>
-                          </a:solidFill>
-                        </a:rPr>
-                        <a:t>▸</a:t>
-                      </a:r>
                       <a:endParaRPr lang="en-US" sz="600" dirty="0"/>
                     </a:p>
                   </a:txBody>
@@ -11129,14 +11455,6 @@
                       <a:pPr algn="ctr" indent="0" marL="0">
                         <a:buNone/>
                       </a:pPr>
-                      <a:r>
-                        <a:rPr lang="en-US" sz="600" dirty="0">
-                          <a:solidFill>
-                            <a:srgbClr val="333333"/>
-                          </a:solidFill>
-                        </a:rPr>
-                        <a:t>1:1</a:t>
-                      </a:r>
                       <a:endParaRPr lang="en-US" sz="600" dirty="0"/>
                     </a:p>
                   </a:txBody>
@@ -11178,7 +11496,7 @@
                       <a:tailEnd type="none" w="med" len="med"/>
                     </a:lnB>
                     <a:solidFill>
-                      <a:srgbClr val="E8F5E9"/>
+                      <a:srgbClr val="F5F5F5"/>
                     </a:solidFill>
                   </a:tcPr>
                 </a:tc>
@@ -11193,10 +11511,10 @@
                       <a:r>
                         <a:rPr lang="en-US" sz="600" dirty="0">
                           <a:solidFill>
-                            <a:srgbClr val="999999"/>
-                          </a:solidFill>
-                        </a:rPr>
-                        <a:t>▸</a:t>
+                            <a:srgbClr val="000000"/>
+                          </a:solidFill>
+                        </a:rPr>
+                        <a:t>🗣</a:t>
                       </a:r>
                       <a:endParaRPr lang="en-US" sz="600" dirty="0"/>
                     </a:p>
@@ -11239,7 +11557,7 @@
                       <a:tailEnd type="none" w="med" len="med"/>
                     </a:lnB>
                     <a:solidFill>
-                      <a:srgbClr val="F5F5F5"/>
+                      <a:srgbClr val="E8F5E9"/>
                     </a:solidFill>
                   </a:tcPr>
                 </a:tc>
@@ -11254,10 +11572,10 @@
                       <a:r>
                         <a:rPr lang="en-US" sz="600" dirty="0">
                           <a:solidFill>
-                            <a:srgbClr val="333333"/>
-                          </a:solidFill>
-                        </a:rPr>
-                        <a:t>1:1</a:t>
+                            <a:srgbClr val="000000"/>
+                          </a:solidFill>
+                        </a:rPr>
+                        <a:t>✏️</a:t>
                       </a:r>
                       <a:endParaRPr lang="en-US" sz="600" dirty="0"/>
                     </a:p>
@@ -11300,12 +11618,12 @@
                       <a:tailEnd type="none" w="med" len="med"/>
                     </a:lnB>
                     <a:solidFill>
-                      <a:srgbClr val="E8F5E9"/>
+                      <a:srgbClr val="E3F2FD"/>
                     </a:solidFill>
                   </a:tcPr>
                 </a:tc>
               </a:tr>
-              <a:tr h="219456">
+              <a:tr h="210312">
                 <a:tc>
                   <a:txBody>
                     <a:bodyPr/>
@@ -11315,14 +11633,14 @@
                         <a:buNone/>
                       </a:pPr>
                       <a:r>
-                        <a:rPr lang="en-US" sz="600" b="1" dirty="0">
+                        <a:rPr lang="en-US" sz="500" b="1" dirty="0">
                           <a:solidFill>
                             <a:srgbClr val="000000"/>
                           </a:solidFill>
                         </a:rPr>
                         <a:t>宏森</a:t>
                       </a:r>
-                      <a:endParaRPr lang="en-US" sz="600" dirty="0"/>
+                      <a:endParaRPr lang="en-US" sz="500" dirty="0"/>
                     </a:p>
                   </a:txBody>
                   <a:tcPr marL="25400" marR="25400" marT="12700" marB="12700">
@@ -11372,14 +11690,6 @@
                       <a:pPr algn="ctr" indent="0" marL="0">
                         <a:buNone/>
                       </a:pPr>
-                      <a:r>
-                        <a:rPr lang="en-US" sz="600" dirty="0">
-                          <a:solidFill>
-                            <a:srgbClr val="999999"/>
-                          </a:solidFill>
-                        </a:rPr>
-                        <a:t>▸</a:t>
-                      </a:r>
                       <a:endParaRPr lang="en-US" sz="600" dirty="0"/>
                     </a:p>
                   </a:txBody>
@@ -11433,14 +11743,6 @@
                       <a:pPr algn="ctr" indent="0" marL="0">
                         <a:buNone/>
                       </a:pPr>
-                      <a:r>
-                        <a:rPr lang="en-US" sz="600" dirty="0">
-                          <a:solidFill>
-                            <a:srgbClr val="333333"/>
-                          </a:solidFill>
-                        </a:rPr>
-                        <a:t>1:1</a:t>
-                      </a:r>
                       <a:endParaRPr lang="en-US" sz="600" dirty="0"/>
                     </a:p>
                   </a:txBody>
@@ -11482,7 +11784,7 @@
                       <a:tailEnd type="none" w="med" len="med"/>
                     </a:lnB>
                     <a:solidFill>
-                      <a:srgbClr val="E8F5E9"/>
+                      <a:srgbClr val="F5F5F5"/>
                     </a:solidFill>
                   </a:tcPr>
                 </a:tc>
@@ -11497,10 +11799,10 @@
                       <a:r>
                         <a:rPr lang="en-US" sz="600" dirty="0">
                           <a:solidFill>
-                            <a:srgbClr val="999999"/>
-                          </a:solidFill>
-                        </a:rPr>
-                        <a:t>▸</a:t>
+                            <a:srgbClr val="000000"/>
+                          </a:solidFill>
+                        </a:rPr>
+                        <a:t>✏️</a:t>
                       </a:r>
                       <a:endParaRPr lang="en-US" sz="600" dirty="0"/>
                     </a:p>
@@ -11543,7 +11845,7 @@
                       <a:tailEnd type="none" w="med" len="med"/>
                     </a:lnB>
                     <a:solidFill>
-                      <a:srgbClr val="F5F5F5"/>
+                      <a:srgbClr val="E3F2FD"/>
                     </a:solidFill>
                   </a:tcPr>
                 </a:tc>
@@ -11558,10 +11860,10 @@
                       <a:r>
                         <a:rPr lang="en-US" sz="600" dirty="0">
                           <a:solidFill>
-                            <a:srgbClr val="333333"/>
-                          </a:solidFill>
-                        </a:rPr>
-                        <a:t>1:1</a:t>
+                            <a:srgbClr val="000000"/>
+                          </a:solidFill>
+                        </a:rPr>
+                        <a:t>🗣</a:t>
                       </a:r>
                       <a:endParaRPr lang="en-US" sz="600" dirty="0"/>
                     </a:p>
@@ -11616,14 +11918,6 @@
                       <a:pPr algn="ctr" indent="0" marL="0">
                         <a:buNone/>
                       </a:pPr>
-                      <a:r>
-                        <a:rPr lang="en-US" sz="600" dirty="0">
-                          <a:solidFill>
-                            <a:srgbClr val="999999"/>
-                          </a:solidFill>
-                        </a:rPr>
-                        <a:t>▸</a:t>
-                      </a:r>
                       <a:endParaRPr lang="en-US" sz="600" dirty="0"/>
                     </a:p>
                   </a:txBody>
@@ -11677,14 +11971,6 @@
                       <a:pPr algn="ctr" indent="0" marL="0">
                         <a:buNone/>
                       </a:pPr>
-                      <a:r>
-                        <a:rPr lang="en-US" sz="600" dirty="0">
-                          <a:solidFill>
-                            <a:srgbClr val="333333"/>
-                          </a:solidFill>
-                        </a:rPr>
-                        <a:t>1:1</a:t>
-                      </a:r>
                       <a:endParaRPr lang="en-US" sz="600" dirty="0"/>
                     </a:p>
                   </a:txBody>
@@ -11726,7 +12012,7 @@
                       <a:tailEnd type="none" w="med" len="med"/>
                     </a:lnB>
                     <a:solidFill>
-                      <a:srgbClr val="E8F5E9"/>
+                      <a:srgbClr val="F5F5F5"/>
                     </a:solidFill>
                   </a:tcPr>
                 </a:tc>
@@ -11741,10 +12027,10 @@
                       <a:r>
                         <a:rPr lang="en-US" sz="600" dirty="0">
                           <a:solidFill>
-                            <a:srgbClr val="999999"/>
-                          </a:solidFill>
-                        </a:rPr>
-                        <a:t>▸</a:t>
+                            <a:srgbClr val="000000"/>
+                          </a:solidFill>
+                        </a:rPr>
+                        <a:t>✏️</a:t>
                       </a:r>
                       <a:endParaRPr lang="en-US" sz="600" dirty="0"/>
                     </a:p>
@@ -11787,7 +12073,7 @@
                       <a:tailEnd type="none" w="med" len="med"/>
                     </a:lnB>
                     <a:solidFill>
-                      <a:srgbClr val="F5F5F5"/>
+                      <a:srgbClr val="E3F2FD"/>
                     </a:solidFill>
                   </a:tcPr>
                 </a:tc>
@@ -11802,10 +12088,10 @@
                       <a:r>
                         <a:rPr lang="en-US" sz="600" dirty="0">
                           <a:solidFill>
-                            <a:srgbClr val="333333"/>
-                          </a:solidFill>
-                        </a:rPr>
-                        <a:t>1:1</a:t>
+                            <a:srgbClr val="000000"/>
+                          </a:solidFill>
+                        </a:rPr>
+                        <a:t>🗣</a:t>
                       </a:r>
                       <a:endParaRPr lang="en-US" sz="600" dirty="0"/>
                     </a:p>
@@ -11853,7 +12139,7 @@
                   </a:tcPr>
                 </a:tc>
               </a:tr>
-              <a:tr h="219456">
+              <a:tr h="210312">
                 <a:tc>
                   <a:txBody>
                     <a:bodyPr/>
@@ -11863,14 +12149,14 @@
                         <a:buNone/>
                       </a:pPr>
                       <a:r>
-                        <a:rPr lang="en-US" sz="600" b="1" dirty="0">
+                        <a:rPr lang="en-US" sz="500" b="1" dirty="0">
                           <a:solidFill>
                             <a:srgbClr val="000000"/>
                           </a:solidFill>
                         </a:rPr>
                         <a:t>駿睿</a:t>
                       </a:r>
-                      <a:endParaRPr lang="en-US" sz="600" dirty="0"/>
+                      <a:endParaRPr lang="en-US" sz="500" dirty="0"/>
                     </a:p>
                   </a:txBody>
                   <a:tcPr marL="25400" marR="25400" marT="12700" marB="12700">
@@ -11920,14 +12206,6 @@
                       <a:pPr algn="ctr" indent="0" marL="0">
                         <a:buNone/>
                       </a:pPr>
-                      <a:r>
-                        <a:rPr lang="en-US" sz="600" dirty="0">
-                          <a:solidFill>
-                            <a:srgbClr val="999999"/>
-                          </a:solidFill>
-                        </a:rPr>
-                        <a:t>▸</a:t>
-                      </a:r>
                       <a:endParaRPr lang="en-US" sz="600" dirty="0"/>
                     </a:p>
                   </a:txBody>
@@ -11981,14 +12259,6 @@
                       <a:pPr algn="ctr" indent="0" marL="0">
                         <a:buNone/>
                       </a:pPr>
-                      <a:r>
-                        <a:rPr lang="en-US" sz="600" dirty="0">
-                          <a:solidFill>
-                            <a:srgbClr val="333333"/>
-                          </a:solidFill>
-                        </a:rPr>
-                        <a:t>1:1</a:t>
-                      </a:r>
                       <a:endParaRPr lang="en-US" sz="600" dirty="0"/>
                     </a:p>
                   </a:txBody>
@@ -12030,7 +12300,7 @@
                       <a:tailEnd type="none" w="med" len="med"/>
                     </a:lnB>
                     <a:solidFill>
-                      <a:srgbClr val="E8F5E9"/>
+                      <a:srgbClr val="F5F5F5"/>
                     </a:solidFill>
                   </a:tcPr>
                 </a:tc>
@@ -12045,10 +12315,10 @@
                       <a:r>
                         <a:rPr lang="en-US" sz="600" dirty="0">
                           <a:solidFill>
-                            <a:srgbClr val="999999"/>
-                          </a:solidFill>
-                        </a:rPr>
-                        <a:t>▸</a:t>
+                            <a:srgbClr val="000000"/>
+                          </a:solidFill>
+                        </a:rPr>
+                        <a:t>✏️</a:t>
                       </a:r>
                       <a:endParaRPr lang="en-US" sz="600" dirty="0"/>
                     </a:p>
@@ -12091,7 +12361,7 @@
                       <a:tailEnd type="none" w="med" len="med"/>
                     </a:lnB>
                     <a:solidFill>
-                      <a:srgbClr val="F5F5F5"/>
+                      <a:srgbClr val="E3F2FD"/>
                     </a:solidFill>
                   </a:tcPr>
                 </a:tc>
@@ -12106,10 +12376,10 @@
                       <a:r>
                         <a:rPr lang="en-US" sz="600" dirty="0">
                           <a:solidFill>
-                            <a:srgbClr val="333333"/>
-                          </a:solidFill>
-                        </a:rPr>
-                        <a:t>1:1</a:t>
+                            <a:srgbClr val="000000"/>
+                          </a:solidFill>
+                        </a:rPr>
+                        <a:t>🗣</a:t>
                       </a:r>
                       <a:endParaRPr lang="en-US" sz="600" dirty="0"/>
                     </a:p>
@@ -12164,14 +12434,6 @@
                       <a:pPr algn="ctr" indent="0" marL="0">
                         <a:buNone/>
                       </a:pPr>
-                      <a:r>
-                        <a:rPr lang="en-US" sz="600" dirty="0">
-                          <a:solidFill>
-                            <a:srgbClr val="999999"/>
-                          </a:solidFill>
-                        </a:rPr>
-                        <a:t>▸</a:t>
-                      </a:r>
                       <a:endParaRPr lang="en-US" sz="600" dirty="0"/>
                     </a:p>
                   </a:txBody>
@@ -12225,14 +12487,6 @@
                       <a:pPr algn="ctr" indent="0" marL="0">
                         <a:buNone/>
                       </a:pPr>
-                      <a:r>
-                        <a:rPr lang="en-US" sz="600" dirty="0">
-                          <a:solidFill>
-                            <a:srgbClr val="333333"/>
-                          </a:solidFill>
-                        </a:rPr>
-                        <a:t>1:1</a:t>
-                      </a:r>
                       <a:endParaRPr lang="en-US" sz="600" dirty="0"/>
                     </a:p>
                   </a:txBody>
@@ -12274,7 +12528,7 @@
                       <a:tailEnd type="none" w="med" len="med"/>
                     </a:lnB>
                     <a:solidFill>
-                      <a:srgbClr val="E8F5E9"/>
+                      <a:srgbClr val="F5F5F5"/>
                     </a:solidFill>
                   </a:tcPr>
                 </a:tc>
@@ -12289,10 +12543,10 @@
                       <a:r>
                         <a:rPr lang="en-US" sz="600" dirty="0">
                           <a:solidFill>
-                            <a:srgbClr val="999999"/>
-                          </a:solidFill>
-                        </a:rPr>
-                        <a:t>▸</a:t>
+                            <a:srgbClr val="000000"/>
+                          </a:solidFill>
+                        </a:rPr>
+                        <a:t>✏️</a:t>
                       </a:r>
                       <a:endParaRPr lang="en-US" sz="600" dirty="0"/>
                     </a:p>
@@ -12335,7 +12589,7 @@
                       <a:tailEnd type="none" w="med" len="med"/>
                     </a:lnB>
                     <a:solidFill>
-                      <a:srgbClr val="F5F5F5"/>
+                      <a:srgbClr val="E3F2FD"/>
                     </a:solidFill>
                   </a:tcPr>
                 </a:tc>
@@ -12350,10 +12604,10 @@
                       <a:r>
                         <a:rPr lang="en-US" sz="600" dirty="0">
                           <a:solidFill>
-                            <a:srgbClr val="333333"/>
-                          </a:solidFill>
-                        </a:rPr>
-                        <a:t>1:1</a:t>
+                            <a:srgbClr val="000000"/>
+                          </a:solidFill>
+                        </a:rPr>
+                        <a:t>🗣</a:t>
                       </a:r>
                       <a:endParaRPr lang="en-US" sz="600" dirty="0"/>
                     </a:p>
@@ -12401,7 +12655,7 @@
                   </a:tcPr>
                 </a:tc>
               </a:tr>
-              <a:tr h="219456">
+              <a:tr h="210312">
                 <a:tc>
                   <a:txBody>
                     <a:bodyPr/>
@@ -12411,14 +12665,14 @@
                         <a:buNone/>
                       </a:pPr>
                       <a:r>
-                        <a:rPr lang="en-US" sz="600" b="1" dirty="0">
+                        <a:rPr lang="en-US" sz="500" b="1" dirty="0">
                           <a:solidFill>
                             <a:srgbClr val="000000"/>
                           </a:solidFill>
                         </a:rPr>
                         <a:t>昱臣</a:t>
                       </a:r>
-                      <a:endParaRPr lang="en-US" sz="600" dirty="0"/>
+                      <a:endParaRPr lang="en-US" sz="500" dirty="0"/>
                     </a:p>
                   </a:txBody>
                   <a:tcPr marL="25400" marR="25400" marT="12700" marB="12700">
@@ -12468,14 +12722,6 @@
                       <a:pPr algn="ctr" indent="0" marL="0">
                         <a:buNone/>
                       </a:pPr>
-                      <a:r>
-                        <a:rPr lang="en-US" sz="600" dirty="0">
-                          <a:solidFill>
-                            <a:srgbClr val="999999"/>
-                          </a:solidFill>
-                        </a:rPr>
-                        <a:t>▸</a:t>
-                      </a:r>
                       <a:endParaRPr lang="en-US" sz="600" dirty="0"/>
                     </a:p>
                   </a:txBody>
@@ -12529,14 +12775,6 @@
                       <a:pPr algn="ctr" indent="0" marL="0">
                         <a:buNone/>
                       </a:pPr>
-                      <a:r>
-                        <a:rPr lang="en-US" sz="600" dirty="0">
-                          <a:solidFill>
-                            <a:srgbClr val="333333"/>
-                          </a:solidFill>
-                        </a:rPr>
-                        <a:t>1:1</a:t>
-                      </a:r>
                       <a:endParaRPr lang="en-US" sz="600" dirty="0"/>
                     </a:p>
                   </a:txBody>
@@ -12578,7 +12816,7 @@
                       <a:tailEnd type="none" w="med" len="med"/>
                     </a:lnB>
                     <a:solidFill>
-                      <a:srgbClr val="E8F5E9"/>
+                      <a:srgbClr val="F5F5F5"/>
                     </a:solidFill>
                   </a:tcPr>
                 </a:tc>
@@ -12593,10 +12831,10 @@
                       <a:r>
                         <a:rPr lang="en-US" sz="600" dirty="0">
                           <a:solidFill>
-                            <a:srgbClr val="999999"/>
-                          </a:solidFill>
-                        </a:rPr>
-                        <a:t>▸</a:t>
+                            <a:srgbClr val="000000"/>
+                          </a:solidFill>
+                        </a:rPr>
+                        <a:t>✏️</a:t>
                       </a:r>
                       <a:endParaRPr lang="en-US" sz="600" dirty="0"/>
                     </a:p>
@@ -12639,7 +12877,7 @@
                       <a:tailEnd type="none" w="med" len="med"/>
                     </a:lnB>
                     <a:solidFill>
-                      <a:srgbClr val="F5F5F5"/>
+                      <a:srgbClr val="E3F2FD"/>
                     </a:solidFill>
                   </a:tcPr>
                 </a:tc>
@@ -12654,10 +12892,10 @@
                       <a:r>
                         <a:rPr lang="en-US" sz="600" dirty="0">
                           <a:solidFill>
-                            <a:srgbClr val="333333"/>
-                          </a:solidFill>
-                        </a:rPr>
-                        <a:t>1:1</a:t>
+                            <a:srgbClr val="000000"/>
+                          </a:solidFill>
+                        </a:rPr>
+                        <a:t>🗣</a:t>
                       </a:r>
                       <a:endParaRPr lang="en-US" sz="600" dirty="0"/>
                     </a:p>
@@ -12712,14 +12950,6 @@
                       <a:pPr algn="ctr" indent="0" marL="0">
                         <a:buNone/>
                       </a:pPr>
-                      <a:r>
-                        <a:rPr lang="en-US" sz="600" dirty="0">
-                          <a:solidFill>
-                            <a:srgbClr val="999999"/>
-                          </a:solidFill>
-                        </a:rPr>
-                        <a:t>▸</a:t>
-                      </a:r>
                       <a:endParaRPr lang="en-US" sz="600" dirty="0"/>
                     </a:p>
                   </a:txBody>
@@ -12773,14 +13003,6 @@
                       <a:pPr algn="ctr" indent="0" marL="0">
                         <a:buNone/>
                       </a:pPr>
-                      <a:r>
-                        <a:rPr lang="en-US" sz="600" dirty="0">
-                          <a:solidFill>
-                            <a:srgbClr val="333333"/>
-                          </a:solidFill>
-                        </a:rPr>
-                        <a:t>1:1</a:t>
-                      </a:r>
                       <a:endParaRPr lang="en-US" sz="600" dirty="0"/>
                     </a:p>
                   </a:txBody>
@@ -12822,7 +13044,7 @@
                       <a:tailEnd type="none" w="med" len="med"/>
                     </a:lnB>
                     <a:solidFill>
-                      <a:srgbClr val="E8F5E9"/>
+                      <a:srgbClr val="F5F5F5"/>
                     </a:solidFill>
                   </a:tcPr>
                 </a:tc>
@@ -12837,10 +13059,10 @@
                       <a:r>
                         <a:rPr lang="en-US" sz="600" dirty="0">
                           <a:solidFill>
-                            <a:srgbClr val="999999"/>
-                          </a:solidFill>
-                        </a:rPr>
-                        <a:t>▸</a:t>
+                            <a:srgbClr val="000000"/>
+                          </a:solidFill>
+                        </a:rPr>
+                        <a:t>✏️</a:t>
                       </a:r>
                       <a:endParaRPr lang="en-US" sz="600" dirty="0"/>
                     </a:p>
@@ -12883,7 +13105,7 @@
                       <a:tailEnd type="none" w="med" len="med"/>
                     </a:lnB>
                     <a:solidFill>
-                      <a:srgbClr val="F5F5F5"/>
+                      <a:srgbClr val="E3F2FD"/>
                     </a:solidFill>
                   </a:tcPr>
                 </a:tc>
@@ -12898,10 +13120,10 @@
                       <a:r>
                         <a:rPr lang="en-US" sz="600" dirty="0">
                           <a:solidFill>
-                            <a:srgbClr val="333333"/>
-                          </a:solidFill>
-                        </a:rPr>
-                        <a:t>1:1</a:t>
+                            <a:srgbClr val="000000"/>
+                          </a:solidFill>
+                        </a:rPr>
+                        <a:t>🗣</a:t>
                       </a:r>
                       <a:endParaRPr lang="en-US" sz="600" dirty="0"/>
                     </a:p>
@@ -12961,8 +13183,8 @@
         </p:nvSpPr>
         <p:spPr>
           <a:xfrm>
-            <a:off x="182880" y="4846320"/>
-            <a:ext cx="7132320" cy="731520"/>
+            <a:off x="182880" y="4754880"/>
+            <a:ext cx="7132320" cy="274320"/>
           </a:xfrm>
           <a:prstGeom prst="rect">
             <a:avLst/>
@@ -12978,14 +13200,50 @@
               <a:buNone/>
             </a:pPr>
             <a:r>
-              <a:rPr lang="en-US" sz="800" dirty="0">
+              <a:rPr lang="en-US" sz="900" dirty="0">
+                <a:solidFill>
+                  <a:srgbClr val="888888"/>
+                </a:solidFill>
+              </a:rPr>
+              <a:t>🗣＝口說　✏️＝寫作</a:t>
+            </a:r>
+            <a:endParaRPr lang="en-US" sz="900" dirty="0"/>
+          </a:p>
+        </p:txBody>
+      </p:sp>
+      <p:sp>
+        <p:nvSpPr>
+          <p:cNvPr id="6" name="Text 3"/>
+          <p:cNvSpPr/>
+          <p:nvPr/>
+        </p:nvSpPr>
+        <p:spPr>
+          <a:xfrm>
+            <a:off x="182880" y="5120640"/>
+            <a:ext cx="7132320" cy="548640"/>
+          </a:xfrm>
+          <a:prstGeom prst="rect">
+            <a:avLst/>
+          </a:prstGeom>
+          <a:noFill/>
+          <a:ln/>
+        </p:spPr>
+        <p:txBody>
+          <a:bodyPr wrap="square" rtlCol="0" anchor="ctr"/>
+          <a:lstStyle/>
+          <a:p>
+            <a:pPr indent="0" marL="0">
+              <a:buNone/>
+            </a:pPr>
+            <a:r>
+              <a:rPr lang="en-US" sz="700" dirty="0">
                 <a:solidFill>
                   <a:srgbClr val="333333"/>
                 </a:solidFill>
               </a:rPr>
-              <a:t>✅ 每人 1:1 堂數：愷晴×4　愷甯×4　沛沛×4　棣×4　皓宸×4　皓宇×4　Alice×4　奕安×4　言穆×4　樂樂×4　Emily×4　Johnny×4　宏森×4　駿睿×4　昱臣×4</a:t>
+              <a:t>✅ 每人皆口說×2＋寫作×2：愷晴(2+2)　愷甯(2+2)　沛沛(2+2)　棣(2+2)　皓宸(2+2)　皓宇(2+2)　Alice(2+2)　奕安(2+2)　言穆(2+2)　樂樂(2+2)　Emily(2+2)　Johnny(2+2)　宏森(2+2)　駿睿(2+2)　昱臣(2+2)</a:t>
             </a:r>
-            <a:endParaRPr lang="en-US" sz="800" dirty="0"/>
+            <a:endParaRPr lang="en-US" sz="700" dirty="0"/>
           </a:p>
         </p:txBody>
       </p:sp>
@@ -13082,9 +13340,9 @@
               <a:tblGrid>
                 <a:gridCol w="640080"/>
                 <a:gridCol w="457200"/>
-                <a:gridCol w="2743200"/>
-                <a:gridCol w="914400"/>
-                <a:gridCol w="2194560"/>
+                <a:gridCol w="3108960"/>
+                <a:gridCol w="731520"/>
+                <a:gridCol w="2377440"/>
               </a:tblGrid>
               <a:tr h="457200">
                 <a:tc>
@@ -13237,7 +13495,7 @@
                             <a:srgbClr val="FFFFFF"/>
                           </a:solidFill>
                         </a:rPr>
-                        <a:t>08:00-11:50</a:t>
+                        <a:t>08:00-12:00</a:t>
                       </a:r>
                       <a:endParaRPr lang="en-US" sz="900" dirty="0"/>
                     </a:p>
@@ -13373,7 +13631,7 @@
                             <a:srgbClr val="FFFFFF"/>
                           </a:solidFill>
                         </a:rPr>
-                        <a:t>13:00-16:50</a:t>
+                        <a:t>13:00-17:00</a:t>
                       </a:r>
                       <a:endParaRPr lang="en-US" sz="900" dirty="0"/>
                     </a:p>
@@ -13552,7 +13810,7 @@
                             <a:srgbClr val="000000"/>
                           </a:solidFill>
                         </a:rPr>
-                        <a:t>1:1×2 + 團體×1 + 自修×1</a:t>
+                        <a:t>口說1:1×2＋寫作1:1×1＋團體×1</a:t>
                       </a:r>
                       <a:endParaRPr lang="en-US" sz="800" dirty="0"/>
                     </a:p>
@@ -13674,7 +13932,7 @@
                             <a:srgbClr val="000000"/>
                           </a:solidFill>
                         </a:rPr>
-                        <a:t>1:1×2 + 團體×1 + 自修×1</a:t>
+                        <a:t>口說1:1×1＋寫作1:1×1＋團體×1＋自修×1</a:t>
                       </a:r>
                       <a:endParaRPr lang="en-US" sz="800" dirty="0"/>
                     </a:p>
